--- a/en/week-7/cen429-week-7-sunum.pptx
+++ b/en/week-7/cen429-week-7-sunum.pptx
@@ -20,30 +20,6 @@
     <p:sldId id="268" r:id="rId20"/>
     <p:sldId id="269" r:id="rId21"/>
     <p:sldId id="270" r:id="rId22"/>
-    <p:sldId id="271" r:id="rId23"/>
-    <p:sldId id="272" r:id="rId24"/>
-    <p:sldId id="273" r:id="rId25"/>
-    <p:sldId id="274" r:id="rId26"/>
-    <p:sldId id="275" r:id="rId27"/>
-    <p:sldId id="276" r:id="rId28"/>
-    <p:sldId id="277" r:id="rId29"/>
-    <p:sldId id="278" r:id="rId30"/>
-    <p:sldId id="279" r:id="rId31"/>
-    <p:sldId id="280" r:id="rId32"/>
-    <p:sldId id="281" r:id="rId33"/>
-    <p:sldId id="282" r:id="rId34"/>
-    <p:sldId id="283" r:id="rId35"/>
-    <p:sldId id="284" r:id="rId36"/>
-    <p:sldId id="285" r:id="rId37"/>
-    <p:sldId id="286" r:id="rId38"/>
-    <p:sldId id="287" r:id="rId39"/>
-    <p:sldId id="288" r:id="rId40"/>
-    <p:sldId id="289" r:id="rId41"/>
-    <p:sldId id="290" r:id="rId42"/>
-    <p:sldId id="291" r:id="rId43"/>
-    <p:sldId id="292" r:id="rId44"/>
-    <p:sldId id="293" r:id="rId45"/>
-    <p:sldId id="294" r:id="rId46"/>
   </p:sldIdLst>
   <p:sldSz cx="12191695" cy="6858000" type="screen4x3"/>
   <p:notesSz cx="6858000" cy="9144000"/>
@@ -541,76 +517,6 @@
           <a:p>
             <a:r>
               <a:t>Speaker note: This week is not a lecture but a demonstration week: each team shows the midterm sections of its security guide and its working application.</a:t>
-            </a:r>
-          </a:p>
-        </p:txBody>
-      </p:sp>
-      <p:sp>
-        <p:nvSpPr>
-          <p:cNvPr id="4" name="Slide Number Placeholder 3"/>
-          <p:cNvSpPr>
-            <a:spLocks noGrp="1"/>
-          </p:cNvSpPr>
-          <p:nvPr>
-            <p:ph type="sldNum" idx="5" sz="quarter"/>
-          </p:nvPr>
-        </p:nvSpPr>
-        <p:spPr/>
-      </p:sp>
-    </p:spTree>
-  </p:cSld>
-  <p:clrMapOvr>
-    <a:masterClrMapping/>
-  </p:clrMapOvr>
-</p:notes>
-</file>
-
-<file path=ppt/notesSlides/notesSlide2.xml><?xml version="1.0" encoding="utf-8"?>
-<p:notes xmlns:a="http://schemas.openxmlformats.org/drawingml/2006/main" xmlns:p="http://schemas.openxmlformats.org/presentationml/2006/main" xmlns:r="http://schemas.openxmlformats.org/officeDocument/2006/relationships">
-  <p:cSld>
-    <p:spTree>
-      <p:nvGrpSpPr>
-        <p:cNvPr id="1" name=""/>
-        <p:cNvGrpSpPr/>
-        <p:nvPr/>
-      </p:nvGrpSpPr>
-      <p:grpSpPr>
-        <a:xfrm>
-          <a:off x="0" y="0"/>
-          <a:ext cx="0" cy="0"/>
-          <a:chOff x="0" y="0"/>
-          <a:chExt cx="0" cy="0"/>
-        </a:xfrm>
-      </p:grpSpPr>
-      <p:sp>
-        <p:nvSpPr>
-          <p:cNvPr id="2" name="Slide Image Placeholder 1"/>
-          <p:cNvSpPr>
-            <a:spLocks noGrp="1"/>
-          </p:cNvSpPr>
-          <p:nvPr>
-            <p:ph type="sldImg" idx="2"/>
-          </p:nvPr>
-        </p:nvSpPr>
-        <p:spPr/>
-      </p:sp>
-      <p:sp>
-        <p:nvSpPr>
-          <p:cNvPr id="3" name="Notes Placeholder 2"/>
-          <p:cNvSpPr>
-            <a:spLocks noGrp="1"/>
-          </p:cNvSpPr>
-          <p:nvPr>
-            <p:ph type="body" idx="3" sz="quarter"/>
-          </p:nvPr>
-        </p:nvSpPr>
-        <p:spPr/>
-        <p:txBody>
-          <a:bodyPr/>
-          <a:lstStyle/>
-          <a:p>
-            <a:r>
-              <a:t>Speaker note: For the midterm demonstration (RAP1), we explain what evidence each rubric item expects.</a:t>
             </a:r>
           </a:p>
         </p:txBody>
@@ -3973,7 +3879,7 @@
           <a:lstStyle/>
           <a:p>
             <a:r>
-              <a:rPr sz="3000" b="1">
+              <a:rPr sz="2600" b="1">
                 <a:solidFill>
                   <a:srgbClr val="006D77"/>
                 </a:solidFill>
@@ -3992,7 +3898,7 @@
         <p:spPr>
           <a:xfrm>
             <a:off x="640080" y="1325880"/>
-            <a:ext cx="10911535" cy="2346960"/>
+            <a:ext cx="10911535" cy="4069080"/>
           </a:xfrm>
           <a:prstGeom prst="rect">
             <a:avLst/>
@@ -4011,7 +3917,7 @@
               </a:spcAft>
             </a:pPr>
             <a:r>
-              <a:rPr sz="2000" b="1">
+              <a:rPr sz="1800" b="1">
                 <a:solidFill>
                   <a:srgbClr val="006D77"/>
                 </a:solidFill>
@@ -4019,7 +3925,7 @@
               <a:t>• </a:t>
             </a:r>
             <a:r>
-              <a:rPr sz="2000" b="0">
+              <a:rPr sz="1800" b="0">
                 <a:solidFill>
                   <a:srgbClr val="1F2D3A"/>
                 </a:solidFill>
@@ -4034,7 +3940,7 @@
               </a:spcAft>
             </a:pPr>
             <a:r>
-              <a:rPr sz="2000" b="1">
+              <a:rPr sz="1800" b="1">
                 <a:solidFill>
                   <a:srgbClr val="006D77"/>
                 </a:solidFill>
@@ -4042,7 +3948,7 @@
               <a:t>• </a:t>
             </a:r>
             <a:r>
-              <a:rPr sz="2000" b="0">
+              <a:rPr sz="1800" b="0">
                 <a:solidFill>
                   <a:srgbClr val="1F2D3A"/>
                 </a:solidFill>
@@ -4057,7 +3963,7 @@
               </a:spcAft>
             </a:pPr>
             <a:r>
-              <a:rPr sz="2000" b="1">
+              <a:rPr sz="1800" b="1">
                 <a:solidFill>
                   <a:srgbClr val="006D77"/>
                 </a:solidFill>
@@ -4065,12 +3971,12 @@
               <a:t>• </a:t>
             </a:r>
             <a:r>
-              <a:rPr sz="2000" b="0">
+              <a:rPr sz="1800" b="0">
                 <a:solidFill>
                   <a:srgbClr val="1F2D3A"/>
                 </a:solidFill>
               </a:rPr>
-              <a:t>Where does the key come from, where does it live? Can the nonce repeat?</a:t>
+              <a:t>Where does the key come from, where does it live, when is it deleted? Can the nonce repeat?</a:t>
             </a:r>
           </a:p>
           <a:p>
@@ -4080,7 +3986,7 @@
               </a:spcAft>
             </a:pPr>
             <a:r>
-              <a:rPr sz="2000" b="1">
+              <a:rPr sz="1800" b="1">
                 <a:solidFill>
                   <a:srgbClr val="006D77"/>
                 </a:solidFill>
@@ -4088,7 +3994,7 @@
               <a:t>• </a:t>
             </a:r>
             <a:r>
-              <a:rPr sz="2000" b="0">
+              <a:rPr sz="1800" b="0">
                 <a:solidFill>
                   <a:srgbClr val="1F2D3A"/>
                 </a:solidFill>
@@ -4103,7 +4009,7 @@
               </a:spcAft>
             </a:pPr>
             <a:r>
-              <a:rPr sz="2000" b="1">
+              <a:rPr sz="1800" b="1">
                 <a:solidFill>
                   <a:srgbClr val="006D77"/>
                 </a:solidFill>
@@ -4111,7 +4017,7 @@
               <a:t>• </a:t>
             </a:r>
             <a:r>
-              <a:rPr sz="2000" b="0">
+              <a:rPr sz="1800" b="0">
                 <a:solidFill>
                   <a:srgbClr val="1F2D3A"/>
                 </a:solidFill>
@@ -4126,7 +4032,7 @@
               </a:spcAft>
             </a:pPr>
             <a:r>
-              <a:rPr sz="2000" b="1">
+              <a:rPr sz="1800" b="1">
                 <a:solidFill>
                   <a:srgbClr val="006D77"/>
                 </a:solidFill>
@@ -4134,12 +4040,81 @@
               <a:t>• </a:t>
             </a:r>
             <a:r>
-              <a:rPr sz="2000" b="0">
+              <a:rPr sz="1800" b="0">
                 <a:solidFill>
                   <a:srgbClr val="1F2D3A"/>
                 </a:solidFill>
               </a:rPr>
               <a:t>Does the SBOM contain a vulnerable component? Are you affected?</a:t>
+            </a:r>
+          </a:p>
+          <a:p>
+            <a:pPr>
+              <a:spcAft>
+                <a:spcPts val="300"/>
+              </a:spcAft>
+            </a:pPr>
+            <a:r>
+              <a:rPr sz="1800" b="1">
+                <a:solidFill>
+                  <a:srgbClr val="006D77"/>
+                </a:solidFill>
+              </a:rPr>
+              <a:t>• </a:t>
+            </a:r>
+            <a:r>
+              <a:rPr sz="1800" b="0">
+                <a:solidFill>
+                  <a:srgbClr val="1F2D3A"/>
+                </a:solidFill>
+              </a:rPr>
+              <a:t>What are your three most critical assets, their C/I/I+ labels, and their lifecycle?</a:t>
+            </a:r>
+          </a:p>
+          <a:p>
+            <a:pPr>
+              <a:spcAft>
+                <a:spcPts val="300"/>
+              </a:spcAft>
+            </a:pPr>
+            <a:r>
+              <a:rPr sz="1800" b="1">
+                <a:solidFill>
+                  <a:srgbClr val="006D77"/>
+                </a:solidFill>
+              </a:rPr>
+              <a:t>• </a:t>
+            </a:r>
+            <a:r>
+              <a:rPr sz="1800" b="0">
+                <a:solidFill>
+                  <a:srgbClr val="1F2D3A"/>
+                </a:solidFill>
+              </a:rPr>
+              <a:t>Which control addresses a given threat, and how was it verified? (threat → control → evidence)</a:t>
+            </a:r>
+          </a:p>
+          <a:p>
+            <a:pPr>
+              <a:spcAft>
+                <a:spcPts val="300"/>
+              </a:spcAft>
+            </a:pPr>
+            <a:r>
+              <a:rPr sz="1800" b="1">
+                <a:solidFill>
+                  <a:srgbClr val="006D77"/>
+                </a:solidFill>
+              </a:rPr>
+              <a:t>• </a:t>
+            </a:r>
+            <a:r>
+              <a:rPr sz="1800" b="0">
+                <a:solidFill>
+                  <a:srgbClr val="1F2D3A"/>
+                </a:solidFill>
+              </a:rPr>
+              <a:t>What is your remaining risk, and why is it acceptable? (answer honestly and with justification)</a:t>
             </a:r>
           </a:p>
         </p:txBody>
@@ -4329,7 +4304,7 @@
         </p:nvGraphicFramePr>
         <p:xfrm>
           <a:off x="640080" y="1325880"/>
-          <a:ext cx="10911534" cy="2403043"/>
+          <a:ext cx="10911534" cy="2940710"/>
         </p:xfrm>
         <a:graphic>
           <a:graphicData uri="http://schemas.openxmlformats.org/drawingml/2006/table">
@@ -4338,10 +4313,10 @@
                 <a:tableStyleId>{5C22544A-7EE6-4342-B048-85BDC9FD1C3A}</a:tableStyleId>
               </a:tblPr>
               <a:tblGrid>
-                <a:gridCol w="4792917"/>
-                <a:gridCol w="6118617"/>
+                <a:gridCol w="5951746"/>
+                <a:gridCol w="4959788"/>
               </a:tblGrid>
-              <a:tr h="343291">
+              <a:tr h="367588">
                 <a:tc>
                   <a:txBody>
                     <a:bodyPr wrap="square"/>
@@ -4385,7 +4360,7 @@
                   </a:tcPr>
                 </a:tc>
               </a:tr>
-              <a:tr h="343291">
+              <a:tr h="367588">
                 <a:tc>
                   <a:txBody>
                     <a:bodyPr wrap="square"/>
@@ -4429,7 +4404,7 @@
                   </a:tcPr>
                 </a:tc>
               </a:tr>
-              <a:tr h="343291">
+              <a:tr h="367588">
                 <a:tc>
                   <a:txBody>
                     <a:bodyPr wrap="square"/>
@@ -4473,7 +4448,7 @@
                   </a:tcPr>
                 </a:tc>
               </a:tr>
-              <a:tr h="343291">
+              <a:tr h="367588">
                 <a:tc>
                   <a:txBody>
                     <a:bodyPr wrap="square"/>
@@ -4517,7 +4492,7 @@
                   </a:tcPr>
                 </a:tc>
               </a:tr>
-              <a:tr h="343291">
+              <a:tr h="367588">
                 <a:tc>
                   <a:txBody>
                     <a:bodyPr wrap="square"/>
@@ -4561,7 +4536,7 @@
                   </a:tcPr>
                 </a:tc>
               </a:tr>
-              <a:tr h="343291">
+              <a:tr h="367588">
                 <a:tc>
                   <a:txBody>
                     <a:bodyPr wrap="square"/>
@@ -4605,7 +4580,7 @@
                   </a:tcPr>
                 </a:tc>
               </a:tr>
-              <a:tr h="343297">
+              <a:tr h="367588">
                 <a:tc>
                   <a:txBody>
                     <a:bodyPr wrap="square"/>
@@ -4657,6 +4632,50 @@
                   </a:tcPr>
                 </a:tc>
               </a:tr>
+              <a:tr h="367594">
+                <a:tc>
+                  <a:txBody>
+                    <a:bodyPr wrap="square"/>
+                    <a:lstStyle/>
+                    <a:p>
+                      <a:r>
+                        <a:rPr sz="1296" b="0">
+                          <a:solidFill>
+                            <a:srgbClr val="1F2D3A"/>
+                          </a:solidFill>
+                        </a:rPr>
+                        <a:t>Live demo crashes with no backup / remaining-risk section left empty</a:t>
+                      </a:r>
+                    </a:p>
+                  </a:txBody>
+                  <a:tcPr marL="54864" marR="54864" marT="27432" marB="27432" anchor="ctr">
+                    <a:solidFill>
+                      <a:srgbClr val="FFFFFF"/>
+                    </a:solidFill>
+                  </a:tcPr>
+                </a:tc>
+                <a:tc>
+                  <a:txBody>
+                    <a:bodyPr wrap="square"/>
+                    <a:lstStyle/>
+                    <a:p>
+                      <a:r>
+                        <a:rPr sz="1296" b="0">
+                          <a:solidFill>
+                            <a:srgbClr val="1F2D3A"/>
+                          </a:solidFill>
+                        </a:rPr>
+                        <a:t>Looks like a lack of preparation and honest analysis</a:t>
+                      </a:r>
+                    </a:p>
+                  </a:txBody>
+                  <a:tcPr marL="54864" marR="54864" marT="27432" marB="27432" anchor="ctr">
+                    <a:solidFill>
+                      <a:srgbClr val="FFFFFF"/>
+                    </a:solidFill>
+                  </a:tcPr>
+                </a:tc>
+              </a:tr>
             </a:tbl>
           </a:graphicData>
         </a:graphic>
@@ -4852,8 +4871,8 @@
         </p:blipFill>
         <p:spPr>
           <a:xfrm>
-            <a:off x="2046645" y="1325880"/>
-            <a:ext cx="8098404" cy="3473778"/>
+            <a:off x="640080" y="1325880"/>
+            <a:ext cx="10911535" cy="3481384"/>
           </a:xfrm>
           <a:prstGeom prst="rect">
             <a:avLst/>
@@ -5030,7 +5049,7 @@
                   <a:srgbClr val="006D77"/>
                 </a:solidFill>
               </a:rPr>
-              <a:t>Academic Integrity and After</a:t>
+              <a:t>Academic Integrity</a:t>
             </a:r>
           </a:p>
         </p:txBody>
@@ -5044,7 +5063,7 @@
         <p:spPr>
           <a:xfrm>
             <a:off x="640080" y="1325880"/>
-            <a:ext cx="10911535" cy="1549400"/>
+            <a:ext cx="10911535" cy="1879600"/>
           </a:xfrm>
           <a:prstGeom prst="rect">
             <a:avLst/>
@@ -5130,99 +5149,7 @@
                   <a:srgbClr val="1F2D3A"/>
                 </a:solidFill>
               </a:rPr>
-              <a:t>Any team member may be asked a question</a:t>
-            </a:r>
-          </a:p>
-        </p:txBody>
-      </p:sp>
-      <p:sp>
-        <p:nvSpPr>
-          <p:cNvPr id="8" name="TextBox 7"/>
-          <p:cNvSpPr txBox="1"/>
-          <p:nvPr/>
-        </p:nvSpPr>
-        <p:spPr>
-          <a:xfrm>
-            <a:off x="640080" y="2985008"/>
-            <a:ext cx="10911535" cy="770128"/>
-          </a:xfrm>
-          <a:prstGeom prst="rect">
-            <a:avLst/>
-          </a:prstGeom>
-          <a:noFill/>
-        </p:spPr>
-        <p:txBody>
-          <a:bodyPr wrap="square" lIns="45720" rIns="45720">
-            <a:spAutoFit/>
-          </a:bodyPr>
-          <a:lstStyle/>
-          <a:p>
-            <a:pPr algn="l"/>
-            <a:r>
-              <a:rPr sz="2000" b="1">
-                <a:solidFill>
-                  <a:srgbClr val="1F2D3A"/>
-                </a:solidFill>
-              </a:rPr>
-              <a:t>After the demonstration:</a:t>
-            </a:r>
-            <a:r>
-              <a:rPr sz="2000" b="0">
-                <a:solidFill>
-                  <a:srgbClr val="1F2D3A"/>
-                </a:solidFill>
-              </a:rPr>
-              <a:t> write the feedback as a </a:t>
-            </a:r>
-            <a:r>
-              <a:rPr sz="2000" b="1">
-                <a:solidFill>
-                  <a:srgbClr val="1F2D3A"/>
-                </a:solidFill>
-              </a:rPr>
-              <a:t>finding list</a:t>
-            </a:r>
-            <a:r>
-              <a:rPr sz="2000" b="0">
-                <a:solidFill>
-                  <a:srgbClr val="1F2D3A"/>
-                </a:solidFill>
-              </a:rPr>
-              <a:t> (finding · severity · fix · date) → a small model of Week 12</a:t>
-            </a:r>
-          </a:p>
-        </p:txBody>
-      </p:sp>
-      <p:sp>
-        <p:nvSpPr>
-          <p:cNvPr id="9" name="TextBox 8"/>
-          <p:cNvSpPr txBox="1"/>
-          <p:nvPr/>
-        </p:nvSpPr>
-        <p:spPr>
-          <a:xfrm>
-            <a:off x="640080" y="3864864"/>
-            <a:ext cx="10911535" cy="439928"/>
-          </a:xfrm>
-          <a:prstGeom prst="rect">
-            <a:avLst/>
-          </a:prstGeom>
-          <a:noFill/>
-        </p:spPr>
-        <p:txBody>
-          <a:bodyPr wrap="square" lIns="45720" rIns="45720">
-            <a:spAutoFit/>
-          </a:bodyPr>
-          <a:lstStyle/>
-          <a:p>
-            <a:pPr algn="l"/>
-            <a:r>
-              <a:rPr sz="2000" b="0">
-                <a:solidFill>
-                  <a:srgbClr val="1F2D3A"/>
-                </a:solidFill>
-              </a:rPr>
-              <a:t>Final sections: S6 · S8 · S11 · S14 · S15 · S16 results · S17</a:t>
+              <a:t>Any team member should be able to present their own section; anyone may be asked a question</a:t>
             </a:r>
           </a:p>
         </p:txBody>
@@ -5397,7 +5324,7 @@
                   <a:srgbClr val="006D77"/>
                 </a:solidFill>
               </a:rPr>
-              <a:t>Next Week</a:t>
+              <a:t>After the Demonstration</a:t>
             </a:r>
           </a:p>
         </p:txBody>
@@ -5411,41 +5338,7 @@
         <p:spPr>
           <a:xfrm>
             <a:off x="640080" y="1325880"/>
-            <a:ext cx="10911535" cy="439928"/>
-          </a:xfrm>
-          <a:prstGeom prst="rect">
-            <a:avLst/>
-          </a:prstGeom>
-          <a:noFill/>
-        </p:spPr>
-        <p:txBody>
-          <a:bodyPr wrap="square" lIns="45720" rIns="45720">
-            <a:spAutoFit/>
-          </a:bodyPr>
-          <a:lstStyle/>
-          <a:p>
-            <a:pPr algn="l"/>
-            <a:r>
-              <a:rPr sz="2000" b="1">
-                <a:solidFill>
-                  <a:srgbClr val="1F2D3A"/>
-                </a:solidFill>
-              </a:rPr>
-              <a:t>Week 8 — Midterm Exam Week: Quiz-1</a:t>
-            </a:r>
-          </a:p>
-        </p:txBody>
-      </p:sp>
-      <p:sp>
-        <p:nvSpPr>
-          <p:cNvPr id="8" name="TextBox 7"/>
-          <p:cNvSpPr txBox="1"/>
-          <p:nvPr/>
-        </p:nvSpPr>
-        <p:spPr>
-          <a:xfrm>
-            <a:off x="640080" y="1875536"/>
-            <a:ext cx="10911535" cy="843280"/>
+            <a:ext cx="10911535" cy="1173480"/>
           </a:xfrm>
           <a:prstGeom prst="rect">
             <a:avLst/>
@@ -5477,7 +5370,23 @@
                   <a:srgbClr val="1F2D3A"/>
                 </a:solidFill>
               </a:rPr>
-              <a:t>Scope: weeks 1–6</a:t>
+              <a:t>Write the feedback as a </a:t>
+            </a:r>
+            <a:r>
+              <a:rPr sz="2000" b="1">
+                <a:solidFill>
+                  <a:srgbClr val="1F2D3A"/>
+                </a:solidFill>
+              </a:rPr>
+              <a:t>finding list</a:t>
+            </a:r>
+            <a:r>
+              <a:rPr sz="2000" b="0">
+                <a:solidFill>
+                  <a:srgbClr val="1F2D3A"/>
+                </a:solidFill>
+              </a:rPr>
+              <a:t> (finding · severity · fix · date) → a small model of Week 12</a:t>
             </a:r>
           </a:p>
           <a:p>
@@ -5500,7 +5409,76 @@
                   <a:srgbClr val="1F2D3A"/>
                 </a:solidFill>
               </a:rPr>
-              <a:t>Study guide and sample questions: Week 8 page</a:t>
+              <a:t>Final sections: S6 · S8 · S11 · S14 · S15 · S16 results · S17</a:t>
+            </a:r>
+          </a:p>
+        </p:txBody>
+      </p:sp>
+      <p:sp>
+        <p:nvSpPr>
+          <p:cNvPr id="8" name="Rectangle 7"/>
+          <p:cNvSpPr/>
+          <p:nvPr/>
+        </p:nvSpPr>
+        <p:spPr>
+          <a:xfrm>
+            <a:off x="640080" y="2609088"/>
+            <a:ext cx="10911535" cy="934719"/>
+          </a:xfrm>
+          <a:prstGeom prst="rect">
+            <a:avLst/>
+          </a:prstGeom>
+          <a:solidFill>
+            <a:srgbClr val="EEF7F8"/>
+          </a:solidFill>
+          <a:ln>
+            <a:solidFill>
+              <a:srgbClr val="006D77"/>
+            </a:solidFill>
+          </a:ln>
+        </p:spPr>
+        <p:style>
+          <a:lnRef idx="1">
+            <a:schemeClr val="accent1"/>
+          </a:lnRef>
+          <a:fillRef idx="3">
+            <a:schemeClr val="accent1"/>
+          </a:fillRef>
+          <a:effectRef idx="2">
+            <a:schemeClr val="accent1"/>
+          </a:effectRef>
+          <a:fontRef idx="minor">
+            <a:schemeClr val="lt1"/>
+          </a:fontRef>
+        </p:style>
+        <p:txBody>
+          <a:bodyPr rtlCol="0" anchor="ctr" wrap="square" lIns="182880"/>
+          <a:lstStyle/>
+          <a:p>
+            <a:pPr algn="l"/>
+            <a:r>
+              <a:rPr sz="2000" b="0">
+                <a:solidFill>
+                  <a:srgbClr val="1F2D3A"/>
+                </a:solidFill>
+              </a:rPr>
+              <a:t>A demonstration is a presentation of </a:t>
+            </a:r>
+            <a:r>
+              <a:rPr sz="2000" b="1">
+                <a:solidFill>
+                  <a:srgbClr val="1F2D3A"/>
+                </a:solidFill>
+              </a:rPr>
+              <a:t>evidence</a:t>
+            </a:r>
+            <a:r>
+              <a:rPr sz="2000" b="0">
+                <a:solidFill>
+                  <a:srgbClr val="1F2D3A"/>
+                </a:solidFill>
+              </a:rPr>
+              <a:t>: every claim should be backed by a document, a test, or live output.</a:t>
             </a:r>
           </a:p>
         </p:txBody>
@@ -5514,166 +5492,6 @@
 </file>
 
 <file path=ppt/slides/slide15.xml><?xml version="1.0" encoding="utf-8"?>
-<p:sld xmlns:a="http://schemas.openxmlformats.org/drawingml/2006/main" xmlns:p="http://schemas.openxmlformats.org/presentationml/2006/main" xmlns:r="http://schemas.openxmlformats.org/officeDocument/2006/relationships">
-  <p:cSld>
-    <p:bg>
-      <p:bgPr>
-        <a:solidFill>
-          <a:srgbClr val="006D77"/>
-        </a:solidFill>
-        <a:effectLst/>
-      </p:bgPr>
-    </p:bg>
-    <p:spTree>
-      <p:nvGrpSpPr>
-        <p:cNvPr id="1" name=""/>
-        <p:cNvGrpSpPr/>
-        <p:nvPr/>
-      </p:nvGrpSpPr>
-      <p:grpSpPr/>
-      <p:sp>
-        <p:nvSpPr>
-          <p:cNvPr id="2" name="TextBox 1"/>
-          <p:cNvSpPr txBox="1"/>
-          <p:nvPr/>
-        </p:nvSpPr>
-        <p:spPr>
-          <a:xfrm>
-            <a:off x="1051560" y="182880"/>
-            <a:ext cx="7315200" cy="320040"/>
-          </a:xfrm>
-          <a:prstGeom prst="rect">
-            <a:avLst/>
-          </a:prstGeom>
-          <a:noFill/>
-        </p:spPr>
-        <p:txBody>
-          <a:bodyPr wrap="square" lIns="45720" rIns="45720">
-            <a:spAutoFit/>
-          </a:bodyPr>
-          <a:lstStyle/>
-          <a:p>
-            <a:r>
-              <a:rPr sz="1100" b="0">
-                <a:solidFill>
-                  <a:srgbClr val="D8F0F2"/>
-                </a:solidFill>
-              </a:rPr>
-              <a:t>CEN429 Secure Programming · Week 7</a:t>
-            </a:r>
-          </a:p>
-        </p:txBody>
-      </p:sp>
-      <p:sp>
-        <p:nvSpPr>
-          <p:cNvPr id="3" name="TextBox 2"/>
-          <p:cNvSpPr txBox="1"/>
-          <p:nvPr/>
-        </p:nvSpPr>
-        <p:spPr>
-          <a:xfrm>
-            <a:off x="640080" y="6446520"/>
-            <a:ext cx="7315200" cy="274320"/>
-          </a:xfrm>
-          <a:prstGeom prst="rect">
-            <a:avLst/>
-          </a:prstGeom>
-          <a:noFill/>
-        </p:spPr>
-        <p:txBody>
-          <a:bodyPr wrap="square" lIns="45720" rIns="45720">
-            <a:spAutoFit/>
-          </a:bodyPr>
-          <a:lstStyle/>
-          <a:p>
-            <a:r>
-              <a:rPr sz="1000" b="0">
-                <a:solidFill>
-                  <a:srgbClr val="D8F0F2"/>
-                </a:solidFill>
-              </a:rPr>
-              <a:t>RTEU Computer Engineering · 2026-2027 Fall</a:t>
-            </a:r>
-          </a:p>
-        </p:txBody>
-      </p:sp>
-      <p:sp>
-        <p:nvSpPr>
-          <p:cNvPr id="4" name="TextBox 3"/>
-          <p:cNvSpPr txBox="1"/>
-          <p:nvPr/>
-        </p:nvSpPr>
-        <p:spPr>
-          <a:xfrm>
-            <a:off x="10637215" y="6446520"/>
-            <a:ext cx="914400" cy="274320"/>
-          </a:xfrm>
-          <a:prstGeom prst="rect">
-            <a:avLst/>
-          </a:prstGeom>
-          <a:noFill/>
-        </p:spPr>
-        <p:txBody>
-          <a:bodyPr wrap="square" lIns="45720" rIns="45720">
-            <a:spAutoFit/>
-          </a:bodyPr>
-          <a:lstStyle/>
-          <a:p>
-            <a:pPr algn="r"/>
-            <a:r>
-              <a:rPr sz="1000" b="0">
-                <a:solidFill>
-                  <a:srgbClr val="D8F0F2"/>
-                </a:solidFill>
-              </a:rPr>
-              <a:t>15</a:t>
-            </a:r>
-          </a:p>
-        </p:txBody>
-      </p:sp>
-      <p:sp>
-        <p:nvSpPr>
-          <p:cNvPr id="5" name="TextBox 4"/>
-          <p:cNvSpPr txBox="1"/>
-          <p:nvPr/>
-        </p:nvSpPr>
-        <p:spPr>
-          <a:xfrm>
-            <a:off x="640080" y="2743200"/>
-            <a:ext cx="10911535" cy="1280160"/>
-          </a:xfrm>
-          <a:prstGeom prst="rect">
-            <a:avLst/>
-          </a:prstGeom>
-          <a:noFill/>
-        </p:spPr>
-        <p:txBody>
-          <a:bodyPr wrap="square" lIns="45720" rIns="45720">
-            <a:spAutoFit/>
-          </a:bodyPr>
-          <a:lstStyle/>
-          <a:p>
-            <a:pPr algn="l"/>
-            <a:r>
-              <a:rPr sz="4000" b="1">
-                <a:solidFill>
-                  <a:srgbClr val="FFFFFF"/>
-                </a:solidFill>
-              </a:rPr>
-              <a:t>Appendix · Rubric Item by Item</a:t>
-            </a:r>
-          </a:p>
-        </p:txBody>
-      </p:sp>
-    </p:spTree>
-  </p:cSld>
-  <p:clrMapOvr>
-    <a:masterClrMapping/>
-  </p:clrMapOvr>
-</p:sld>
-</file>
-
-<file path=ppt/slides/slide16.xml><?xml version="1.0" encoding="utf-8"?>
 <p:sld xmlns:a="http://schemas.openxmlformats.org/drawingml/2006/main" xmlns:p="http://schemas.openxmlformats.org/presentationml/2006/main" xmlns:r="http://schemas.openxmlformats.org/officeDocument/2006/relationships">
   <p:cSld>
     <p:spTree>
@@ -5802,7 +5620,7 @@
                   <a:srgbClr val="5B6770"/>
                 </a:solidFill>
               </a:rPr>
-              <a:t>16</a:t>
+              <a:t>15</a:t>
             </a:r>
           </a:p>
         </p:txBody>
@@ -5835,7 +5653,7 @@
                   <a:srgbClr val="006D77"/>
                 </a:solidFill>
               </a:rPr>
-              <a:t>What Does the Rubric Measure?</a:t>
+              <a:t>Next Week</a:t>
             </a:r>
           </a:p>
         </p:txBody>
@@ -5864,28 +5682,12 @@
           <a:p>
             <a:pPr algn="l"/>
             <a:r>
-              <a:rPr sz="2000" b="0">
+              <a:rPr sz="2000" b="1">
                 <a:solidFill>
                   <a:srgbClr val="1F2D3A"/>
                 </a:solidFill>
               </a:rPr>
-              <a:t>The midterm demonstration measures the </a:t>
-            </a:r>
-            <a:r>
-              <a:rPr sz="2000" b="1">
-                <a:solidFill>
-                  <a:srgbClr val="1F2D3A"/>
-                </a:solidFill>
-              </a:rPr>
-              <a:t>first half</a:t>
-            </a:r>
-            <a:r>
-              <a:rPr sz="2000" b="0">
-                <a:solidFill>
-                  <a:srgbClr val="1F2D3A"/>
-                </a:solidFill>
-              </a:rPr>
-              <a:t> of your project:</a:t>
+              <a:t>Week 8 — Midterm Exam Week: Quiz-1</a:t>
             </a:r>
           </a:p>
         </p:txBody>
@@ -5899,7 +5701,7 @@
         <p:spPr>
           <a:xfrm>
             <a:off x="640080" y="1875536"/>
-            <a:ext cx="10911535" cy="1595120"/>
+            <a:ext cx="10911535" cy="843280"/>
           </a:xfrm>
           <a:prstGeom prst="rect">
             <a:avLst/>
@@ -5931,7 +5733,7 @@
                   <a:srgbClr val="1F2D3A"/>
                 </a:solidFill>
               </a:rPr>
-              <a:t>product, architecture, threat model</a:t>
+              <a:t>Scope: weeks 1–6</a:t>
             </a:r>
           </a:p>
           <a:p>
@@ -5954,878 +5756,7 @@
                   <a:srgbClr val="1F2D3A"/>
                 </a:solidFill>
               </a:rPr>
-              <a:t>asset management</a:t>
-            </a:r>
-          </a:p>
-          <a:p>
-            <a:pPr>
-              <a:spcAft>
-                <a:spcPts val="300"/>
-              </a:spcAft>
-            </a:pPr>
-            <a:r>
-              <a:rPr sz="2000" b="1">
-                <a:solidFill>
-                  <a:srgbClr val="006D77"/>
-                </a:solidFill>
-              </a:rPr>
-              <a:t>• </a:t>
-            </a:r>
-            <a:r>
-              <a:rPr sz="2000" b="0">
-                <a:solidFill>
-                  <a:srgbClr val="1F2D3A"/>
-                </a:solidFill>
-              </a:rPr>
-              <a:t>basic protections</a:t>
-            </a:r>
-          </a:p>
-          <a:p>
-            <a:pPr>
-              <a:spcAft>
-                <a:spcPts val="300"/>
-              </a:spcAft>
-            </a:pPr>
-            <a:r>
-              <a:rPr sz="2000" b="1">
-                <a:solidFill>
-                  <a:srgbClr val="006D77"/>
-                </a:solidFill>
-              </a:rPr>
-              <a:t>• </a:t>
-            </a:r>
-            <a:r>
-              <a:rPr sz="2000" b="0">
-                <a:solidFill>
-                  <a:srgbClr val="1F2D3A"/>
-                </a:solidFill>
-              </a:rPr>
-              <a:t>documentation and presentation</a:t>
-            </a:r>
-          </a:p>
-        </p:txBody>
-      </p:sp>
-    </p:spTree>
-  </p:cSld>
-  <p:clrMapOvr>
-    <a:masterClrMapping/>
-  </p:clrMapOvr>
-</p:sld>
-</file>
-
-<file path=ppt/slides/slide17.xml><?xml version="1.0" encoding="utf-8"?>
-<p:sld xmlns:a="http://schemas.openxmlformats.org/drawingml/2006/main" xmlns:p="http://schemas.openxmlformats.org/presentationml/2006/main" xmlns:r="http://schemas.openxmlformats.org/officeDocument/2006/relationships">
-  <p:cSld>
-    <p:spTree>
-      <p:nvGrpSpPr>
-        <p:cNvPr id="1" name=""/>
-        <p:cNvGrpSpPr/>
-        <p:nvPr/>
-      </p:nvGrpSpPr>
-      <p:grpSpPr/>
-      <p:pic>
-        <p:nvPicPr>
-          <p:cNvPr id="2" name="Picture 1" descr="rteu_logo_kucuk.jpg"/>
-          <p:cNvPicPr>
-            <a:picLocks noChangeAspect="1"/>
-          </p:cNvPicPr>
-          <p:nvPr/>
-        </p:nvPicPr>
-        <p:blipFill>
-          <a:blip r:embed="rId2"/>
-          <a:stretch>
-            <a:fillRect/>
-          </a:stretch>
-        </p:blipFill>
-        <p:spPr>
-          <a:xfrm>
-            <a:off x="640080" y="164592"/>
-            <a:ext cx="242773" cy="329184"/>
-          </a:xfrm>
-          <a:prstGeom prst="rect">
-            <a:avLst/>
-          </a:prstGeom>
-        </p:spPr>
-      </p:pic>
-      <p:sp>
-        <p:nvSpPr>
-          <p:cNvPr id="3" name="TextBox 2"/>
-          <p:cNvSpPr txBox="1"/>
-          <p:nvPr/>
-        </p:nvSpPr>
-        <p:spPr>
-          <a:xfrm>
-            <a:off x="1051560" y="182880"/>
-            <a:ext cx="7315200" cy="320040"/>
-          </a:xfrm>
-          <a:prstGeom prst="rect">
-            <a:avLst/>
-          </a:prstGeom>
-          <a:noFill/>
-        </p:spPr>
-        <p:txBody>
-          <a:bodyPr wrap="square" lIns="45720" rIns="45720">
-            <a:spAutoFit/>
-          </a:bodyPr>
-          <a:lstStyle/>
-          <a:p>
-            <a:r>
-              <a:rPr sz="1100" b="0">
-                <a:solidFill>
-                  <a:srgbClr val="5B6770"/>
-                </a:solidFill>
-              </a:rPr>
-              <a:t>CEN429 Secure Programming · Week 7</a:t>
-            </a:r>
-          </a:p>
-        </p:txBody>
-      </p:sp>
-      <p:sp>
-        <p:nvSpPr>
-          <p:cNvPr id="4" name="TextBox 3"/>
-          <p:cNvSpPr txBox="1"/>
-          <p:nvPr/>
-        </p:nvSpPr>
-        <p:spPr>
-          <a:xfrm>
-            <a:off x="640080" y="6446520"/>
-            <a:ext cx="7315200" cy="274320"/>
-          </a:xfrm>
-          <a:prstGeom prst="rect">
-            <a:avLst/>
-          </a:prstGeom>
-          <a:noFill/>
-        </p:spPr>
-        <p:txBody>
-          <a:bodyPr wrap="square" lIns="45720" rIns="45720">
-            <a:spAutoFit/>
-          </a:bodyPr>
-          <a:lstStyle/>
-          <a:p>
-            <a:r>
-              <a:rPr sz="1000" b="0">
-                <a:solidFill>
-                  <a:srgbClr val="5B6770"/>
-                </a:solidFill>
-              </a:rPr>
-              <a:t>RTEU Computer Engineering · 2026-2027 Fall</a:t>
-            </a:r>
-          </a:p>
-        </p:txBody>
-      </p:sp>
-      <p:sp>
-        <p:nvSpPr>
-          <p:cNvPr id="5" name="TextBox 4"/>
-          <p:cNvSpPr txBox="1"/>
-          <p:nvPr/>
-        </p:nvSpPr>
-        <p:spPr>
-          <a:xfrm>
-            <a:off x="10637215" y="6446520"/>
-            <a:ext cx="914400" cy="274320"/>
-          </a:xfrm>
-          <a:prstGeom prst="rect">
-            <a:avLst/>
-          </a:prstGeom>
-          <a:noFill/>
-        </p:spPr>
-        <p:txBody>
-          <a:bodyPr wrap="square" lIns="45720" rIns="45720">
-            <a:spAutoFit/>
-          </a:bodyPr>
-          <a:lstStyle/>
-          <a:p>
-            <a:pPr algn="r"/>
-            <a:r>
-              <a:rPr sz="1000" b="0">
-                <a:solidFill>
-                  <a:srgbClr val="5B6770"/>
-                </a:solidFill>
-              </a:rPr>
-              <a:t>17</a:t>
-            </a:r>
-          </a:p>
-        </p:txBody>
-      </p:sp>
-      <p:sp>
-        <p:nvSpPr>
-          <p:cNvPr id="6" name="TextBox 5"/>
-          <p:cNvSpPr txBox="1"/>
-          <p:nvPr/>
-        </p:nvSpPr>
-        <p:spPr>
-          <a:xfrm>
-            <a:off x="640080" y="548640"/>
-            <a:ext cx="10911535" cy="731520"/>
-          </a:xfrm>
-          <a:prstGeom prst="rect">
-            <a:avLst/>
-          </a:prstGeom>
-          <a:noFill/>
-        </p:spPr>
-        <p:txBody>
-          <a:bodyPr wrap="square" lIns="45720" rIns="45720" anchor="ctr">
-            <a:spAutoFit/>
-          </a:bodyPr>
-          <a:lstStyle/>
-          <a:p>
-            <a:r>
-              <a:rPr sz="3000" b="1">
-                <a:solidFill>
-                  <a:srgbClr val="006D77"/>
-                </a:solidFill>
-              </a:rPr>
-              <a:t>Item · Product and Architecture</a:t>
-            </a:r>
-          </a:p>
-        </p:txBody>
-      </p:sp>
-      <p:sp>
-        <p:nvSpPr>
-          <p:cNvPr id="7" name="TextBox 6"/>
-          <p:cNvSpPr txBox="1"/>
-          <p:nvPr/>
-        </p:nvSpPr>
-        <p:spPr>
-          <a:xfrm>
-            <a:off x="640080" y="1325880"/>
-            <a:ext cx="10911535" cy="1219200"/>
-          </a:xfrm>
-          <a:prstGeom prst="rect">
-            <a:avLst/>
-          </a:prstGeom>
-          <a:noFill/>
-        </p:spPr>
-        <p:txBody>
-          <a:bodyPr wrap="square" lIns="45720" rIns="45720">
-            <a:spAutoFit/>
-          </a:bodyPr>
-          <a:lstStyle/>
-          <a:p>
-            <a:pPr>
-              <a:spcAft>
-                <a:spcPts val="300"/>
-              </a:spcAft>
-            </a:pPr>
-            <a:r>
-              <a:rPr sz="2000" b="1">
-                <a:solidFill>
-                  <a:srgbClr val="006D77"/>
-                </a:solidFill>
-              </a:rPr>
-              <a:t>• </a:t>
-            </a:r>
-            <a:r>
-              <a:rPr sz="2000" b="0">
-                <a:solidFill>
-                  <a:srgbClr val="1F2D3A"/>
-                </a:solidFill>
-              </a:rPr>
-              <a:t>What does it do, which components?</a:t>
-            </a:r>
-          </a:p>
-          <a:p>
-            <a:pPr>
-              <a:spcAft>
-                <a:spcPts val="300"/>
-              </a:spcAft>
-            </a:pPr>
-            <a:r>
-              <a:rPr sz="2000" b="1">
-                <a:solidFill>
-                  <a:srgbClr val="006D77"/>
-                </a:solidFill>
-              </a:rPr>
-              <a:t>• </a:t>
-            </a:r>
-            <a:r>
-              <a:rPr sz="2000" b="0">
-                <a:solidFill>
-                  <a:srgbClr val="1F2D3A"/>
-                </a:solidFill>
-              </a:rPr>
-              <a:t>One diagram + the three most critical assets.</a:t>
-            </a:r>
-          </a:p>
-          <a:p>
-            <a:pPr>
-              <a:spcAft>
-                <a:spcPts val="300"/>
-              </a:spcAft>
-            </a:pPr>
-            <a:r>
-              <a:rPr sz="2000" b="1">
-                <a:solidFill>
-                  <a:srgbClr val="006D77"/>
-                </a:solidFill>
-              </a:rPr>
-              <a:t>• </a:t>
-            </a:r>
-            <a:r>
-              <a:rPr sz="2000" b="1">
-                <a:solidFill>
-                  <a:srgbClr val="1F2D3A"/>
-                </a:solidFill>
-              </a:rPr>
-              <a:t>Evidence:</a:t>
-            </a:r>
-            <a:r>
-              <a:rPr sz="2000" b="0">
-                <a:solidFill>
-                  <a:srgbClr val="1F2D3A"/>
-                </a:solidFill>
-              </a:rPr>
-              <a:t> S2–S4 documentation.</a:t>
-            </a:r>
-          </a:p>
-        </p:txBody>
-      </p:sp>
-    </p:spTree>
-  </p:cSld>
-  <p:clrMapOvr>
-    <a:masterClrMapping/>
-  </p:clrMapOvr>
-</p:sld>
-</file>
-
-<file path=ppt/slides/slide18.xml><?xml version="1.0" encoding="utf-8"?>
-<p:sld xmlns:a="http://schemas.openxmlformats.org/drawingml/2006/main" xmlns:p="http://schemas.openxmlformats.org/presentationml/2006/main" xmlns:r="http://schemas.openxmlformats.org/officeDocument/2006/relationships">
-  <p:cSld>
-    <p:spTree>
-      <p:nvGrpSpPr>
-        <p:cNvPr id="1" name=""/>
-        <p:cNvGrpSpPr/>
-        <p:nvPr/>
-      </p:nvGrpSpPr>
-      <p:grpSpPr/>
-      <p:pic>
-        <p:nvPicPr>
-          <p:cNvPr id="2" name="Picture 1" descr="rteu_logo_kucuk.jpg"/>
-          <p:cNvPicPr>
-            <a:picLocks noChangeAspect="1"/>
-          </p:cNvPicPr>
-          <p:nvPr/>
-        </p:nvPicPr>
-        <p:blipFill>
-          <a:blip r:embed="rId2"/>
-          <a:stretch>
-            <a:fillRect/>
-          </a:stretch>
-        </p:blipFill>
-        <p:spPr>
-          <a:xfrm>
-            <a:off x="640080" y="164592"/>
-            <a:ext cx="242773" cy="329184"/>
-          </a:xfrm>
-          <a:prstGeom prst="rect">
-            <a:avLst/>
-          </a:prstGeom>
-        </p:spPr>
-      </p:pic>
-      <p:sp>
-        <p:nvSpPr>
-          <p:cNvPr id="3" name="TextBox 2"/>
-          <p:cNvSpPr txBox="1"/>
-          <p:nvPr/>
-        </p:nvSpPr>
-        <p:spPr>
-          <a:xfrm>
-            <a:off x="1051560" y="182880"/>
-            <a:ext cx="7315200" cy="320040"/>
-          </a:xfrm>
-          <a:prstGeom prst="rect">
-            <a:avLst/>
-          </a:prstGeom>
-          <a:noFill/>
-        </p:spPr>
-        <p:txBody>
-          <a:bodyPr wrap="square" lIns="45720" rIns="45720">
-            <a:spAutoFit/>
-          </a:bodyPr>
-          <a:lstStyle/>
-          <a:p>
-            <a:r>
-              <a:rPr sz="1100" b="0">
-                <a:solidFill>
-                  <a:srgbClr val="5B6770"/>
-                </a:solidFill>
-              </a:rPr>
-              <a:t>CEN429 Secure Programming · Week 7</a:t>
-            </a:r>
-          </a:p>
-        </p:txBody>
-      </p:sp>
-      <p:sp>
-        <p:nvSpPr>
-          <p:cNvPr id="4" name="TextBox 3"/>
-          <p:cNvSpPr txBox="1"/>
-          <p:nvPr/>
-        </p:nvSpPr>
-        <p:spPr>
-          <a:xfrm>
-            <a:off x="640080" y="6446520"/>
-            <a:ext cx="7315200" cy="274320"/>
-          </a:xfrm>
-          <a:prstGeom prst="rect">
-            <a:avLst/>
-          </a:prstGeom>
-          <a:noFill/>
-        </p:spPr>
-        <p:txBody>
-          <a:bodyPr wrap="square" lIns="45720" rIns="45720">
-            <a:spAutoFit/>
-          </a:bodyPr>
-          <a:lstStyle/>
-          <a:p>
-            <a:r>
-              <a:rPr sz="1000" b="0">
-                <a:solidFill>
-                  <a:srgbClr val="5B6770"/>
-                </a:solidFill>
-              </a:rPr>
-              <a:t>RTEU Computer Engineering · 2026-2027 Fall</a:t>
-            </a:r>
-          </a:p>
-        </p:txBody>
-      </p:sp>
-      <p:sp>
-        <p:nvSpPr>
-          <p:cNvPr id="5" name="TextBox 4"/>
-          <p:cNvSpPr txBox="1"/>
-          <p:nvPr/>
-        </p:nvSpPr>
-        <p:spPr>
-          <a:xfrm>
-            <a:off x="10637215" y="6446520"/>
-            <a:ext cx="914400" cy="274320"/>
-          </a:xfrm>
-          <a:prstGeom prst="rect">
-            <a:avLst/>
-          </a:prstGeom>
-          <a:noFill/>
-        </p:spPr>
-        <p:txBody>
-          <a:bodyPr wrap="square" lIns="45720" rIns="45720">
-            <a:spAutoFit/>
-          </a:bodyPr>
-          <a:lstStyle/>
-          <a:p>
-            <a:pPr algn="r"/>
-            <a:r>
-              <a:rPr sz="1000" b="0">
-                <a:solidFill>
-                  <a:srgbClr val="5B6770"/>
-                </a:solidFill>
-              </a:rPr>
-              <a:t>18</a:t>
-            </a:r>
-          </a:p>
-        </p:txBody>
-      </p:sp>
-      <p:sp>
-        <p:nvSpPr>
-          <p:cNvPr id="6" name="TextBox 5"/>
-          <p:cNvSpPr txBox="1"/>
-          <p:nvPr/>
-        </p:nvSpPr>
-        <p:spPr>
-          <a:xfrm>
-            <a:off x="640080" y="548640"/>
-            <a:ext cx="10911535" cy="731520"/>
-          </a:xfrm>
-          <a:prstGeom prst="rect">
-            <a:avLst/>
-          </a:prstGeom>
-          <a:noFill/>
-        </p:spPr>
-        <p:txBody>
-          <a:bodyPr wrap="square" lIns="45720" rIns="45720" anchor="ctr">
-            <a:spAutoFit/>
-          </a:bodyPr>
-          <a:lstStyle/>
-          <a:p>
-            <a:r>
-              <a:rPr sz="3000" b="1">
-                <a:solidFill>
-                  <a:srgbClr val="006D77"/>
-                </a:solidFill>
-              </a:rPr>
-              <a:t>Item · Threat Model</a:t>
-            </a:r>
-          </a:p>
-        </p:txBody>
-      </p:sp>
-      <p:sp>
-        <p:nvSpPr>
-          <p:cNvPr id="7" name="TextBox 6"/>
-          <p:cNvSpPr txBox="1"/>
-          <p:nvPr/>
-        </p:nvSpPr>
-        <p:spPr>
-          <a:xfrm>
-            <a:off x="640080" y="1325880"/>
-            <a:ext cx="10911535" cy="1219200"/>
-          </a:xfrm>
-          <a:prstGeom prst="rect">
-            <a:avLst/>
-          </a:prstGeom>
-          <a:noFill/>
-        </p:spPr>
-        <p:txBody>
-          <a:bodyPr wrap="square" lIns="45720" rIns="45720">
-            <a:spAutoFit/>
-          </a:bodyPr>
-          <a:lstStyle/>
-          <a:p>
-            <a:pPr>
-              <a:spcAft>
-                <a:spcPts val="300"/>
-              </a:spcAft>
-            </a:pPr>
-            <a:r>
-              <a:rPr sz="2000" b="1">
-                <a:solidFill>
-                  <a:srgbClr val="006D77"/>
-                </a:solidFill>
-              </a:rPr>
-              <a:t>• </a:t>
-            </a:r>
-            <a:r>
-              <a:rPr sz="2000" b="0">
-                <a:solidFill>
-                  <a:srgbClr val="1F2D3A"/>
-                </a:solidFill>
-              </a:rPr>
-              <a:t>STRIDE / attack tree.</a:t>
-            </a:r>
-          </a:p>
-          <a:p>
-            <a:pPr>
-              <a:spcAft>
-                <a:spcPts val="300"/>
-              </a:spcAft>
-            </a:pPr>
-            <a:r>
-              <a:rPr sz="2000" b="1">
-                <a:solidFill>
-                  <a:srgbClr val="006D77"/>
-                </a:solidFill>
-              </a:rPr>
-              <a:t>• </a:t>
-            </a:r>
-            <a:r>
-              <a:rPr sz="2000" b="0">
-                <a:solidFill>
-                  <a:srgbClr val="1F2D3A"/>
-                </a:solidFill>
-              </a:rPr>
-              <a:t>A control for every threat.</a:t>
-            </a:r>
-          </a:p>
-          <a:p>
-            <a:pPr>
-              <a:spcAft>
-                <a:spcPts val="300"/>
-              </a:spcAft>
-            </a:pPr>
-            <a:r>
-              <a:rPr sz="2000" b="1">
-                <a:solidFill>
-                  <a:srgbClr val="006D77"/>
-                </a:solidFill>
-              </a:rPr>
-              <a:t>• </a:t>
-            </a:r>
-            <a:r>
-              <a:rPr sz="2000" b="1">
-                <a:solidFill>
-                  <a:srgbClr val="1F2D3A"/>
-                </a:solidFill>
-              </a:rPr>
-              <a:t>Evidence:</a:t>
-            </a:r>
-            <a:r>
-              <a:rPr sz="2000" b="0">
-                <a:solidFill>
-                  <a:srgbClr val="1F2D3A"/>
-                </a:solidFill>
-              </a:rPr>
-              <a:t> S4 threat table.</a:t>
-            </a:r>
-          </a:p>
-        </p:txBody>
-      </p:sp>
-    </p:spTree>
-  </p:cSld>
-  <p:clrMapOvr>
-    <a:masterClrMapping/>
-  </p:clrMapOvr>
-</p:sld>
-</file>
-
-<file path=ppt/slides/slide19.xml><?xml version="1.0" encoding="utf-8"?>
-<p:sld xmlns:a="http://schemas.openxmlformats.org/drawingml/2006/main" xmlns:p="http://schemas.openxmlformats.org/presentationml/2006/main" xmlns:r="http://schemas.openxmlformats.org/officeDocument/2006/relationships">
-  <p:cSld>
-    <p:spTree>
-      <p:nvGrpSpPr>
-        <p:cNvPr id="1" name=""/>
-        <p:cNvGrpSpPr/>
-        <p:nvPr/>
-      </p:nvGrpSpPr>
-      <p:grpSpPr/>
-      <p:pic>
-        <p:nvPicPr>
-          <p:cNvPr id="2" name="Picture 1" descr="rteu_logo_kucuk.jpg"/>
-          <p:cNvPicPr>
-            <a:picLocks noChangeAspect="1"/>
-          </p:cNvPicPr>
-          <p:nvPr/>
-        </p:nvPicPr>
-        <p:blipFill>
-          <a:blip r:embed="rId2"/>
-          <a:stretch>
-            <a:fillRect/>
-          </a:stretch>
-        </p:blipFill>
-        <p:spPr>
-          <a:xfrm>
-            <a:off x="640080" y="164592"/>
-            <a:ext cx="242773" cy="329184"/>
-          </a:xfrm>
-          <a:prstGeom prst="rect">
-            <a:avLst/>
-          </a:prstGeom>
-        </p:spPr>
-      </p:pic>
-      <p:sp>
-        <p:nvSpPr>
-          <p:cNvPr id="3" name="TextBox 2"/>
-          <p:cNvSpPr txBox="1"/>
-          <p:nvPr/>
-        </p:nvSpPr>
-        <p:spPr>
-          <a:xfrm>
-            <a:off x="1051560" y="182880"/>
-            <a:ext cx="7315200" cy="320040"/>
-          </a:xfrm>
-          <a:prstGeom prst="rect">
-            <a:avLst/>
-          </a:prstGeom>
-          <a:noFill/>
-        </p:spPr>
-        <p:txBody>
-          <a:bodyPr wrap="square" lIns="45720" rIns="45720">
-            <a:spAutoFit/>
-          </a:bodyPr>
-          <a:lstStyle/>
-          <a:p>
-            <a:r>
-              <a:rPr sz="1100" b="0">
-                <a:solidFill>
-                  <a:srgbClr val="5B6770"/>
-                </a:solidFill>
-              </a:rPr>
-              <a:t>CEN429 Secure Programming · Week 7</a:t>
-            </a:r>
-          </a:p>
-        </p:txBody>
-      </p:sp>
-      <p:sp>
-        <p:nvSpPr>
-          <p:cNvPr id="4" name="TextBox 3"/>
-          <p:cNvSpPr txBox="1"/>
-          <p:nvPr/>
-        </p:nvSpPr>
-        <p:spPr>
-          <a:xfrm>
-            <a:off x="640080" y="6446520"/>
-            <a:ext cx="7315200" cy="274320"/>
-          </a:xfrm>
-          <a:prstGeom prst="rect">
-            <a:avLst/>
-          </a:prstGeom>
-          <a:noFill/>
-        </p:spPr>
-        <p:txBody>
-          <a:bodyPr wrap="square" lIns="45720" rIns="45720">
-            <a:spAutoFit/>
-          </a:bodyPr>
-          <a:lstStyle/>
-          <a:p>
-            <a:r>
-              <a:rPr sz="1000" b="0">
-                <a:solidFill>
-                  <a:srgbClr val="5B6770"/>
-                </a:solidFill>
-              </a:rPr>
-              <a:t>RTEU Computer Engineering · 2026-2027 Fall</a:t>
-            </a:r>
-          </a:p>
-        </p:txBody>
-      </p:sp>
-      <p:sp>
-        <p:nvSpPr>
-          <p:cNvPr id="5" name="TextBox 4"/>
-          <p:cNvSpPr txBox="1"/>
-          <p:nvPr/>
-        </p:nvSpPr>
-        <p:spPr>
-          <a:xfrm>
-            <a:off x="10637215" y="6446520"/>
-            <a:ext cx="914400" cy="274320"/>
-          </a:xfrm>
-          <a:prstGeom prst="rect">
-            <a:avLst/>
-          </a:prstGeom>
-          <a:noFill/>
-        </p:spPr>
-        <p:txBody>
-          <a:bodyPr wrap="square" lIns="45720" rIns="45720">
-            <a:spAutoFit/>
-          </a:bodyPr>
-          <a:lstStyle/>
-          <a:p>
-            <a:pPr algn="r"/>
-            <a:r>
-              <a:rPr sz="1000" b="0">
-                <a:solidFill>
-                  <a:srgbClr val="5B6770"/>
-                </a:solidFill>
-              </a:rPr>
-              <a:t>19</a:t>
-            </a:r>
-          </a:p>
-        </p:txBody>
-      </p:sp>
-      <p:sp>
-        <p:nvSpPr>
-          <p:cNvPr id="6" name="TextBox 5"/>
-          <p:cNvSpPr txBox="1"/>
-          <p:nvPr/>
-        </p:nvSpPr>
-        <p:spPr>
-          <a:xfrm>
-            <a:off x="640080" y="548640"/>
-            <a:ext cx="10911535" cy="731520"/>
-          </a:xfrm>
-          <a:prstGeom prst="rect">
-            <a:avLst/>
-          </a:prstGeom>
-          <a:noFill/>
-        </p:spPr>
-        <p:txBody>
-          <a:bodyPr wrap="square" lIns="45720" rIns="45720" anchor="ctr">
-            <a:spAutoFit/>
-          </a:bodyPr>
-          <a:lstStyle/>
-          <a:p>
-            <a:r>
-              <a:rPr sz="3000" b="1">
-                <a:solidFill>
-                  <a:srgbClr val="006D77"/>
-                </a:solidFill>
-              </a:rPr>
-              <a:t>Item · Asset Management</a:t>
-            </a:r>
-          </a:p>
-        </p:txBody>
-      </p:sp>
-      <p:sp>
-        <p:nvSpPr>
-          <p:cNvPr id="7" name="TextBox 6"/>
-          <p:cNvSpPr txBox="1"/>
-          <p:nvPr/>
-        </p:nvSpPr>
-        <p:spPr>
-          <a:xfrm>
-            <a:off x="640080" y="1325880"/>
-            <a:ext cx="10911535" cy="1219200"/>
-          </a:xfrm>
-          <a:prstGeom prst="rect">
-            <a:avLst/>
-          </a:prstGeom>
-          <a:noFill/>
-        </p:spPr>
-        <p:txBody>
-          <a:bodyPr wrap="square" lIns="45720" rIns="45720">
-            <a:spAutoFit/>
-          </a:bodyPr>
-          <a:lstStyle/>
-          <a:p>
-            <a:pPr>
-              <a:spcAft>
-                <a:spcPts val="300"/>
-              </a:spcAft>
-            </a:pPr>
-            <a:r>
-              <a:rPr sz="2000" b="1">
-                <a:solidFill>
-                  <a:srgbClr val="006D77"/>
-                </a:solidFill>
-              </a:rPr>
-              <a:t>• </a:t>
-            </a:r>
-            <a:r>
-              <a:rPr sz="2000" b="0">
-                <a:solidFill>
-                  <a:srgbClr val="1F2D3A"/>
-                </a:solidFill>
-              </a:rPr>
-              <a:t>Asset list + C/I/I+.</a:t>
-            </a:r>
-          </a:p>
-          <a:p>
-            <a:pPr>
-              <a:spcAft>
-                <a:spcPts val="300"/>
-              </a:spcAft>
-            </a:pPr>
-            <a:r>
-              <a:rPr sz="2000" b="1">
-                <a:solidFill>
-                  <a:srgbClr val="006D77"/>
-                </a:solidFill>
-              </a:rPr>
-              <a:t>• </a:t>
-            </a:r>
-            <a:r>
-              <a:rPr sz="2000" b="0">
-                <a:solidFill>
-                  <a:srgbClr val="1F2D3A"/>
-                </a:solidFill>
-              </a:rPr>
-              <a:t>Lifecycle.</a:t>
-            </a:r>
-          </a:p>
-          <a:p>
-            <a:pPr>
-              <a:spcAft>
-                <a:spcPts val="300"/>
-              </a:spcAft>
-            </a:pPr>
-            <a:r>
-              <a:rPr sz="2000" b="1">
-                <a:solidFill>
-                  <a:srgbClr val="006D77"/>
-                </a:solidFill>
-              </a:rPr>
-              <a:t>• </a:t>
-            </a:r>
-            <a:r>
-              <a:rPr sz="2000" b="1">
-                <a:solidFill>
-                  <a:srgbClr val="1F2D3A"/>
-                </a:solidFill>
-              </a:rPr>
-              <a:t>Evidence:</a:t>
-            </a:r>
-            <a:r>
-              <a:rPr sz="2000" b="0">
-                <a:solidFill>
-                  <a:srgbClr val="1F2D3A"/>
-                </a:solidFill>
-              </a:rPr>
-              <a:t> S5.</a:t>
+              <a:t>Study guide and sample questions: Week 8 page</a:t>
             </a:r>
           </a:p>
         </p:txBody>
@@ -7181,2356 +6112,6 @@
                 </a:solidFill>
               </a:rPr>
               <a:t>⚠️ Late submissions are not accepted</a:t>
-            </a:r>
-          </a:p>
-        </p:txBody>
-      </p:sp>
-    </p:spTree>
-  </p:cSld>
-  <p:clrMapOvr>
-    <a:masterClrMapping/>
-  </p:clrMapOvr>
-</p:sld>
-</file>
-
-<file path=ppt/slides/slide20.xml><?xml version="1.0" encoding="utf-8"?>
-<p:sld xmlns:a="http://schemas.openxmlformats.org/drawingml/2006/main" xmlns:p="http://schemas.openxmlformats.org/presentationml/2006/main" xmlns:r="http://schemas.openxmlformats.org/officeDocument/2006/relationships">
-  <p:cSld>
-    <p:spTree>
-      <p:nvGrpSpPr>
-        <p:cNvPr id="1" name=""/>
-        <p:cNvGrpSpPr/>
-        <p:nvPr/>
-      </p:nvGrpSpPr>
-      <p:grpSpPr/>
-      <p:pic>
-        <p:nvPicPr>
-          <p:cNvPr id="2" name="Picture 1" descr="rteu_logo_kucuk.jpg"/>
-          <p:cNvPicPr>
-            <a:picLocks noChangeAspect="1"/>
-          </p:cNvPicPr>
-          <p:nvPr/>
-        </p:nvPicPr>
-        <p:blipFill>
-          <a:blip r:embed="rId2"/>
-          <a:stretch>
-            <a:fillRect/>
-          </a:stretch>
-        </p:blipFill>
-        <p:spPr>
-          <a:xfrm>
-            <a:off x="640080" y="164592"/>
-            <a:ext cx="242773" cy="329184"/>
-          </a:xfrm>
-          <a:prstGeom prst="rect">
-            <a:avLst/>
-          </a:prstGeom>
-        </p:spPr>
-      </p:pic>
-      <p:sp>
-        <p:nvSpPr>
-          <p:cNvPr id="3" name="TextBox 2"/>
-          <p:cNvSpPr txBox="1"/>
-          <p:nvPr/>
-        </p:nvSpPr>
-        <p:spPr>
-          <a:xfrm>
-            <a:off x="1051560" y="182880"/>
-            <a:ext cx="7315200" cy="320040"/>
-          </a:xfrm>
-          <a:prstGeom prst="rect">
-            <a:avLst/>
-          </a:prstGeom>
-          <a:noFill/>
-        </p:spPr>
-        <p:txBody>
-          <a:bodyPr wrap="square" lIns="45720" rIns="45720">
-            <a:spAutoFit/>
-          </a:bodyPr>
-          <a:lstStyle/>
-          <a:p>
-            <a:r>
-              <a:rPr sz="1100" b="0">
-                <a:solidFill>
-                  <a:srgbClr val="5B6770"/>
-                </a:solidFill>
-              </a:rPr>
-              <a:t>CEN429 Secure Programming · Week 7</a:t>
-            </a:r>
-          </a:p>
-        </p:txBody>
-      </p:sp>
-      <p:sp>
-        <p:nvSpPr>
-          <p:cNvPr id="4" name="TextBox 3"/>
-          <p:cNvSpPr txBox="1"/>
-          <p:nvPr/>
-        </p:nvSpPr>
-        <p:spPr>
-          <a:xfrm>
-            <a:off x="640080" y="6446520"/>
-            <a:ext cx="7315200" cy="274320"/>
-          </a:xfrm>
-          <a:prstGeom prst="rect">
-            <a:avLst/>
-          </a:prstGeom>
-          <a:noFill/>
-        </p:spPr>
-        <p:txBody>
-          <a:bodyPr wrap="square" lIns="45720" rIns="45720">
-            <a:spAutoFit/>
-          </a:bodyPr>
-          <a:lstStyle/>
-          <a:p>
-            <a:r>
-              <a:rPr sz="1000" b="0">
-                <a:solidFill>
-                  <a:srgbClr val="5B6770"/>
-                </a:solidFill>
-              </a:rPr>
-              <a:t>RTEU Computer Engineering · 2026-2027 Fall</a:t>
-            </a:r>
-          </a:p>
-        </p:txBody>
-      </p:sp>
-      <p:sp>
-        <p:nvSpPr>
-          <p:cNvPr id="5" name="TextBox 4"/>
-          <p:cNvSpPr txBox="1"/>
-          <p:nvPr/>
-        </p:nvSpPr>
-        <p:spPr>
-          <a:xfrm>
-            <a:off x="10637215" y="6446520"/>
-            <a:ext cx="914400" cy="274320"/>
-          </a:xfrm>
-          <a:prstGeom prst="rect">
-            <a:avLst/>
-          </a:prstGeom>
-          <a:noFill/>
-        </p:spPr>
-        <p:txBody>
-          <a:bodyPr wrap="square" lIns="45720" rIns="45720">
-            <a:spAutoFit/>
-          </a:bodyPr>
-          <a:lstStyle/>
-          <a:p>
-            <a:pPr algn="r"/>
-            <a:r>
-              <a:rPr sz="1000" b="0">
-                <a:solidFill>
-                  <a:srgbClr val="5B6770"/>
-                </a:solidFill>
-              </a:rPr>
-              <a:t>20</a:t>
-            </a:r>
-          </a:p>
-        </p:txBody>
-      </p:sp>
-      <p:sp>
-        <p:nvSpPr>
-          <p:cNvPr id="6" name="TextBox 5"/>
-          <p:cNvSpPr txBox="1"/>
-          <p:nvPr/>
-        </p:nvSpPr>
-        <p:spPr>
-          <a:xfrm>
-            <a:off x="640080" y="548640"/>
-            <a:ext cx="10911535" cy="731520"/>
-          </a:xfrm>
-          <a:prstGeom prst="rect">
-            <a:avLst/>
-          </a:prstGeom>
-          <a:noFill/>
-        </p:spPr>
-        <p:txBody>
-          <a:bodyPr wrap="square" lIns="45720" rIns="45720" anchor="ctr">
-            <a:spAutoFit/>
-          </a:bodyPr>
-          <a:lstStyle/>
-          <a:p>
-            <a:r>
-              <a:rPr sz="3000" b="1">
-                <a:solidFill>
-                  <a:srgbClr val="006D77"/>
-                </a:solidFill>
-              </a:rPr>
-              <a:t>Item · Basic Protections</a:t>
-            </a:r>
-          </a:p>
-        </p:txBody>
-      </p:sp>
-      <p:sp>
-        <p:nvSpPr>
-          <p:cNvPr id="7" name="TextBox 6"/>
-          <p:cNvSpPr txBox="1"/>
-          <p:nvPr/>
-        </p:nvSpPr>
-        <p:spPr>
-          <a:xfrm>
-            <a:off x="640080" y="1325880"/>
-            <a:ext cx="10911535" cy="843280"/>
-          </a:xfrm>
-          <a:prstGeom prst="rect">
-            <a:avLst/>
-          </a:prstGeom>
-          <a:noFill/>
-        </p:spPr>
-        <p:txBody>
-          <a:bodyPr wrap="square" lIns="45720" rIns="45720">
-            <a:spAutoFit/>
-          </a:bodyPr>
-          <a:lstStyle/>
-          <a:p>
-            <a:pPr>
-              <a:spcAft>
-                <a:spcPts val="300"/>
-              </a:spcAft>
-            </a:pPr>
-            <a:r>
-              <a:rPr sz="2000" b="1">
-                <a:solidFill>
-                  <a:srgbClr val="006D77"/>
-                </a:solidFill>
-              </a:rPr>
-              <a:t>• </a:t>
-            </a:r>
-            <a:r>
-              <a:rPr sz="2000" b="0">
-                <a:solidFill>
-                  <a:srgbClr val="1F2D3A"/>
-                </a:solidFill>
-              </a:rPr>
-              <a:t>Cryptography (S8, partial), secure code (S9, partial).</a:t>
-            </a:r>
-          </a:p>
-          <a:p>
-            <a:pPr>
-              <a:spcAft>
-                <a:spcPts val="300"/>
-              </a:spcAft>
-            </a:pPr>
-            <a:r>
-              <a:rPr sz="2000" b="1">
-                <a:solidFill>
-                  <a:srgbClr val="006D77"/>
-                </a:solidFill>
-              </a:rPr>
-              <a:t>• </a:t>
-            </a:r>
-            <a:r>
-              <a:rPr sz="2000" b="1">
-                <a:solidFill>
-                  <a:srgbClr val="1F2D3A"/>
-                </a:solidFill>
-              </a:rPr>
-              <a:t>Evidence:</a:t>
-            </a:r>
-            <a:r>
-              <a:rPr sz="2000" b="0">
-                <a:solidFill>
-                  <a:srgbClr val="1F2D3A"/>
-                </a:solidFill>
-              </a:rPr>
-              <a:t> code + tests.</a:t>
-            </a:r>
-          </a:p>
-        </p:txBody>
-      </p:sp>
-    </p:spTree>
-  </p:cSld>
-  <p:clrMapOvr>
-    <a:masterClrMapping/>
-  </p:clrMapOvr>
-</p:sld>
-</file>
-
-<file path=ppt/slides/slide21.xml><?xml version="1.0" encoding="utf-8"?>
-<p:sld xmlns:a="http://schemas.openxmlformats.org/drawingml/2006/main" xmlns:p="http://schemas.openxmlformats.org/presentationml/2006/main" xmlns:r="http://schemas.openxmlformats.org/officeDocument/2006/relationships">
-  <p:cSld>
-    <p:spTree>
-      <p:nvGrpSpPr>
-        <p:cNvPr id="1" name=""/>
-        <p:cNvGrpSpPr/>
-        <p:nvPr/>
-      </p:nvGrpSpPr>
-      <p:grpSpPr/>
-      <p:pic>
-        <p:nvPicPr>
-          <p:cNvPr id="2" name="Picture 1" descr="rteu_logo_kucuk.jpg"/>
-          <p:cNvPicPr>
-            <a:picLocks noChangeAspect="1"/>
-          </p:cNvPicPr>
-          <p:nvPr/>
-        </p:nvPicPr>
-        <p:blipFill>
-          <a:blip r:embed="rId2"/>
-          <a:stretch>
-            <a:fillRect/>
-          </a:stretch>
-        </p:blipFill>
-        <p:spPr>
-          <a:xfrm>
-            <a:off x="640080" y="164592"/>
-            <a:ext cx="242773" cy="329184"/>
-          </a:xfrm>
-          <a:prstGeom prst="rect">
-            <a:avLst/>
-          </a:prstGeom>
-        </p:spPr>
-      </p:pic>
-      <p:sp>
-        <p:nvSpPr>
-          <p:cNvPr id="3" name="TextBox 2"/>
-          <p:cNvSpPr txBox="1"/>
-          <p:nvPr/>
-        </p:nvSpPr>
-        <p:spPr>
-          <a:xfrm>
-            <a:off x="1051560" y="182880"/>
-            <a:ext cx="7315200" cy="320040"/>
-          </a:xfrm>
-          <a:prstGeom prst="rect">
-            <a:avLst/>
-          </a:prstGeom>
-          <a:noFill/>
-        </p:spPr>
-        <p:txBody>
-          <a:bodyPr wrap="square" lIns="45720" rIns="45720">
-            <a:spAutoFit/>
-          </a:bodyPr>
-          <a:lstStyle/>
-          <a:p>
-            <a:r>
-              <a:rPr sz="1100" b="0">
-                <a:solidFill>
-                  <a:srgbClr val="5B6770"/>
-                </a:solidFill>
-              </a:rPr>
-              <a:t>CEN429 Secure Programming · Week 7</a:t>
-            </a:r>
-          </a:p>
-        </p:txBody>
-      </p:sp>
-      <p:sp>
-        <p:nvSpPr>
-          <p:cNvPr id="4" name="TextBox 3"/>
-          <p:cNvSpPr txBox="1"/>
-          <p:nvPr/>
-        </p:nvSpPr>
-        <p:spPr>
-          <a:xfrm>
-            <a:off x="640080" y="6446520"/>
-            <a:ext cx="7315200" cy="274320"/>
-          </a:xfrm>
-          <a:prstGeom prst="rect">
-            <a:avLst/>
-          </a:prstGeom>
-          <a:noFill/>
-        </p:spPr>
-        <p:txBody>
-          <a:bodyPr wrap="square" lIns="45720" rIns="45720">
-            <a:spAutoFit/>
-          </a:bodyPr>
-          <a:lstStyle/>
-          <a:p>
-            <a:r>
-              <a:rPr sz="1000" b="0">
-                <a:solidFill>
-                  <a:srgbClr val="5B6770"/>
-                </a:solidFill>
-              </a:rPr>
-              <a:t>RTEU Computer Engineering · 2026-2027 Fall</a:t>
-            </a:r>
-          </a:p>
-        </p:txBody>
-      </p:sp>
-      <p:sp>
-        <p:nvSpPr>
-          <p:cNvPr id="5" name="TextBox 4"/>
-          <p:cNvSpPr txBox="1"/>
-          <p:nvPr/>
-        </p:nvSpPr>
-        <p:spPr>
-          <a:xfrm>
-            <a:off x="10637215" y="6446520"/>
-            <a:ext cx="914400" cy="274320"/>
-          </a:xfrm>
-          <a:prstGeom prst="rect">
-            <a:avLst/>
-          </a:prstGeom>
-          <a:noFill/>
-        </p:spPr>
-        <p:txBody>
-          <a:bodyPr wrap="square" lIns="45720" rIns="45720">
-            <a:spAutoFit/>
-          </a:bodyPr>
-          <a:lstStyle/>
-          <a:p>
-            <a:pPr algn="r"/>
-            <a:r>
-              <a:rPr sz="1000" b="0">
-                <a:solidFill>
-                  <a:srgbClr val="5B6770"/>
-                </a:solidFill>
-              </a:rPr>
-              <a:t>21</a:t>
-            </a:r>
-          </a:p>
-        </p:txBody>
-      </p:sp>
-      <p:sp>
-        <p:nvSpPr>
-          <p:cNvPr id="6" name="TextBox 5"/>
-          <p:cNvSpPr txBox="1"/>
-          <p:nvPr/>
-        </p:nvSpPr>
-        <p:spPr>
-          <a:xfrm>
-            <a:off x="640080" y="548640"/>
-            <a:ext cx="10911535" cy="731520"/>
-          </a:xfrm>
-          <a:prstGeom prst="rect">
-            <a:avLst/>
-          </a:prstGeom>
-          <a:noFill/>
-        </p:spPr>
-        <p:txBody>
-          <a:bodyPr wrap="square" lIns="45720" rIns="45720" anchor="ctr">
-            <a:spAutoFit/>
-          </a:bodyPr>
-          <a:lstStyle/>
-          <a:p>
-            <a:r>
-              <a:rPr sz="3000" b="1">
-                <a:solidFill>
-                  <a:srgbClr val="006D77"/>
-                </a:solidFill>
-              </a:rPr>
-              <a:t>Item · Documentation and Presentation</a:t>
-            </a:r>
-          </a:p>
-        </p:txBody>
-      </p:sp>
-      <p:sp>
-        <p:nvSpPr>
-          <p:cNvPr id="7" name="TextBox 6"/>
-          <p:cNvSpPr txBox="1"/>
-          <p:nvPr/>
-        </p:nvSpPr>
-        <p:spPr>
-          <a:xfrm>
-            <a:off x="640080" y="1325880"/>
-            <a:ext cx="10911535" cy="1219200"/>
-          </a:xfrm>
-          <a:prstGeom prst="rect">
-            <a:avLst/>
-          </a:prstGeom>
-          <a:noFill/>
-        </p:spPr>
-        <p:txBody>
-          <a:bodyPr wrap="square" lIns="45720" rIns="45720">
-            <a:spAutoFit/>
-          </a:bodyPr>
-          <a:lstStyle/>
-          <a:p>
-            <a:pPr>
-              <a:spcAft>
-                <a:spcPts val="300"/>
-              </a:spcAft>
-            </a:pPr>
-            <a:r>
-              <a:rPr sz="2000" b="1">
-                <a:solidFill>
-                  <a:srgbClr val="006D77"/>
-                </a:solidFill>
-              </a:rPr>
-              <a:t>• </a:t>
-            </a:r>
-            <a:r>
-              <a:rPr sz="2000" b="0">
-                <a:solidFill>
-                  <a:srgbClr val="1F2D3A"/>
-                </a:solidFill>
-              </a:rPr>
-              <a:t>Consistency, version identity.</a:t>
-            </a:r>
-          </a:p>
-          <a:p>
-            <a:pPr>
-              <a:spcAft>
-                <a:spcPts val="300"/>
-              </a:spcAft>
-            </a:pPr>
-            <a:r>
-              <a:rPr sz="2000" b="1">
-                <a:solidFill>
-                  <a:srgbClr val="006D77"/>
-                </a:solidFill>
-              </a:rPr>
-              <a:t>• </a:t>
-            </a:r>
-            <a:r>
-              <a:rPr sz="2000" b="0">
-                <a:solidFill>
-                  <a:srgbClr val="1F2D3A"/>
-                </a:solidFill>
-              </a:rPr>
-              <a:t>Clear delivery.</a:t>
-            </a:r>
-          </a:p>
-          <a:p>
-            <a:pPr>
-              <a:spcAft>
-                <a:spcPts val="300"/>
-              </a:spcAft>
-            </a:pPr>
-            <a:r>
-              <a:rPr sz="2000" b="1">
-                <a:solidFill>
-                  <a:srgbClr val="006D77"/>
-                </a:solidFill>
-              </a:rPr>
-              <a:t>• </a:t>
-            </a:r>
-            <a:r>
-              <a:rPr sz="2000" b="1">
-                <a:solidFill>
-                  <a:srgbClr val="1F2D3A"/>
-                </a:solidFill>
-              </a:rPr>
-              <a:t>Evidence:</a:t>
-            </a:r>
-            <a:r>
-              <a:rPr sz="2000" b="0">
-                <a:solidFill>
-                  <a:srgbClr val="1F2D3A"/>
-                </a:solidFill>
-              </a:rPr>
-              <a:t> the entire guide.</a:t>
-            </a:r>
-          </a:p>
-        </p:txBody>
-      </p:sp>
-    </p:spTree>
-  </p:cSld>
-  <p:clrMapOvr>
-    <a:masterClrMapping/>
-  </p:clrMapOvr>
-</p:sld>
-</file>
-
-<file path=ppt/slides/slide22.xml><?xml version="1.0" encoding="utf-8"?>
-<p:sld xmlns:a="http://schemas.openxmlformats.org/drawingml/2006/main" xmlns:p="http://schemas.openxmlformats.org/presentationml/2006/main" xmlns:r="http://schemas.openxmlformats.org/officeDocument/2006/relationships">
-  <p:cSld>
-    <p:bg>
-      <p:bgPr>
-        <a:solidFill>
-          <a:srgbClr val="006D77"/>
-        </a:solidFill>
-        <a:effectLst/>
-      </p:bgPr>
-    </p:bg>
-    <p:spTree>
-      <p:nvGrpSpPr>
-        <p:cNvPr id="1" name=""/>
-        <p:cNvGrpSpPr/>
-        <p:nvPr/>
-      </p:nvGrpSpPr>
-      <p:grpSpPr/>
-      <p:sp>
-        <p:nvSpPr>
-          <p:cNvPr id="2" name="TextBox 1"/>
-          <p:cNvSpPr txBox="1"/>
-          <p:nvPr/>
-        </p:nvSpPr>
-        <p:spPr>
-          <a:xfrm>
-            <a:off x="1051560" y="182880"/>
-            <a:ext cx="7315200" cy="320040"/>
-          </a:xfrm>
-          <a:prstGeom prst="rect">
-            <a:avLst/>
-          </a:prstGeom>
-          <a:noFill/>
-        </p:spPr>
-        <p:txBody>
-          <a:bodyPr wrap="square" lIns="45720" rIns="45720">
-            <a:spAutoFit/>
-          </a:bodyPr>
-          <a:lstStyle/>
-          <a:p>
-            <a:r>
-              <a:rPr sz="1100" b="0">
-                <a:solidFill>
-                  <a:srgbClr val="D8F0F2"/>
-                </a:solidFill>
-              </a:rPr>
-              <a:t>CEN429 Secure Programming · Week 7</a:t>
-            </a:r>
-          </a:p>
-        </p:txBody>
-      </p:sp>
-      <p:sp>
-        <p:nvSpPr>
-          <p:cNvPr id="3" name="TextBox 2"/>
-          <p:cNvSpPr txBox="1"/>
-          <p:nvPr/>
-        </p:nvSpPr>
-        <p:spPr>
-          <a:xfrm>
-            <a:off x="640080" y="6446520"/>
-            <a:ext cx="7315200" cy="274320"/>
-          </a:xfrm>
-          <a:prstGeom prst="rect">
-            <a:avLst/>
-          </a:prstGeom>
-          <a:noFill/>
-        </p:spPr>
-        <p:txBody>
-          <a:bodyPr wrap="square" lIns="45720" rIns="45720">
-            <a:spAutoFit/>
-          </a:bodyPr>
-          <a:lstStyle/>
-          <a:p>
-            <a:r>
-              <a:rPr sz="1000" b="0">
-                <a:solidFill>
-                  <a:srgbClr val="D8F0F2"/>
-                </a:solidFill>
-              </a:rPr>
-              <a:t>RTEU Computer Engineering · 2026-2027 Fall</a:t>
-            </a:r>
-          </a:p>
-        </p:txBody>
-      </p:sp>
-      <p:sp>
-        <p:nvSpPr>
-          <p:cNvPr id="4" name="TextBox 3"/>
-          <p:cNvSpPr txBox="1"/>
-          <p:nvPr/>
-        </p:nvSpPr>
-        <p:spPr>
-          <a:xfrm>
-            <a:off x="10637215" y="6446520"/>
-            <a:ext cx="914400" cy="274320"/>
-          </a:xfrm>
-          <a:prstGeom prst="rect">
-            <a:avLst/>
-          </a:prstGeom>
-          <a:noFill/>
-        </p:spPr>
-        <p:txBody>
-          <a:bodyPr wrap="square" lIns="45720" rIns="45720">
-            <a:spAutoFit/>
-          </a:bodyPr>
-          <a:lstStyle/>
-          <a:p>
-            <a:pPr algn="r"/>
-            <a:r>
-              <a:rPr sz="1000" b="0">
-                <a:solidFill>
-                  <a:srgbClr val="D8F0F2"/>
-                </a:solidFill>
-              </a:rPr>
-              <a:t>22</a:t>
-            </a:r>
-          </a:p>
-        </p:txBody>
-      </p:sp>
-      <p:sp>
-        <p:nvSpPr>
-          <p:cNvPr id="5" name="TextBox 4"/>
-          <p:cNvSpPr txBox="1"/>
-          <p:nvPr/>
-        </p:nvSpPr>
-        <p:spPr>
-          <a:xfrm>
-            <a:off x="640080" y="2743200"/>
-            <a:ext cx="10911535" cy="1280160"/>
-          </a:xfrm>
-          <a:prstGeom prst="rect">
-            <a:avLst/>
-          </a:prstGeom>
-          <a:noFill/>
-        </p:spPr>
-        <p:txBody>
-          <a:bodyPr wrap="square" lIns="45720" rIns="45720">
-            <a:spAutoFit/>
-          </a:bodyPr>
-          <a:lstStyle/>
-          <a:p>
-            <a:pPr algn="l"/>
-            <a:r>
-              <a:rPr sz="4000" b="1">
-                <a:solidFill>
-                  <a:srgbClr val="FFFFFF"/>
-                </a:solidFill>
-              </a:rPr>
-              <a:t>Appendix · Demonstration Flow</a:t>
-            </a:r>
-          </a:p>
-        </p:txBody>
-      </p:sp>
-    </p:spTree>
-  </p:cSld>
-  <p:clrMapOvr>
-    <a:masterClrMapping/>
-  </p:clrMapOvr>
-</p:sld>
-</file>
-
-<file path=ppt/slides/slide23.xml><?xml version="1.0" encoding="utf-8"?>
-<p:sld xmlns:a="http://schemas.openxmlformats.org/drawingml/2006/main" xmlns:p="http://schemas.openxmlformats.org/presentationml/2006/main" xmlns:r="http://schemas.openxmlformats.org/officeDocument/2006/relationships">
-  <p:cSld>
-    <p:spTree>
-      <p:nvGrpSpPr>
-        <p:cNvPr id="1" name=""/>
-        <p:cNvGrpSpPr/>
-        <p:nvPr/>
-      </p:nvGrpSpPr>
-      <p:grpSpPr/>
-      <p:pic>
-        <p:nvPicPr>
-          <p:cNvPr id="2" name="Picture 1" descr="rteu_logo_kucuk.jpg"/>
-          <p:cNvPicPr>
-            <a:picLocks noChangeAspect="1"/>
-          </p:cNvPicPr>
-          <p:nvPr/>
-        </p:nvPicPr>
-        <p:blipFill>
-          <a:blip r:embed="rId2"/>
-          <a:stretch>
-            <a:fillRect/>
-          </a:stretch>
-        </p:blipFill>
-        <p:spPr>
-          <a:xfrm>
-            <a:off x="640080" y="164592"/>
-            <a:ext cx="242773" cy="329184"/>
-          </a:xfrm>
-          <a:prstGeom prst="rect">
-            <a:avLst/>
-          </a:prstGeom>
-        </p:spPr>
-      </p:pic>
-      <p:sp>
-        <p:nvSpPr>
-          <p:cNvPr id="3" name="TextBox 2"/>
-          <p:cNvSpPr txBox="1"/>
-          <p:nvPr/>
-        </p:nvSpPr>
-        <p:spPr>
-          <a:xfrm>
-            <a:off x="1051560" y="182880"/>
-            <a:ext cx="7315200" cy="320040"/>
-          </a:xfrm>
-          <a:prstGeom prst="rect">
-            <a:avLst/>
-          </a:prstGeom>
-          <a:noFill/>
-        </p:spPr>
-        <p:txBody>
-          <a:bodyPr wrap="square" lIns="45720" rIns="45720">
-            <a:spAutoFit/>
-          </a:bodyPr>
-          <a:lstStyle/>
-          <a:p>
-            <a:r>
-              <a:rPr sz="1100" b="0">
-                <a:solidFill>
-                  <a:srgbClr val="5B6770"/>
-                </a:solidFill>
-              </a:rPr>
-              <a:t>CEN429 Secure Programming · Week 7</a:t>
-            </a:r>
-          </a:p>
-        </p:txBody>
-      </p:sp>
-      <p:sp>
-        <p:nvSpPr>
-          <p:cNvPr id="4" name="TextBox 3"/>
-          <p:cNvSpPr txBox="1"/>
-          <p:nvPr/>
-        </p:nvSpPr>
-        <p:spPr>
-          <a:xfrm>
-            <a:off x="640080" y="6446520"/>
-            <a:ext cx="7315200" cy="274320"/>
-          </a:xfrm>
-          <a:prstGeom prst="rect">
-            <a:avLst/>
-          </a:prstGeom>
-          <a:noFill/>
-        </p:spPr>
-        <p:txBody>
-          <a:bodyPr wrap="square" lIns="45720" rIns="45720">
-            <a:spAutoFit/>
-          </a:bodyPr>
-          <a:lstStyle/>
-          <a:p>
-            <a:r>
-              <a:rPr sz="1000" b="0">
-                <a:solidFill>
-                  <a:srgbClr val="5B6770"/>
-                </a:solidFill>
-              </a:rPr>
-              <a:t>RTEU Computer Engineering · 2026-2027 Fall</a:t>
-            </a:r>
-          </a:p>
-        </p:txBody>
-      </p:sp>
-      <p:sp>
-        <p:nvSpPr>
-          <p:cNvPr id="5" name="TextBox 4"/>
-          <p:cNvSpPr txBox="1"/>
-          <p:nvPr/>
-        </p:nvSpPr>
-        <p:spPr>
-          <a:xfrm>
-            <a:off x="10637215" y="6446520"/>
-            <a:ext cx="914400" cy="274320"/>
-          </a:xfrm>
-          <a:prstGeom prst="rect">
-            <a:avLst/>
-          </a:prstGeom>
-          <a:noFill/>
-        </p:spPr>
-        <p:txBody>
-          <a:bodyPr wrap="square" lIns="45720" rIns="45720">
-            <a:spAutoFit/>
-          </a:bodyPr>
-          <a:lstStyle/>
-          <a:p>
-            <a:pPr algn="r"/>
-            <a:r>
-              <a:rPr sz="1000" b="0">
-                <a:solidFill>
-                  <a:srgbClr val="5B6770"/>
-                </a:solidFill>
-              </a:rPr>
-              <a:t>23</a:t>
-            </a:r>
-          </a:p>
-        </p:txBody>
-      </p:sp>
-      <p:sp>
-        <p:nvSpPr>
-          <p:cNvPr id="6" name="TextBox 5"/>
-          <p:cNvSpPr txBox="1"/>
-          <p:nvPr/>
-        </p:nvSpPr>
-        <p:spPr>
-          <a:xfrm>
-            <a:off x="640080" y="548640"/>
-            <a:ext cx="10911535" cy="731520"/>
-          </a:xfrm>
-          <a:prstGeom prst="rect">
-            <a:avLst/>
-          </a:prstGeom>
-          <a:noFill/>
-        </p:spPr>
-        <p:txBody>
-          <a:bodyPr wrap="square" lIns="45720" rIns="45720" anchor="ctr">
-            <a:spAutoFit/>
-          </a:bodyPr>
-          <a:lstStyle/>
-          <a:p>
-            <a:r>
-              <a:rPr sz="3000" b="1">
-                <a:solidFill>
-                  <a:srgbClr val="006D77"/>
-                </a:solidFill>
-              </a:rPr>
-              <a:t>Flow · 1. Summary</a:t>
-            </a:r>
-          </a:p>
-        </p:txBody>
-      </p:sp>
-      <p:sp>
-        <p:nvSpPr>
-          <p:cNvPr id="7" name="TextBox 6"/>
-          <p:cNvSpPr txBox="1"/>
-          <p:nvPr/>
-        </p:nvSpPr>
-        <p:spPr>
-          <a:xfrm>
-            <a:off x="640080" y="1325880"/>
-            <a:ext cx="10911535" cy="843280"/>
-          </a:xfrm>
-          <a:prstGeom prst="rect">
-            <a:avLst/>
-          </a:prstGeom>
-          <a:noFill/>
-        </p:spPr>
-        <p:txBody>
-          <a:bodyPr wrap="square" lIns="45720" rIns="45720">
-            <a:spAutoFit/>
-          </a:bodyPr>
-          <a:lstStyle/>
-          <a:p>
-            <a:pPr>
-              <a:spcAft>
-                <a:spcPts val="300"/>
-              </a:spcAft>
-            </a:pPr>
-            <a:r>
-              <a:rPr sz="2000" b="1">
-                <a:solidFill>
-                  <a:srgbClr val="006D77"/>
-                </a:solidFill>
-              </a:rPr>
-              <a:t>• </a:t>
-            </a:r>
-            <a:r>
-              <a:rPr sz="2000" b="0">
-                <a:solidFill>
-                  <a:srgbClr val="1F2D3A"/>
-                </a:solidFill>
-              </a:rPr>
-              <a:t>Product, architecture, the three most critical assets.</a:t>
-            </a:r>
-          </a:p>
-          <a:p>
-            <a:pPr>
-              <a:spcAft>
-                <a:spcPts val="300"/>
-              </a:spcAft>
-            </a:pPr>
-            <a:r>
-              <a:rPr sz="2000" b="1">
-                <a:solidFill>
-                  <a:srgbClr val="006D77"/>
-                </a:solidFill>
-              </a:rPr>
-              <a:t>• </a:t>
-            </a:r>
-            <a:r>
-              <a:rPr sz="2000" b="0">
-                <a:solidFill>
-                  <a:srgbClr val="1F2D3A"/>
-                </a:solidFill>
-              </a:rPr>
-              <a:t>One diagram, two minutes.</a:t>
-            </a:r>
-          </a:p>
-        </p:txBody>
-      </p:sp>
-    </p:spTree>
-  </p:cSld>
-  <p:clrMapOvr>
-    <a:masterClrMapping/>
-  </p:clrMapOvr>
-</p:sld>
-</file>
-
-<file path=ppt/slides/slide24.xml><?xml version="1.0" encoding="utf-8"?>
-<p:sld xmlns:a="http://schemas.openxmlformats.org/drawingml/2006/main" xmlns:p="http://schemas.openxmlformats.org/presentationml/2006/main" xmlns:r="http://schemas.openxmlformats.org/officeDocument/2006/relationships">
-  <p:cSld>
-    <p:spTree>
-      <p:nvGrpSpPr>
-        <p:cNvPr id="1" name=""/>
-        <p:cNvGrpSpPr/>
-        <p:nvPr/>
-      </p:nvGrpSpPr>
-      <p:grpSpPr/>
-      <p:pic>
-        <p:nvPicPr>
-          <p:cNvPr id="2" name="Picture 1" descr="rteu_logo_kucuk.jpg"/>
-          <p:cNvPicPr>
-            <a:picLocks noChangeAspect="1"/>
-          </p:cNvPicPr>
-          <p:nvPr/>
-        </p:nvPicPr>
-        <p:blipFill>
-          <a:blip r:embed="rId2"/>
-          <a:stretch>
-            <a:fillRect/>
-          </a:stretch>
-        </p:blipFill>
-        <p:spPr>
-          <a:xfrm>
-            <a:off x="640080" y="164592"/>
-            <a:ext cx="242773" cy="329184"/>
-          </a:xfrm>
-          <a:prstGeom prst="rect">
-            <a:avLst/>
-          </a:prstGeom>
-        </p:spPr>
-      </p:pic>
-      <p:sp>
-        <p:nvSpPr>
-          <p:cNvPr id="3" name="TextBox 2"/>
-          <p:cNvSpPr txBox="1"/>
-          <p:nvPr/>
-        </p:nvSpPr>
-        <p:spPr>
-          <a:xfrm>
-            <a:off x="1051560" y="182880"/>
-            <a:ext cx="7315200" cy="320040"/>
-          </a:xfrm>
-          <a:prstGeom prst="rect">
-            <a:avLst/>
-          </a:prstGeom>
-          <a:noFill/>
-        </p:spPr>
-        <p:txBody>
-          <a:bodyPr wrap="square" lIns="45720" rIns="45720">
-            <a:spAutoFit/>
-          </a:bodyPr>
-          <a:lstStyle/>
-          <a:p>
-            <a:r>
-              <a:rPr sz="1100" b="0">
-                <a:solidFill>
-                  <a:srgbClr val="5B6770"/>
-                </a:solidFill>
-              </a:rPr>
-              <a:t>CEN429 Secure Programming · Week 7</a:t>
-            </a:r>
-          </a:p>
-        </p:txBody>
-      </p:sp>
-      <p:sp>
-        <p:nvSpPr>
-          <p:cNvPr id="4" name="TextBox 3"/>
-          <p:cNvSpPr txBox="1"/>
-          <p:nvPr/>
-        </p:nvSpPr>
-        <p:spPr>
-          <a:xfrm>
-            <a:off x="640080" y="6446520"/>
-            <a:ext cx="7315200" cy="274320"/>
-          </a:xfrm>
-          <a:prstGeom prst="rect">
-            <a:avLst/>
-          </a:prstGeom>
-          <a:noFill/>
-        </p:spPr>
-        <p:txBody>
-          <a:bodyPr wrap="square" lIns="45720" rIns="45720">
-            <a:spAutoFit/>
-          </a:bodyPr>
-          <a:lstStyle/>
-          <a:p>
-            <a:r>
-              <a:rPr sz="1000" b="0">
-                <a:solidFill>
-                  <a:srgbClr val="5B6770"/>
-                </a:solidFill>
-              </a:rPr>
-              <a:t>RTEU Computer Engineering · 2026-2027 Fall</a:t>
-            </a:r>
-          </a:p>
-        </p:txBody>
-      </p:sp>
-      <p:sp>
-        <p:nvSpPr>
-          <p:cNvPr id="5" name="TextBox 4"/>
-          <p:cNvSpPr txBox="1"/>
-          <p:nvPr/>
-        </p:nvSpPr>
-        <p:spPr>
-          <a:xfrm>
-            <a:off x="10637215" y="6446520"/>
-            <a:ext cx="914400" cy="274320"/>
-          </a:xfrm>
-          <a:prstGeom prst="rect">
-            <a:avLst/>
-          </a:prstGeom>
-          <a:noFill/>
-        </p:spPr>
-        <p:txBody>
-          <a:bodyPr wrap="square" lIns="45720" rIns="45720">
-            <a:spAutoFit/>
-          </a:bodyPr>
-          <a:lstStyle/>
-          <a:p>
-            <a:pPr algn="r"/>
-            <a:r>
-              <a:rPr sz="1000" b="0">
-                <a:solidFill>
-                  <a:srgbClr val="5B6770"/>
-                </a:solidFill>
-              </a:rPr>
-              <a:t>24</a:t>
-            </a:r>
-          </a:p>
-        </p:txBody>
-      </p:sp>
-      <p:sp>
-        <p:nvSpPr>
-          <p:cNvPr id="6" name="TextBox 5"/>
-          <p:cNvSpPr txBox="1"/>
-          <p:nvPr/>
-        </p:nvSpPr>
-        <p:spPr>
-          <a:xfrm>
-            <a:off x="640080" y="548640"/>
-            <a:ext cx="10911535" cy="731520"/>
-          </a:xfrm>
-          <a:prstGeom prst="rect">
-            <a:avLst/>
-          </a:prstGeom>
-          <a:noFill/>
-        </p:spPr>
-        <p:txBody>
-          <a:bodyPr wrap="square" lIns="45720" rIns="45720" anchor="ctr">
-            <a:spAutoFit/>
-          </a:bodyPr>
-          <a:lstStyle/>
-          <a:p>
-            <a:r>
-              <a:rPr sz="3000" b="1">
-                <a:solidFill>
-                  <a:srgbClr val="006D77"/>
-                </a:solidFill>
-              </a:rPr>
-              <a:t>Flow · 2. Threat Model</a:t>
-            </a:r>
-          </a:p>
-        </p:txBody>
-      </p:sp>
-      <p:sp>
-        <p:nvSpPr>
-          <p:cNvPr id="7" name="TextBox 6"/>
-          <p:cNvSpPr txBox="1"/>
-          <p:nvPr/>
-        </p:nvSpPr>
-        <p:spPr>
-          <a:xfrm>
-            <a:off x="640080" y="1325880"/>
-            <a:ext cx="10911535" cy="843280"/>
-          </a:xfrm>
-          <a:prstGeom prst="rect">
-            <a:avLst/>
-          </a:prstGeom>
-          <a:noFill/>
-        </p:spPr>
-        <p:txBody>
-          <a:bodyPr wrap="square" lIns="45720" rIns="45720">
-            <a:spAutoFit/>
-          </a:bodyPr>
-          <a:lstStyle/>
-          <a:p>
-            <a:pPr>
-              <a:spcAft>
-                <a:spcPts val="300"/>
-              </a:spcAft>
-            </a:pPr>
-            <a:r>
-              <a:rPr sz="2000" b="1">
-                <a:solidFill>
-                  <a:srgbClr val="006D77"/>
-                </a:solidFill>
-              </a:rPr>
-              <a:t>• </a:t>
-            </a:r>
-            <a:r>
-              <a:rPr sz="2000" b="0">
-                <a:solidFill>
-                  <a:srgbClr val="1F2D3A"/>
-                </a:solidFill>
-              </a:rPr>
-              <a:t>One example from STRIDE and the attack tree.</a:t>
-            </a:r>
-          </a:p>
-          <a:p>
-            <a:pPr>
-              <a:spcAft>
-                <a:spcPts val="300"/>
-              </a:spcAft>
-            </a:pPr>
-            <a:r>
-              <a:rPr sz="2000" b="1">
-                <a:solidFill>
-                  <a:srgbClr val="006D77"/>
-                </a:solidFill>
-              </a:rPr>
-              <a:t>• </a:t>
-            </a:r>
-            <a:r>
-              <a:rPr sz="2000" b="0">
-                <a:solidFill>
-                  <a:srgbClr val="1F2D3A"/>
-                </a:solidFill>
-              </a:rPr>
-              <a:t>"This threat, that control."</a:t>
-            </a:r>
-          </a:p>
-        </p:txBody>
-      </p:sp>
-    </p:spTree>
-  </p:cSld>
-  <p:clrMapOvr>
-    <a:masterClrMapping/>
-  </p:clrMapOvr>
-</p:sld>
-</file>
-
-<file path=ppt/slides/slide25.xml><?xml version="1.0" encoding="utf-8"?>
-<p:sld xmlns:a="http://schemas.openxmlformats.org/drawingml/2006/main" xmlns:p="http://schemas.openxmlformats.org/presentationml/2006/main" xmlns:r="http://schemas.openxmlformats.org/officeDocument/2006/relationships">
-  <p:cSld>
-    <p:spTree>
-      <p:nvGrpSpPr>
-        <p:cNvPr id="1" name=""/>
-        <p:cNvGrpSpPr/>
-        <p:nvPr/>
-      </p:nvGrpSpPr>
-      <p:grpSpPr/>
-      <p:pic>
-        <p:nvPicPr>
-          <p:cNvPr id="2" name="Picture 1" descr="rteu_logo_kucuk.jpg"/>
-          <p:cNvPicPr>
-            <a:picLocks noChangeAspect="1"/>
-          </p:cNvPicPr>
-          <p:nvPr/>
-        </p:nvPicPr>
-        <p:blipFill>
-          <a:blip r:embed="rId2"/>
-          <a:stretch>
-            <a:fillRect/>
-          </a:stretch>
-        </p:blipFill>
-        <p:spPr>
-          <a:xfrm>
-            <a:off x="640080" y="164592"/>
-            <a:ext cx="242773" cy="329184"/>
-          </a:xfrm>
-          <a:prstGeom prst="rect">
-            <a:avLst/>
-          </a:prstGeom>
-        </p:spPr>
-      </p:pic>
-      <p:sp>
-        <p:nvSpPr>
-          <p:cNvPr id="3" name="TextBox 2"/>
-          <p:cNvSpPr txBox="1"/>
-          <p:nvPr/>
-        </p:nvSpPr>
-        <p:spPr>
-          <a:xfrm>
-            <a:off x="1051560" y="182880"/>
-            <a:ext cx="7315200" cy="320040"/>
-          </a:xfrm>
-          <a:prstGeom prst="rect">
-            <a:avLst/>
-          </a:prstGeom>
-          <a:noFill/>
-        </p:spPr>
-        <p:txBody>
-          <a:bodyPr wrap="square" lIns="45720" rIns="45720">
-            <a:spAutoFit/>
-          </a:bodyPr>
-          <a:lstStyle/>
-          <a:p>
-            <a:r>
-              <a:rPr sz="1100" b="0">
-                <a:solidFill>
-                  <a:srgbClr val="5B6770"/>
-                </a:solidFill>
-              </a:rPr>
-              <a:t>CEN429 Secure Programming · Week 7</a:t>
-            </a:r>
-          </a:p>
-        </p:txBody>
-      </p:sp>
-      <p:sp>
-        <p:nvSpPr>
-          <p:cNvPr id="4" name="TextBox 3"/>
-          <p:cNvSpPr txBox="1"/>
-          <p:nvPr/>
-        </p:nvSpPr>
-        <p:spPr>
-          <a:xfrm>
-            <a:off x="640080" y="6446520"/>
-            <a:ext cx="7315200" cy="274320"/>
-          </a:xfrm>
-          <a:prstGeom prst="rect">
-            <a:avLst/>
-          </a:prstGeom>
-          <a:noFill/>
-        </p:spPr>
-        <p:txBody>
-          <a:bodyPr wrap="square" lIns="45720" rIns="45720">
-            <a:spAutoFit/>
-          </a:bodyPr>
-          <a:lstStyle/>
-          <a:p>
-            <a:r>
-              <a:rPr sz="1000" b="0">
-                <a:solidFill>
-                  <a:srgbClr val="5B6770"/>
-                </a:solidFill>
-              </a:rPr>
-              <a:t>RTEU Computer Engineering · 2026-2027 Fall</a:t>
-            </a:r>
-          </a:p>
-        </p:txBody>
-      </p:sp>
-      <p:sp>
-        <p:nvSpPr>
-          <p:cNvPr id="5" name="TextBox 4"/>
-          <p:cNvSpPr txBox="1"/>
-          <p:nvPr/>
-        </p:nvSpPr>
-        <p:spPr>
-          <a:xfrm>
-            <a:off x="10637215" y="6446520"/>
-            <a:ext cx="914400" cy="274320"/>
-          </a:xfrm>
-          <a:prstGeom prst="rect">
-            <a:avLst/>
-          </a:prstGeom>
-          <a:noFill/>
-        </p:spPr>
-        <p:txBody>
-          <a:bodyPr wrap="square" lIns="45720" rIns="45720">
-            <a:spAutoFit/>
-          </a:bodyPr>
-          <a:lstStyle/>
-          <a:p>
-            <a:pPr algn="r"/>
-            <a:r>
-              <a:rPr sz="1000" b="0">
-                <a:solidFill>
-                  <a:srgbClr val="5B6770"/>
-                </a:solidFill>
-              </a:rPr>
-              <a:t>25</a:t>
-            </a:r>
-          </a:p>
-        </p:txBody>
-      </p:sp>
-      <p:sp>
-        <p:nvSpPr>
-          <p:cNvPr id="6" name="TextBox 5"/>
-          <p:cNvSpPr txBox="1"/>
-          <p:nvPr/>
-        </p:nvSpPr>
-        <p:spPr>
-          <a:xfrm>
-            <a:off x="640080" y="548640"/>
-            <a:ext cx="10911535" cy="731520"/>
-          </a:xfrm>
-          <a:prstGeom prst="rect">
-            <a:avLst/>
-          </a:prstGeom>
-          <a:noFill/>
-        </p:spPr>
-        <p:txBody>
-          <a:bodyPr wrap="square" lIns="45720" rIns="45720" anchor="ctr">
-            <a:spAutoFit/>
-          </a:bodyPr>
-          <a:lstStyle/>
-          <a:p>
-            <a:r>
-              <a:rPr sz="3000" b="1">
-                <a:solidFill>
-                  <a:srgbClr val="006D77"/>
-                </a:solidFill>
-              </a:rPr>
-              <a:t>Flow · 3. Live Demonstration</a:t>
-            </a:r>
-          </a:p>
-        </p:txBody>
-      </p:sp>
-      <p:sp>
-        <p:nvSpPr>
-          <p:cNvPr id="7" name="TextBox 6"/>
-          <p:cNvSpPr txBox="1"/>
-          <p:nvPr/>
-        </p:nvSpPr>
-        <p:spPr>
-          <a:xfrm>
-            <a:off x="640080" y="1325880"/>
-            <a:ext cx="10911535" cy="843280"/>
-          </a:xfrm>
-          <a:prstGeom prst="rect">
-            <a:avLst/>
-          </a:prstGeom>
-          <a:noFill/>
-        </p:spPr>
-        <p:txBody>
-          <a:bodyPr wrap="square" lIns="45720" rIns="45720">
-            <a:spAutoFit/>
-          </a:bodyPr>
-          <a:lstStyle/>
-          <a:p>
-            <a:pPr>
-              <a:spcAft>
-                <a:spcPts val="300"/>
-              </a:spcAft>
-            </a:pPr>
-            <a:r>
-              <a:rPr sz="2000" b="1">
-                <a:solidFill>
-                  <a:srgbClr val="006D77"/>
-                </a:solidFill>
-              </a:rPr>
-              <a:t>• </a:t>
-            </a:r>
-            <a:r>
-              <a:rPr sz="2000" b="0">
-                <a:solidFill>
-                  <a:srgbClr val="1F2D3A"/>
-                </a:solidFill>
-              </a:rPr>
-              <a:t>Show a control </a:t>
-            </a:r>
-            <a:r>
-              <a:rPr sz="2000" b="1">
-                <a:solidFill>
-                  <a:srgbClr val="1F2D3A"/>
-                </a:solidFill>
-              </a:rPr>
-              <a:t>working live</a:t>
-            </a:r>
-            <a:r>
-              <a:rPr sz="2000" b="0">
-                <a:solidFill>
-                  <a:srgbClr val="1F2D3A"/>
-                </a:solidFill>
-              </a:rPr>
-              <a:t>.</a:t>
-            </a:r>
-          </a:p>
-          <a:p>
-            <a:pPr>
-              <a:spcAft>
-                <a:spcPts val="300"/>
-              </a:spcAft>
-            </a:pPr>
-            <a:r>
-              <a:rPr sz="2000" b="1">
-                <a:solidFill>
-                  <a:srgbClr val="006D77"/>
-                </a:solidFill>
-              </a:rPr>
-              <a:t>• </a:t>
-            </a:r>
-            <a:r>
-              <a:rPr sz="2000" b="0">
-                <a:solidFill>
-                  <a:srgbClr val="1F2D3A"/>
-                </a:solidFill>
-              </a:rPr>
-              <a:t>E.g., encrypted data, a verified signature.</a:t>
-            </a:r>
-          </a:p>
-        </p:txBody>
-      </p:sp>
-    </p:spTree>
-  </p:cSld>
-  <p:clrMapOvr>
-    <a:masterClrMapping/>
-  </p:clrMapOvr>
-</p:sld>
-</file>
-
-<file path=ppt/slides/slide26.xml><?xml version="1.0" encoding="utf-8"?>
-<p:sld xmlns:a="http://schemas.openxmlformats.org/drawingml/2006/main" xmlns:p="http://schemas.openxmlformats.org/presentationml/2006/main" xmlns:r="http://schemas.openxmlformats.org/officeDocument/2006/relationships">
-  <p:cSld>
-    <p:spTree>
-      <p:nvGrpSpPr>
-        <p:cNvPr id="1" name=""/>
-        <p:cNvGrpSpPr/>
-        <p:nvPr/>
-      </p:nvGrpSpPr>
-      <p:grpSpPr/>
-      <p:pic>
-        <p:nvPicPr>
-          <p:cNvPr id="2" name="Picture 1" descr="rteu_logo_kucuk.jpg"/>
-          <p:cNvPicPr>
-            <a:picLocks noChangeAspect="1"/>
-          </p:cNvPicPr>
-          <p:nvPr/>
-        </p:nvPicPr>
-        <p:blipFill>
-          <a:blip r:embed="rId2"/>
-          <a:stretch>
-            <a:fillRect/>
-          </a:stretch>
-        </p:blipFill>
-        <p:spPr>
-          <a:xfrm>
-            <a:off x="640080" y="164592"/>
-            <a:ext cx="242773" cy="329184"/>
-          </a:xfrm>
-          <a:prstGeom prst="rect">
-            <a:avLst/>
-          </a:prstGeom>
-        </p:spPr>
-      </p:pic>
-      <p:sp>
-        <p:nvSpPr>
-          <p:cNvPr id="3" name="TextBox 2"/>
-          <p:cNvSpPr txBox="1"/>
-          <p:nvPr/>
-        </p:nvSpPr>
-        <p:spPr>
-          <a:xfrm>
-            <a:off x="1051560" y="182880"/>
-            <a:ext cx="7315200" cy="320040"/>
-          </a:xfrm>
-          <a:prstGeom prst="rect">
-            <a:avLst/>
-          </a:prstGeom>
-          <a:noFill/>
-        </p:spPr>
-        <p:txBody>
-          <a:bodyPr wrap="square" lIns="45720" rIns="45720">
-            <a:spAutoFit/>
-          </a:bodyPr>
-          <a:lstStyle/>
-          <a:p>
-            <a:r>
-              <a:rPr sz="1100" b="0">
-                <a:solidFill>
-                  <a:srgbClr val="5B6770"/>
-                </a:solidFill>
-              </a:rPr>
-              <a:t>CEN429 Secure Programming · Week 7</a:t>
-            </a:r>
-          </a:p>
-        </p:txBody>
-      </p:sp>
-      <p:sp>
-        <p:nvSpPr>
-          <p:cNvPr id="4" name="TextBox 3"/>
-          <p:cNvSpPr txBox="1"/>
-          <p:nvPr/>
-        </p:nvSpPr>
-        <p:spPr>
-          <a:xfrm>
-            <a:off x="640080" y="6446520"/>
-            <a:ext cx="7315200" cy="274320"/>
-          </a:xfrm>
-          <a:prstGeom prst="rect">
-            <a:avLst/>
-          </a:prstGeom>
-          <a:noFill/>
-        </p:spPr>
-        <p:txBody>
-          <a:bodyPr wrap="square" lIns="45720" rIns="45720">
-            <a:spAutoFit/>
-          </a:bodyPr>
-          <a:lstStyle/>
-          <a:p>
-            <a:r>
-              <a:rPr sz="1000" b="0">
-                <a:solidFill>
-                  <a:srgbClr val="5B6770"/>
-                </a:solidFill>
-              </a:rPr>
-              <a:t>RTEU Computer Engineering · 2026-2027 Fall</a:t>
-            </a:r>
-          </a:p>
-        </p:txBody>
-      </p:sp>
-      <p:sp>
-        <p:nvSpPr>
-          <p:cNvPr id="5" name="TextBox 4"/>
-          <p:cNvSpPr txBox="1"/>
-          <p:nvPr/>
-        </p:nvSpPr>
-        <p:spPr>
-          <a:xfrm>
-            <a:off x="10637215" y="6446520"/>
-            <a:ext cx="914400" cy="274320"/>
-          </a:xfrm>
-          <a:prstGeom prst="rect">
-            <a:avLst/>
-          </a:prstGeom>
-          <a:noFill/>
-        </p:spPr>
-        <p:txBody>
-          <a:bodyPr wrap="square" lIns="45720" rIns="45720">
-            <a:spAutoFit/>
-          </a:bodyPr>
-          <a:lstStyle/>
-          <a:p>
-            <a:pPr algn="r"/>
-            <a:r>
-              <a:rPr sz="1000" b="0">
-                <a:solidFill>
-                  <a:srgbClr val="5B6770"/>
-                </a:solidFill>
-              </a:rPr>
-              <a:t>26</a:t>
-            </a:r>
-          </a:p>
-        </p:txBody>
-      </p:sp>
-      <p:sp>
-        <p:nvSpPr>
-          <p:cNvPr id="6" name="TextBox 5"/>
-          <p:cNvSpPr txBox="1"/>
-          <p:nvPr/>
-        </p:nvSpPr>
-        <p:spPr>
-          <a:xfrm>
-            <a:off x="640080" y="548640"/>
-            <a:ext cx="10911535" cy="731520"/>
-          </a:xfrm>
-          <a:prstGeom prst="rect">
-            <a:avLst/>
-          </a:prstGeom>
-          <a:noFill/>
-        </p:spPr>
-        <p:txBody>
-          <a:bodyPr wrap="square" lIns="45720" rIns="45720" anchor="ctr">
-            <a:spAutoFit/>
-          </a:bodyPr>
-          <a:lstStyle/>
-          <a:p>
-            <a:r>
-              <a:rPr sz="3000" b="1">
-                <a:solidFill>
-                  <a:srgbClr val="006D77"/>
-                </a:solidFill>
-              </a:rPr>
-              <a:t>Flow · 4. Evidence</a:t>
-            </a:r>
-          </a:p>
-        </p:txBody>
-      </p:sp>
-      <p:sp>
-        <p:nvSpPr>
-          <p:cNvPr id="7" name="TextBox 6"/>
-          <p:cNvSpPr txBox="1"/>
-          <p:nvPr/>
-        </p:nvSpPr>
-        <p:spPr>
-          <a:xfrm>
-            <a:off x="640080" y="1325880"/>
-            <a:ext cx="10911535" cy="843280"/>
-          </a:xfrm>
-          <a:prstGeom prst="rect">
-            <a:avLst/>
-          </a:prstGeom>
-          <a:noFill/>
-        </p:spPr>
-        <p:txBody>
-          <a:bodyPr wrap="square" lIns="45720" rIns="45720">
-            <a:spAutoFit/>
-          </a:bodyPr>
-          <a:lstStyle/>
-          <a:p>
-            <a:pPr>
-              <a:spcAft>
-                <a:spcPts val="300"/>
-              </a:spcAft>
-            </a:pPr>
-            <a:r>
-              <a:rPr sz="2000" b="1">
-                <a:solidFill>
-                  <a:srgbClr val="006D77"/>
-                </a:solidFill>
-              </a:rPr>
-              <a:t>• </a:t>
-            </a:r>
-            <a:r>
-              <a:rPr sz="2000" b="0">
-                <a:solidFill>
-                  <a:srgbClr val="1F2D3A"/>
-                </a:solidFill>
-              </a:rPr>
-              <a:t>Tests, protection table.</a:t>
-            </a:r>
-          </a:p>
-          <a:p>
-            <a:pPr>
-              <a:spcAft>
-                <a:spcPts val="300"/>
-              </a:spcAft>
-            </a:pPr>
-            <a:r>
-              <a:rPr sz="2000" b="1">
-                <a:solidFill>
-                  <a:srgbClr val="006D77"/>
-                </a:solidFill>
-              </a:rPr>
-              <a:t>• </a:t>
-            </a:r>
-            <a:r>
-              <a:rPr sz="2000" b="0">
-                <a:solidFill>
-                  <a:srgbClr val="1F2D3A"/>
-                </a:solidFill>
-              </a:rPr>
-              <a:t>"This command, this output."</a:t>
-            </a:r>
-          </a:p>
-        </p:txBody>
-      </p:sp>
-    </p:spTree>
-  </p:cSld>
-  <p:clrMapOvr>
-    <a:masterClrMapping/>
-  </p:clrMapOvr>
-</p:sld>
-</file>
-
-<file path=ppt/slides/slide27.xml><?xml version="1.0" encoding="utf-8"?>
-<p:sld xmlns:a="http://schemas.openxmlformats.org/drawingml/2006/main" xmlns:p="http://schemas.openxmlformats.org/presentationml/2006/main" xmlns:r="http://schemas.openxmlformats.org/officeDocument/2006/relationships">
-  <p:cSld>
-    <p:spTree>
-      <p:nvGrpSpPr>
-        <p:cNvPr id="1" name=""/>
-        <p:cNvGrpSpPr/>
-        <p:nvPr/>
-      </p:nvGrpSpPr>
-      <p:grpSpPr/>
-      <p:pic>
-        <p:nvPicPr>
-          <p:cNvPr id="2" name="Picture 1" descr="rteu_logo_kucuk.jpg"/>
-          <p:cNvPicPr>
-            <a:picLocks noChangeAspect="1"/>
-          </p:cNvPicPr>
-          <p:nvPr/>
-        </p:nvPicPr>
-        <p:blipFill>
-          <a:blip r:embed="rId2"/>
-          <a:stretch>
-            <a:fillRect/>
-          </a:stretch>
-        </p:blipFill>
-        <p:spPr>
-          <a:xfrm>
-            <a:off x="640080" y="164592"/>
-            <a:ext cx="242773" cy="329184"/>
-          </a:xfrm>
-          <a:prstGeom prst="rect">
-            <a:avLst/>
-          </a:prstGeom>
-        </p:spPr>
-      </p:pic>
-      <p:sp>
-        <p:nvSpPr>
-          <p:cNvPr id="3" name="TextBox 2"/>
-          <p:cNvSpPr txBox="1"/>
-          <p:nvPr/>
-        </p:nvSpPr>
-        <p:spPr>
-          <a:xfrm>
-            <a:off x="1051560" y="182880"/>
-            <a:ext cx="7315200" cy="320040"/>
-          </a:xfrm>
-          <a:prstGeom prst="rect">
-            <a:avLst/>
-          </a:prstGeom>
-          <a:noFill/>
-        </p:spPr>
-        <p:txBody>
-          <a:bodyPr wrap="square" lIns="45720" rIns="45720">
-            <a:spAutoFit/>
-          </a:bodyPr>
-          <a:lstStyle/>
-          <a:p>
-            <a:r>
-              <a:rPr sz="1100" b="0">
-                <a:solidFill>
-                  <a:srgbClr val="5B6770"/>
-                </a:solidFill>
-              </a:rPr>
-              <a:t>CEN429 Secure Programming · Week 7</a:t>
-            </a:r>
-          </a:p>
-        </p:txBody>
-      </p:sp>
-      <p:sp>
-        <p:nvSpPr>
-          <p:cNvPr id="4" name="TextBox 3"/>
-          <p:cNvSpPr txBox="1"/>
-          <p:nvPr/>
-        </p:nvSpPr>
-        <p:spPr>
-          <a:xfrm>
-            <a:off x="640080" y="6446520"/>
-            <a:ext cx="7315200" cy="274320"/>
-          </a:xfrm>
-          <a:prstGeom prst="rect">
-            <a:avLst/>
-          </a:prstGeom>
-          <a:noFill/>
-        </p:spPr>
-        <p:txBody>
-          <a:bodyPr wrap="square" lIns="45720" rIns="45720">
-            <a:spAutoFit/>
-          </a:bodyPr>
-          <a:lstStyle/>
-          <a:p>
-            <a:r>
-              <a:rPr sz="1000" b="0">
-                <a:solidFill>
-                  <a:srgbClr val="5B6770"/>
-                </a:solidFill>
-              </a:rPr>
-              <a:t>RTEU Computer Engineering · 2026-2027 Fall</a:t>
-            </a:r>
-          </a:p>
-        </p:txBody>
-      </p:sp>
-      <p:sp>
-        <p:nvSpPr>
-          <p:cNvPr id="5" name="TextBox 4"/>
-          <p:cNvSpPr txBox="1"/>
-          <p:nvPr/>
-        </p:nvSpPr>
-        <p:spPr>
-          <a:xfrm>
-            <a:off x="10637215" y="6446520"/>
-            <a:ext cx="914400" cy="274320"/>
-          </a:xfrm>
-          <a:prstGeom prst="rect">
-            <a:avLst/>
-          </a:prstGeom>
-          <a:noFill/>
-        </p:spPr>
-        <p:txBody>
-          <a:bodyPr wrap="square" lIns="45720" rIns="45720">
-            <a:spAutoFit/>
-          </a:bodyPr>
-          <a:lstStyle/>
-          <a:p>
-            <a:pPr algn="r"/>
-            <a:r>
-              <a:rPr sz="1000" b="0">
-                <a:solidFill>
-                  <a:srgbClr val="5B6770"/>
-                </a:solidFill>
-              </a:rPr>
-              <a:t>27</a:t>
-            </a:r>
-          </a:p>
-        </p:txBody>
-      </p:sp>
-      <p:sp>
-        <p:nvSpPr>
-          <p:cNvPr id="6" name="TextBox 5"/>
-          <p:cNvSpPr txBox="1"/>
-          <p:nvPr/>
-        </p:nvSpPr>
-        <p:spPr>
-          <a:xfrm>
-            <a:off x="640080" y="548640"/>
-            <a:ext cx="10911535" cy="731520"/>
-          </a:xfrm>
-          <a:prstGeom prst="rect">
-            <a:avLst/>
-          </a:prstGeom>
-          <a:noFill/>
-        </p:spPr>
-        <p:txBody>
-          <a:bodyPr wrap="square" lIns="45720" rIns="45720" anchor="ctr">
-            <a:spAutoFit/>
-          </a:bodyPr>
-          <a:lstStyle/>
-          <a:p>
-            <a:r>
-              <a:rPr sz="3000" b="1">
-                <a:solidFill>
-                  <a:srgbClr val="006D77"/>
-                </a:solidFill>
-              </a:rPr>
-              <a:t>Flow · 5. Remaining Risk</a:t>
-            </a:r>
-          </a:p>
-        </p:txBody>
-      </p:sp>
-      <p:sp>
-        <p:nvSpPr>
-          <p:cNvPr id="7" name="TextBox 6"/>
-          <p:cNvSpPr txBox="1"/>
-          <p:nvPr/>
-        </p:nvSpPr>
-        <p:spPr>
-          <a:xfrm>
-            <a:off x="640080" y="1325880"/>
-            <a:ext cx="10911535" cy="843280"/>
-          </a:xfrm>
-          <a:prstGeom prst="rect">
-            <a:avLst/>
-          </a:prstGeom>
-          <a:noFill/>
-        </p:spPr>
-        <p:txBody>
-          <a:bodyPr wrap="square" lIns="45720" rIns="45720">
-            <a:spAutoFit/>
-          </a:bodyPr>
-          <a:lstStyle/>
-          <a:p>
-            <a:pPr>
-              <a:spcAft>
-                <a:spcPts val="300"/>
-              </a:spcAft>
-            </a:pPr>
-            <a:r>
-              <a:rPr sz="2000" b="1">
-                <a:solidFill>
-                  <a:srgbClr val="006D77"/>
-                </a:solidFill>
-              </a:rPr>
-              <a:t>• </a:t>
-            </a:r>
-            <a:r>
-              <a:rPr sz="2000" b="0">
-                <a:solidFill>
-                  <a:srgbClr val="1F2D3A"/>
-                </a:solidFill>
-              </a:rPr>
-              <a:t>What did you deliberately scope out?</a:t>
-            </a:r>
-          </a:p>
-          <a:p>
-            <a:pPr>
-              <a:spcAft>
-                <a:spcPts val="300"/>
-              </a:spcAft>
-            </a:pPr>
-            <a:r>
-              <a:rPr sz="2000" b="1">
-                <a:solidFill>
-                  <a:srgbClr val="006D77"/>
-                </a:solidFill>
-              </a:rPr>
-              <a:t>• </a:t>
-            </a:r>
-            <a:r>
-              <a:rPr sz="2000" b="0">
-                <a:solidFill>
-                  <a:srgbClr val="1F2D3A"/>
-                </a:solidFill>
-              </a:rPr>
-              <a:t>Honest analysis earns points.</a:t>
-            </a:r>
-          </a:p>
-        </p:txBody>
-      </p:sp>
-    </p:spTree>
-  </p:cSld>
-  <p:clrMapOvr>
-    <a:masterClrMapping/>
-  </p:clrMapOvr>
-</p:sld>
-</file>
-
-<file path=ppt/slides/slide28.xml><?xml version="1.0" encoding="utf-8"?>
-<p:sld xmlns:a="http://schemas.openxmlformats.org/drawingml/2006/main" xmlns:p="http://schemas.openxmlformats.org/presentationml/2006/main" xmlns:r="http://schemas.openxmlformats.org/officeDocument/2006/relationships">
-  <p:cSld>
-    <p:bg>
-      <p:bgPr>
-        <a:solidFill>
-          <a:srgbClr val="006D77"/>
-        </a:solidFill>
-        <a:effectLst/>
-      </p:bgPr>
-    </p:bg>
-    <p:spTree>
-      <p:nvGrpSpPr>
-        <p:cNvPr id="1" name=""/>
-        <p:cNvGrpSpPr/>
-        <p:nvPr/>
-      </p:nvGrpSpPr>
-      <p:grpSpPr/>
-      <p:sp>
-        <p:nvSpPr>
-          <p:cNvPr id="2" name="TextBox 1"/>
-          <p:cNvSpPr txBox="1"/>
-          <p:nvPr/>
-        </p:nvSpPr>
-        <p:spPr>
-          <a:xfrm>
-            <a:off x="1051560" y="182880"/>
-            <a:ext cx="7315200" cy="320040"/>
-          </a:xfrm>
-          <a:prstGeom prst="rect">
-            <a:avLst/>
-          </a:prstGeom>
-          <a:noFill/>
-        </p:spPr>
-        <p:txBody>
-          <a:bodyPr wrap="square" lIns="45720" rIns="45720">
-            <a:spAutoFit/>
-          </a:bodyPr>
-          <a:lstStyle/>
-          <a:p>
-            <a:r>
-              <a:rPr sz="1100" b="0">
-                <a:solidFill>
-                  <a:srgbClr val="D8F0F2"/>
-                </a:solidFill>
-              </a:rPr>
-              <a:t>CEN429 Secure Programming · Week 7</a:t>
-            </a:r>
-          </a:p>
-        </p:txBody>
-      </p:sp>
-      <p:sp>
-        <p:nvSpPr>
-          <p:cNvPr id="3" name="TextBox 2"/>
-          <p:cNvSpPr txBox="1"/>
-          <p:nvPr/>
-        </p:nvSpPr>
-        <p:spPr>
-          <a:xfrm>
-            <a:off x="640080" y="6446520"/>
-            <a:ext cx="7315200" cy="274320"/>
-          </a:xfrm>
-          <a:prstGeom prst="rect">
-            <a:avLst/>
-          </a:prstGeom>
-          <a:noFill/>
-        </p:spPr>
-        <p:txBody>
-          <a:bodyPr wrap="square" lIns="45720" rIns="45720">
-            <a:spAutoFit/>
-          </a:bodyPr>
-          <a:lstStyle/>
-          <a:p>
-            <a:r>
-              <a:rPr sz="1000" b="0">
-                <a:solidFill>
-                  <a:srgbClr val="D8F0F2"/>
-                </a:solidFill>
-              </a:rPr>
-              <a:t>RTEU Computer Engineering · 2026-2027 Fall</a:t>
-            </a:r>
-          </a:p>
-        </p:txBody>
-      </p:sp>
-      <p:sp>
-        <p:nvSpPr>
-          <p:cNvPr id="4" name="TextBox 3"/>
-          <p:cNvSpPr txBox="1"/>
-          <p:nvPr/>
-        </p:nvSpPr>
-        <p:spPr>
-          <a:xfrm>
-            <a:off x="10637215" y="6446520"/>
-            <a:ext cx="914400" cy="274320"/>
-          </a:xfrm>
-          <a:prstGeom prst="rect">
-            <a:avLst/>
-          </a:prstGeom>
-          <a:noFill/>
-        </p:spPr>
-        <p:txBody>
-          <a:bodyPr wrap="square" lIns="45720" rIns="45720">
-            <a:spAutoFit/>
-          </a:bodyPr>
-          <a:lstStyle/>
-          <a:p>
-            <a:pPr algn="r"/>
-            <a:r>
-              <a:rPr sz="1000" b="0">
-                <a:solidFill>
-                  <a:srgbClr val="D8F0F2"/>
-                </a:solidFill>
-              </a:rPr>
-              <a:t>28</a:t>
-            </a:r>
-          </a:p>
-        </p:txBody>
-      </p:sp>
-      <p:sp>
-        <p:nvSpPr>
-          <p:cNvPr id="5" name="TextBox 4"/>
-          <p:cNvSpPr txBox="1"/>
-          <p:nvPr/>
-        </p:nvSpPr>
-        <p:spPr>
-          <a:xfrm>
-            <a:off x="640080" y="2743200"/>
-            <a:ext cx="10911535" cy="1280160"/>
-          </a:xfrm>
-          <a:prstGeom prst="rect">
-            <a:avLst/>
-          </a:prstGeom>
-          <a:noFill/>
-        </p:spPr>
-        <p:txBody>
-          <a:bodyPr wrap="square" lIns="45720" rIns="45720">
-            <a:spAutoFit/>
-          </a:bodyPr>
-          <a:lstStyle/>
-          <a:p>
-            <a:pPr algn="l"/>
-            <a:r>
-              <a:rPr sz="4000" b="1">
-                <a:solidFill>
-                  <a:srgbClr val="FFFFFF"/>
-                </a:solidFill>
-              </a:rPr>
-              <a:t>Appendix · Preparation Checklist</a:t>
-            </a:r>
-          </a:p>
-        </p:txBody>
-      </p:sp>
-    </p:spTree>
-  </p:cSld>
-  <p:clrMapOvr>
-    <a:masterClrMapping/>
-  </p:clrMapOvr>
-</p:sld>
-</file>
-
-<file path=ppt/slides/slide29.xml><?xml version="1.0" encoding="utf-8"?>
-<p:sld xmlns:a="http://schemas.openxmlformats.org/drawingml/2006/main" xmlns:p="http://schemas.openxmlformats.org/presentationml/2006/main" xmlns:r="http://schemas.openxmlformats.org/officeDocument/2006/relationships">
-  <p:cSld>
-    <p:spTree>
-      <p:nvGrpSpPr>
-        <p:cNvPr id="1" name=""/>
-        <p:cNvGrpSpPr/>
-        <p:nvPr/>
-      </p:nvGrpSpPr>
-      <p:grpSpPr/>
-      <p:pic>
-        <p:nvPicPr>
-          <p:cNvPr id="2" name="Picture 1" descr="rteu_logo_kucuk.jpg"/>
-          <p:cNvPicPr>
-            <a:picLocks noChangeAspect="1"/>
-          </p:cNvPicPr>
-          <p:nvPr/>
-        </p:nvPicPr>
-        <p:blipFill>
-          <a:blip r:embed="rId2"/>
-          <a:stretch>
-            <a:fillRect/>
-          </a:stretch>
-        </p:blipFill>
-        <p:spPr>
-          <a:xfrm>
-            <a:off x="640080" y="164592"/>
-            <a:ext cx="242773" cy="329184"/>
-          </a:xfrm>
-          <a:prstGeom prst="rect">
-            <a:avLst/>
-          </a:prstGeom>
-        </p:spPr>
-      </p:pic>
-      <p:sp>
-        <p:nvSpPr>
-          <p:cNvPr id="3" name="TextBox 2"/>
-          <p:cNvSpPr txBox="1"/>
-          <p:nvPr/>
-        </p:nvSpPr>
-        <p:spPr>
-          <a:xfrm>
-            <a:off x="1051560" y="182880"/>
-            <a:ext cx="7315200" cy="320040"/>
-          </a:xfrm>
-          <a:prstGeom prst="rect">
-            <a:avLst/>
-          </a:prstGeom>
-          <a:noFill/>
-        </p:spPr>
-        <p:txBody>
-          <a:bodyPr wrap="square" lIns="45720" rIns="45720">
-            <a:spAutoFit/>
-          </a:bodyPr>
-          <a:lstStyle/>
-          <a:p>
-            <a:r>
-              <a:rPr sz="1100" b="0">
-                <a:solidFill>
-                  <a:srgbClr val="5B6770"/>
-                </a:solidFill>
-              </a:rPr>
-              <a:t>CEN429 Secure Programming · Week 7</a:t>
-            </a:r>
-          </a:p>
-        </p:txBody>
-      </p:sp>
-      <p:sp>
-        <p:nvSpPr>
-          <p:cNvPr id="4" name="TextBox 3"/>
-          <p:cNvSpPr txBox="1"/>
-          <p:nvPr/>
-        </p:nvSpPr>
-        <p:spPr>
-          <a:xfrm>
-            <a:off x="640080" y="6446520"/>
-            <a:ext cx="7315200" cy="274320"/>
-          </a:xfrm>
-          <a:prstGeom prst="rect">
-            <a:avLst/>
-          </a:prstGeom>
-          <a:noFill/>
-        </p:spPr>
-        <p:txBody>
-          <a:bodyPr wrap="square" lIns="45720" rIns="45720">
-            <a:spAutoFit/>
-          </a:bodyPr>
-          <a:lstStyle/>
-          <a:p>
-            <a:r>
-              <a:rPr sz="1000" b="0">
-                <a:solidFill>
-                  <a:srgbClr val="5B6770"/>
-                </a:solidFill>
-              </a:rPr>
-              <a:t>RTEU Computer Engineering · 2026-2027 Fall</a:t>
-            </a:r>
-          </a:p>
-        </p:txBody>
-      </p:sp>
-      <p:sp>
-        <p:nvSpPr>
-          <p:cNvPr id="5" name="TextBox 4"/>
-          <p:cNvSpPr txBox="1"/>
-          <p:nvPr/>
-        </p:nvSpPr>
-        <p:spPr>
-          <a:xfrm>
-            <a:off x="10637215" y="6446520"/>
-            <a:ext cx="914400" cy="274320"/>
-          </a:xfrm>
-          <a:prstGeom prst="rect">
-            <a:avLst/>
-          </a:prstGeom>
-          <a:noFill/>
-        </p:spPr>
-        <p:txBody>
-          <a:bodyPr wrap="square" lIns="45720" rIns="45720">
-            <a:spAutoFit/>
-          </a:bodyPr>
-          <a:lstStyle/>
-          <a:p>
-            <a:pPr algn="r"/>
-            <a:r>
-              <a:rPr sz="1000" b="0">
-                <a:solidFill>
-                  <a:srgbClr val="5B6770"/>
-                </a:solidFill>
-              </a:rPr>
-              <a:t>29</a:t>
-            </a:r>
-          </a:p>
-        </p:txBody>
-      </p:sp>
-      <p:sp>
-        <p:nvSpPr>
-          <p:cNvPr id="6" name="TextBox 5"/>
-          <p:cNvSpPr txBox="1"/>
-          <p:nvPr/>
-        </p:nvSpPr>
-        <p:spPr>
-          <a:xfrm>
-            <a:off x="640080" y="548640"/>
-            <a:ext cx="10911535" cy="731520"/>
-          </a:xfrm>
-          <a:prstGeom prst="rect">
-            <a:avLst/>
-          </a:prstGeom>
-          <a:noFill/>
-        </p:spPr>
-        <p:txBody>
-          <a:bodyPr wrap="square" lIns="45720" rIns="45720" anchor="ctr">
-            <a:spAutoFit/>
-          </a:bodyPr>
-          <a:lstStyle/>
-          <a:p>
-            <a:r>
-              <a:rPr sz="3000" b="1">
-                <a:solidFill>
-                  <a:srgbClr val="006D77"/>
-                </a:solidFill>
-              </a:rPr>
-              <a:t>Checklist · Documentation</a:t>
-            </a:r>
-          </a:p>
-        </p:txBody>
-      </p:sp>
-      <p:sp>
-        <p:nvSpPr>
-          <p:cNvPr id="7" name="TextBox 6"/>
-          <p:cNvSpPr txBox="1"/>
-          <p:nvPr/>
-        </p:nvSpPr>
-        <p:spPr>
-          <a:xfrm>
-            <a:off x="640080" y="1325880"/>
-            <a:ext cx="10911535" cy="1219200"/>
-          </a:xfrm>
-          <a:prstGeom prst="rect">
-            <a:avLst/>
-          </a:prstGeom>
-          <a:noFill/>
-        </p:spPr>
-        <p:txBody>
-          <a:bodyPr wrap="square" lIns="45720" rIns="45720">
-            <a:spAutoFit/>
-          </a:bodyPr>
-          <a:lstStyle/>
-          <a:p>
-            <a:pPr>
-              <a:spcAft>
-                <a:spcPts val="300"/>
-              </a:spcAft>
-            </a:pPr>
-            <a:r>
-              <a:rPr sz="2000" b="1">
-                <a:solidFill>
-                  <a:srgbClr val="006D77"/>
-                </a:solidFill>
-              </a:rPr>
-              <a:t>• </a:t>
-            </a:r>
-            <a:r>
-              <a:rPr sz="2000" b="0">
-                <a:solidFill>
-                  <a:srgbClr val="1F2D3A"/>
-                </a:solidFill>
-              </a:rPr>
-              <a:t> </a:t>
-            </a:r>
-          </a:p>
-          <a:p>
-            <a:pPr>
-              <a:spcAft>
-                <a:spcPts val="300"/>
-              </a:spcAft>
-            </a:pPr>
-            <a:r>
-              <a:rPr sz="2000" b="1">
-                <a:solidFill>
-                  <a:srgbClr val="006D77"/>
-                </a:solidFill>
-              </a:rPr>
-              <a:t>• </a:t>
-            </a:r>
-            <a:r>
-              <a:rPr sz="2000" b="0">
-                <a:solidFill>
-                  <a:srgbClr val="1F2D3A"/>
-                </a:solidFill>
-              </a:rPr>
-              <a:t> </a:t>
-            </a:r>
-          </a:p>
-          <a:p>
-            <a:pPr>
-              <a:spcAft>
-                <a:spcPts val="300"/>
-              </a:spcAft>
-            </a:pPr>
-            <a:r>
-              <a:rPr sz="2000" b="1">
-                <a:solidFill>
-                  <a:srgbClr val="006D77"/>
-                </a:solidFill>
-              </a:rPr>
-              <a:t>• </a:t>
-            </a:r>
-            <a:r>
-              <a:rPr sz="2000" b="0">
-                <a:solidFill>
-                  <a:srgbClr val="1F2D3A"/>
-                </a:solidFill>
-              </a:rPr>
-              <a:t> </a:t>
             </a:r>
           </a:p>
         </p:txBody>
@@ -10127,58 +6708,16 @@
           </a:graphicData>
         </a:graphic>
       </p:graphicFrame>
-    </p:spTree>
-  </p:cSld>
-  <p:clrMapOvr>
-    <a:masterClrMapping/>
-  </p:clrMapOvr>
-</p:sld>
-</file>
-
-<file path=ppt/slides/slide30.xml><?xml version="1.0" encoding="utf-8"?>
-<p:sld xmlns:a="http://schemas.openxmlformats.org/drawingml/2006/main" xmlns:p="http://schemas.openxmlformats.org/presentationml/2006/main" xmlns:r="http://schemas.openxmlformats.org/officeDocument/2006/relationships">
-  <p:cSld>
-    <p:spTree>
-      <p:nvGrpSpPr>
-        <p:cNvPr id="1" name=""/>
-        <p:cNvGrpSpPr/>
-        <p:nvPr/>
-      </p:nvGrpSpPr>
-      <p:grpSpPr/>
-      <p:pic>
-        <p:nvPicPr>
-          <p:cNvPr id="2" name="Picture 1" descr="rteu_logo_kucuk.jpg"/>
-          <p:cNvPicPr>
-            <a:picLocks noChangeAspect="1"/>
-          </p:cNvPicPr>
-          <p:nvPr/>
-        </p:nvPicPr>
-        <p:blipFill>
-          <a:blip r:embed="rId2"/>
-          <a:stretch>
-            <a:fillRect/>
-          </a:stretch>
-        </p:blipFill>
-        <p:spPr>
-          <a:xfrm>
-            <a:off x="640080" y="164592"/>
-            <a:ext cx="242773" cy="329184"/>
-          </a:xfrm>
-          <a:prstGeom prst="rect">
-            <a:avLst/>
-          </a:prstGeom>
-        </p:spPr>
-      </p:pic>
-      <p:sp>
-        <p:nvSpPr>
-          <p:cNvPr id="3" name="TextBox 2"/>
+      <p:sp>
+        <p:nvSpPr>
+          <p:cNvPr id="8" name="TextBox 7"/>
           <p:cNvSpPr txBox="1"/>
           <p:nvPr/>
         </p:nvSpPr>
         <p:spPr>
           <a:xfrm>
-            <a:off x="1051560" y="182880"/>
-            <a:ext cx="7315200" cy="320040"/>
+            <a:off x="640080" y="3728923"/>
+            <a:ext cx="10911535" cy="704088"/>
           </a:xfrm>
           <a:prstGeom prst="rect">
             <a:avLst/>
@@ -10191,2371 +6730,14 @@
           </a:bodyPr>
           <a:lstStyle/>
           <a:p>
-            <a:r>
-              <a:rPr sz="1100" b="0">
-                <a:solidFill>
-                  <a:srgbClr val="5B6770"/>
-                </a:solidFill>
-              </a:rPr>
-              <a:t>CEN429 Secure Programming · Week 7</a:t>
-            </a:r>
-          </a:p>
-        </p:txBody>
-      </p:sp>
-      <p:sp>
-        <p:nvSpPr>
-          <p:cNvPr id="4" name="TextBox 3"/>
-          <p:cNvSpPr txBox="1"/>
-          <p:nvPr/>
-        </p:nvSpPr>
-        <p:spPr>
-          <a:xfrm>
-            <a:off x="640080" y="6446520"/>
-            <a:ext cx="7315200" cy="274320"/>
-          </a:xfrm>
-          <a:prstGeom prst="rect">
-            <a:avLst/>
-          </a:prstGeom>
-          <a:noFill/>
-        </p:spPr>
-        <p:txBody>
-          <a:bodyPr wrap="square" lIns="45720" rIns="45720">
-            <a:spAutoFit/>
-          </a:bodyPr>
-          <a:lstStyle/>
-          <a:p>
-            <a:r>
-              <a:rPr sz="1000" b="0">
-                <a:solidFill>
-                  <a:srgbClr val="5B6770"/>
-                </a:solidFill>
-              </a:rPr>
-              <a:t>RTEU Computer Engineering · 2026-2027 Fall</a:t>
-            </a:r>
-          </a:p>
-        </p:txBody>
-      </p:sp>
-      <p:sp>
-        <p:nvSpPr>
-          <p:cNvPr id="5" name="TextBox 4"/>
-          <p:cNvSpPr txBox="1"/>
-          <p:nvPr/>
-        </p:nvSpPr>
-        <p:spPr>
-          <a:xfrm>
-            <a:off x="10637215" y="6446520"/>
-            <a:ext cx="914400" cy="274320"/>
-          </a:xfrm>
-          <a:prstGeom prst="rect">
-            <a:avLst/>
-          </a:prstGeom>
-          <a:noFill/>
-        </p:spPr>
-        <p:txBody>
-          <a:bodyPr wrap="square" lIns="45720" rIns="45720">
-            <a:spAutoFit/>
-          </a:bodyPr>
-          <a:lstStyle/>
-          <a:p>
-            <a:pPr algn="r"/>
-            <a:r>
-              <a:rPr sz="1000" b="0">
-                <a:solidFill>
-                  <a:srgbClr val="5B6770"/>
-                </a:solidFill>
-              </a:rPr>
-              <a:t>30</a:t>
-            </a:r>
-          </a:p>
-        </p:txBody>
-      </p:sp>
-      <p:sp>
-        <p:nvSpPr>
-          <p:cNvPr id="6" name="TextBox 5"/>
-          <p:cNvSpPr txBox="1"/>
-          <p:nvPr/>
-        </p:nvSpPr>
-        <p:spPr>
-          <a:xfrm>
-            <a:off x="640080" y="548640"/>
-            <a:ext cx="10911535" cy="731520"/>
-          </a:xfrm>
-          <a:prstGeom prst="rect">
-            <a:avLst/>
-          </a:prstGeom>
-          <a:noFill/>
-        </p:spPr>
-        <p:txBody>
-          <a:bodyPr wrap="square" lIns="45720" rIns="45720" anchor="ctr">
-            <a:spAutoFit/>
-          </a:bodyPr>
-          <a:lstStyle/>
-          <a:p>
-            <a:r>
-              <a:rPr sz="3000" b="1">
-                <a:solidFill>
-                  <a:srgbClr val="006D77"/>
-                </a:solidFill>
-              </a:rPr>
-              <a:t>Checklist · Demonstration</a:t>
-            </a:r>
-          </a:p>
-        </p:txBody>
-      </p:sp>
-      <p:sp>
-        <p:nvSpPr>
-          <p:cNvPr id="7" name="TextBox 6"/>
-          <p:cNvSpPr txBox="1"/>
-          <p:nvPr/>
-        </p:nvSpPr>
-        <p:spPr>
-          <a:xfrm>
-            <a:off x="640080" y="1325880"/>
-            <a:ext cx="10911535" cy="1219200"/>
-          </a:xfrm>
-          <a:prstGeom prst="rect">
-            <a:avLst/>
-          </a:prstGeom>
-          <a:noFill/>
-        </p:spPr>
-        <p:txBody>
-          <a:bodyPr wrap="square" lIns="45720" rIns="45720">
-            <a:spAutoFit/>
-          </a:bodyPr>
-          <a:lstStyle/>
-          <a:p>
-            <a:pPr>
-              <a:spcAft>
-                <a:spcPts val="300"/>
-              </a:spcAft>
-            </a:pPr>
-            <a:r>
-              <a:rPr sz="2000" b="1">
-                <a:solidFill>
-                  <a:srgbClr val="006D77"/>
-                </a:solidFill>
-              </a:rPr>
-              <a:t>• </a:t>
-            </a:r>
-            <a:r>
-              <a:rPr sz="2000" b="0">
+            <a:pPr algn="l"/>
+            <a:r>
+              <a:rPr sz="1800" b="0">
                 <a:solidFill>
                   <a:srgbClr val="1F2D3A"/>
                 </a:solidFill>
               </a:rPr>
-              <a:t> </a:t>
-            </a:r>
-          </a:p>
-          <a:p>
-            <a:pPr>
-              <a:spcAft>
-                <a:spcPts val="300"/>
-              </a:spcAft>
-            </a:pPr>
-            <a:r>
-              <a:rPr sz="2000" b="1">
-                <a:solidFill>
-                  <a:srgbClr val="006D77"/>
-                </a:solidFill>
-              </a:rPr>
-              <a:t>• </a:t>
-            </a:r>
-            <a:r>
-              <a:rPr sz="2000" b="0">
-                <a:solidFill>
-                  <a:srgbClr val="1F2D3A"/>
-                </a:solidFill>
-              </a:rPr>
-              <a:t> </a:t>
-            </a:r>
-          </a:p>
-          <a:p>
-            <a:pPr>
-              <a:spcAft>
-                <a:spcPts val="300"/>
-              </a:spcAft>
-            </a:pPr>
-            <a:r>
-              <a:rPr sz="2000" b="1">
-                <a:solidFill>
-                  <a:srgbClr val="006D77"/>
-                </a:solidFill>
-              </a:rPr>
-              <a:t>• </a:t>
-            </a:r>
-            <a:r>
-              <a:rPr sz="2000" b="0">
-                <a:solidFill>
-                  <a:srgbClr val="1F2D3A"/>
-                </a:solidFill>
-              </a:rPr>
-              <a:t> </a:t>
-            </a:r>
-          </a:p>
-        </p:txBody>
-      </p:sp>
-    </p:spTree>
-  </p:cSld>
-  <p:clrMapOvr>
-    <a:masterClrMapping/>
-  </p:clrMapOvr>
-</p:sld>
-</file>
-
-<file path=ppt/slides/slide31.xml><?xml version="1.0" encoding="utf-8"?>
-<p:sld xmlns:a="http://schemas.openxmlformats.org/drawingml/2006/main" xmlns:p="http://schemas.openxmlformats.org/presentationml/2006/main" xmlns:r="http://schemas.openxmlformats.org/officeDocument/2006/relationships">
-  <p:cSld>
-    <p:spTree>
-      <p:nvGrpSpPr>
-        <p:cNvPr id="1" name=""/>
-        <p:cNvGrpSpPr/>
-        <p:nvPr/>
-      </p:nvGrpSpPr>
-      <p:grpSpPr/>
-      <p:pic>
-        <p:nvPicPr>
-          <p:cNvPr id="2" name="Picture 1" descr="rteu_logo_kucuk.jpg"/>
-          <p:cNvPicPr>
-            <a:picLocks noChangeAspect="1"/>
-          </p:cNvPicPr>
-          <p:nvPr/>
-        </p:nvPicPr>
-        <p:blipFill>
-          <a:blip r:embed="rId2"/>
-          <a:stretch>
-            <a:fillRect/>
-          </a:stretch>
-        </p:blipFill>
-        <p:spPr>
-          <a:xfrm>
-            <a:off x="640080" y="164592"/>
-            <a:ext cx="242773" cy="329184"/>
-          </a:xfrm>
-          <a:prstGeom prst="rect">
-            <a:avLst/>
-          </a:prstGeom>
-        </p:spPr>
-      </p:pic>
-      <p:sp>
-        <p:nvSpPr>
-          <p:cNvPr id="3" name="TextBox 2"/>
-          <p:cNvSpPr txBox="1"/>
-          <p:nvPr/>
-        </p:nvSpPr>
-        <p:spPr>
-          <a:xfrm>
-            <a:off x="1051560" y="182880"/>
-            <a:ext cx="7315200" cy="320040"/>
-          </a:xfrm>
-          <a:prstGeom prst="rect">
-            <a:avLst/>
-          </a:prstGeom>
-          <a:noFill/>
-        </p:spPr>
-        <p:txBody>
-          <a:bodyPr wrap="square" lIns="45720" rIns="45720">
-            <a:spAutoFit/>
-          </a:bodyPr>
-          <a:lstStyle/>
-          <a:p>
-            <a:r>
-              <a:rPr sz="1100" b="0">
-                <a:solidFill>
-                  <a:srgbClr val="5B6770"/>
-                </a:solidFill>
-              </a:rPr>
-              <a:t>CEN429 Secure Programming · Week 7</a:t>
-            </a:r>
-          </a:p>
-        </p:txBody>
-      </p:sp>
-      <p:sp>
-        <p:nvSpPr>
-          <p:cNvPr id="4" name="TextBox 3"/>
-          <p:cNvSpPr txBox="1"/>
-          <p:nvPr/>
-        </p:nvSpPr>
-        <p:spPr>
-          <a:xfrm>
-            <a:off x="640080" y="6446520"/>
-            <a:ext cx="7315200" cy="274320"/>
-          </a:xfrm>
-          <a:prstGeom prst="rect">
-            <a:avLst/>
-          </a:prstGeom>
-          <a:noFill/>
-        </p:spPr>
-        <p:txBody>
-          <a:bodyPr wrap="square" lIns="45720" rIns="45720">
-            <a:spAutoFit/>
-          </a:bodyPr>
-          <a:lstStyle/>
-          <a:p>
-            <a:r>
-              <a:rPr sz="1000" b="0">
-                <a:solidFill>
-                  <a:srgbClr val="5B6770"/>
-                </a:solidFill>
-              </a:rPr>
-              <a:t>RTEU Computer Engineering · 2026-2027 Fall</a:t>
-            </a:r>
-          </a:p>
-        </p:txBody>
-      </p:sp>
-      <p:sp>
-        <p:nvSpPr>
-          <p:cNvPr id="5" name="TextBox 4"/>
-          <p:cNvSpPr txBox="1"/>
-          <p:nvPr/>
-        </p:nvSpPr>
-        <p:spPr>
-          <a:xfrm>
-            <a:off x="10637215" y="6446520"/>
-            <a:ext cx="914400" cy="274320"/>
-          </a:xfrm>
-          <a:prstGeom prst="rect">
-            <a:avLst/>
-          </a:prstGeom>
-          <a:noFill/>
-        </p:spPr>
-        <p:txBody>
-          <a:bodyPr wrap="square" lIns="45720" rIns="45720">
-            <a:spAutoFit/>
-          </a:bodyPr>
-          <a:lstStyle/>
-          <a:p>
-            <a:pPr algn="r"/>
-            <a:r>
-              <a:rPr sz="1000" b="0">
-                <a:solidFill>
-                  <a:srgbClr val="5B6770"/>
-                </a:solidFill>
-              </a:rPr>
-              <a:t>31</a:t>
-            </a:r>
-          </a:p>
-        </p:txBody>
-      </p:sp>
-      <p:sp>
-        <p:nvSpPr>
-          <p:cNvPr id="6" name="TextBox 5"/>
-          <p:cNvSpPr txBox="1"/>
-          <p:nvPr/>
-        </p:nvSpPr>
-        <p:spPr>
-          <a:xfrm>
-            <a:off x="640080" y="548640"/>
-            <a:ext cx="10911535" cy="731520"/>
-          </a:xfrm>
-          <a:prstGeom prst="rect">
-            <a:avLst/>
-          </a:prstGeom>
-          <a:noFill/>
-        </p:spPr>
-        <p:txBody>
-          <a:bodyPr wrap="square" lIns="45720" rIns="45720" anchor="ctr">
-            <a:spAutoFit/>
-          </a:bodyPr>
-          <a:lstStyle/>
-          <a:p>
-            <a:r>
-              <a:rPr sz="3000" b="1">
-                <a:solidFill>
-                  <a:srgbClr val="006D77"/>
-                </a:solidFill>
-              </a:rPr>
-              <a:t>Checklist · Security</a:t>
-            </a:r>
-          </a:p>
-        </p:txBody>
-      </p:sp>
-      <p:sp>
-        <p:nvSpPr>
-          <p:cNvPr id="7" name="TextBox 6"/>
-          <p:cNvSpPr txBox="1"/>
-          <p:nvPr/>
-        </p:nvSpPr>
-        <p:spPr>
-          <a:xfrm>
-            <a:off x="640080" y="1325880"/>
-            <a:ext cx="10911535" cy="1219200"/>
-          </a:xfrm>
-          <a:prstGeom prst="rect">
-            <a:avLst/>
-          </a:prstGeom>
-          <a:noFill/>
-        </p:spPr>
-        <p:txBody>
-          <a:bodyPr wrap="square" lIns="45720" rIns="45720">
-            <a:spAutoFit/>
-          </a:bodyPr>
-          <a:lstStyle/>
-          <a:p>
-            <a:pPr>
-              <a:spcAft>
-                <a:spcPts val="300"/>
-              </a:spcAft>
-            </a:pPr>
-            <a:r>
-              <a:rPr sz="2000" b="1">
-                <a:solidFill>
-                  <a:srgbClr val="006D77"/>
-                </a:solidFill>
-              </a:rPr>
-              <a:t>• </a:t>
-            </a:r>
-            <a:r>
-              <a:rPr sz="2000" b="0">
-                <a:solidFill>
-                  <a:srgbClr val="1F2D3A"/>
-                </a:solidFill>
-              </a:rPr>
-              <a:t> </a:t>
-            </a:r>
-          </a:p>
-          <a:p>
-            <a:pPr>
-              <a:spcAft>
-                <a:spcPts val="300"/>
-              </a:spcAft>
-            </a:pPr>
-            <a:r>
-              <a:rPr sz="2000" b="1">
-                <a:solidFill>
-                  <a:srgbClr val="006D77"/>
-                </a:solidFill>
-              </a:rPr>
-              <a:t>• </a:t>
-            </a:r>
-            <a:r>
-              <a:rPr sz="2000" b="0">
-                <a:solidFill>
-                  <a:srgbClr val="1F2D3A"/>
-                </a:solidFill>
-              </a:rPr>
-              <a:t> </a:t>
-            </a:r>
-          </a:p>
-          <a:p>
-            <a:pPr>
-              <a:spcAft>
-                <a:spcPts val="300"/>
-              </a:spcAft>
-            </a:pPr>
-            <a:r>
-              <a:rPr sz="2000" b="1">
-                <a:solidFill>
-                  <a:srgbClr val="006D77"/>
-                </a:solidFill>
-              </a:rPr>
-              <a:t>• </a:t>
-            </a:r>
-            <a:r>
-              <a:rPr sz="2000" b="0">
-                <a:solidFill>
-                  <a:srgbClr val="1F2D3A"/>
-                </a:solidFill>
-              </a:rPr>
-              <a:t> </a:t>
-            </a:r>
-          </a:p>
-        </p:txBody>
-      </p:sp>
-    </p:spTree>
-  </p:cSld>
-  <p:clrMapOvr>
-    <a:masterClrMapping/>
-  </p:clrMapOvr>
-</p:sld>
-</file>
-
-<file path=ppt/slides/slide32.xml><?xml version="1.0" encoding="utf-8"?>
-<p:sld xmlns:a="http://schemas.openxmlformats.org/drawingml/2006/main" xmlns:p="http://schemas.openxmlformats.org/presentationml/2006/main" xmlns:r="http://schemas.openxmlformats.org/officeDocument/2006/relationships">
-  <p:cSld>
-    <p:bg>
-      <p:bgPr>
-        <a:solidFill>
-          <a:srgbClr val="006D77"/>
-        </a:solidFill>
-        <a:effectLst/>
-      </p:bgPr>
-    </p:bg>
-    <p:spTree>
-      <p:nvGrpSpPr>
-        <p:cNvPr id="1" name=""/>
-        <p:cNvGrpSpPr/>
-        <p:nvPr/>
-      </p:nvGrpSpPr>
-      <p:grpSpPr/>
-      <p:sp>
-        <p:nvSpPr>
-          <p:cNvPr id="2" name="TextBox 1"/>
-          <p:cNvSpPr txBox="1"/>
-          <p:nvPr/>
-        </p:nvSpPr>
-        <p:spPr>
-          <a:xfrm>
-            <a:off x="1051560" y="182880"/>
-            <a:ext cx="7315200" cy="320040"/>
-          </a:xfrm>
-          <a:prstGeom prst="rect">
-            <a:avLst/>
-          </a:prstGeom>
-          <a:noFill/>
-        </p:spPr>
-        <p:txBody>
-          <a:bodyPr wrap="square" lIns="45720" rIns="45720">
-            <a:spAutoFit/>
-          </a:bodyPr>
-          <a:lstStyle/>
-          <a:p>
-            <a:r>
-              <a:rPr sz="1100" b="0">
-                <a:solidFill>
-                  <a:srgbClr val="D8F0F2"/>
-                </a:solidFill>
-              </a:rPr>
-              <a:t>CEN429 Secure Programming · Week 7</a:t>
-            </a:r>
-          </a:p>
-        </p:txBody>
-      </p:sp>
-      <p:sp>
-        <p:nvSpPr>
-          <p:cNvPr id="3" name="TextBox 2"/>
-          <p:cNvSpPr txBox="1"/>
-          <p:nvPr/>
-        </p:nvSpPr>
-        <p:spPr>
-          <a:xfrm>
-            <a:off x="640080" y="6446520"/>
-            <a:ext cx="7315200" cy="274320"/>
-          </a:xfrm>
-          <a:prstGeom prst="rect">
-            <a:avLst/>
-          </a:prstGeom>
-          <a:noFill/>
-        </p:spPr>
-        <p:txBody>
-          <a:bodyPr wrap="square" lIns="45720" rIns="45720">
-            <a:spAutoFit/>
-          </a:bodyPr>
-          <a:lstStyle/>
-          <a:p>
-            <a:r>
-              <a:rPr sz="1000" b="0">
-                <a:solidFill>
-                  <a:srgbClr val="D8F0F2"/>
-                </a:solidFill>
-              </a:rPr>
-              <a:t>RTEU Computer Engineering · 2026-2027 Fall</a:t>
-            </a:r>
-          </a:p>
-        </p:txBody>
-      </p:sp>
-      <p:sp>
-        <p:nvSpPr>
-          <p:cNvPr id="4" name="TextBox 3"/>
-          <p:cNvSpPr txBox="1"/>
-          <p:nvPr/>
-        </p:nvSpPr>
-        <p:spPr>
-          <a:xfrm>
-            <a:off x="10637215" y="6446520"/>
-            <a:ext cx="914400" cy="274320"/>
-          </a:xfrm>
-          <a:prstGeom prst="rect">
-            <a:avLst/>
-          </a:prstGeom>
-          <a:noFill/>
-        </p:spPr>
-        <p:txBody>
-          <a:bodyPr wrap="square" lIns="45720" rIns="45720">
-            <a:spAutoFit/>
-          </a:bodyPr>
-          <a:lstStyle/>
-          <a:p>
-            <a:pPr algn="r"/>
-            <a:r>
-              <a:rPr sz="1000" b="0">
-                <a:solidFill>
-                  <a:srgbClr val="D8F0F2"/>
-                </a:solidFill>
-              </a:rPr>
-              <a:t>32</a:t>
-            </a:r>
-          </a:p>
-        </p:txBody>
-      </p:sp>
-      <p:sp>
-        <p:nvSpPr>
-          <p:cNvPr id="5" name="TextBox 4"/>
-          <p:cNvSpPr txBox="1"/>
-          <p:nvPr/>
-        </p:nvSpPr>
-        <p:spPr>
-          <a:xfrm>
-            <a:off x="640080" y="2743200"/>
-            <a:ext cx="10911535" cy="1280160"/>
-          </a:xfrm>
-          <a:prstGeom prst="rect">
-            <a:avLst/>
-          </a:prstGeom>
-          <a:noFill/>
-        </p:spPr>
-        <p:txBody>
-          <a:bodyPr wrap="square" lIns="45720" rIns="45720">
-            <a:spAutoFit/>
-          </a:bodyPr>
-          <a:lstStyle/>
-          <a:p>
-            <a:pPr algn="l"/>
-            <a:r>
-              <a:rPr sz="4000" b="1">
-                <a:solidFill>
-                  <a:srgbClr val="FFFFFF"/>
-                </a:solidFill>
-              </a:rPr>
-              <a:t>Appendix · Sample Questions</a:t>
-            </a:r>
-          </a:p>
-        </p:txBody>
-      </p:sp>
-    </p:spTree>
-  </p:cSld>
-  <p:clrMapOvr>
-    <a:masterClrMapping/>
-  </p:clrMapOvr>
-</p:sld>
-</file>
-
-<file path=ppt/slides/slide33.xml><?xml version="1.0" encoding="utf-8"?>
-<p:sld xmlns:a="http://schemas.openxmlformats.org/drawingml/2006/main" xmlns:p="http://schemas.openxmlformats.org/presentationml/2006/main" xmlns:r="http://schemas.openxmlformats.org/officeDocument/2006/relationships">
-  <p:cSld>
-    <p:spTree>
-      <p:nvGrpSpPr>
-        <p:cNvPr id="1" name=""/>
-        <p:cNvGrpSpPr/>
-        <p:nvPr/>
-      </p:nvGrpSpPr>
-      <p:grpSpPr/>
-      <p:pic>
-        <p:nvPicPr>
-          <p:cNvPr id="2" name="Picture 1" descr="rteu_logo_kucuk.jpg"/>
-          <p:cNvPicPr>
-            <a:picLocks noChangeAspect="1"/>
-          </p:cNvPicPr>
-          <p:nvPr/>
-        </p:nvPicPr>
-        <p:blipFill>
-          <a:blip r:embed="rId2"/>
-          <a:stretch>
-            <a:fillRect/>
-          </a:stretch>
-        </p:blipFill>
-        <p:spPr>
-          <a:xfrm>
-            <a:off x="640080" y="164592"/>
-            <a:ext cx="242773" cy="329184"/>
-          </a:xfrm>
-          <a:prstGeom prst="rect">
-            <a:avLst/>
-          </a:prstGeom>
-        </p:spPr>
-      </p:pic>
-      <p:sp>
-        <p:nvSpPr>
-          <p:cNvPr id="3" name="TextBox 2"/>
-          <p:cNvSpPr txBox="1"/>
-          <p:nvPr/>
-        </p:nvSpPr>
-        <p:spPr>
-          <a:xfrm>
-            <a:off x="1051560" y="182880"/>
-            <a:ext cx="7315200" cy="320040"/>
-          </a:xfrm>
-          <a:prstGeom prst="rect">
-            <a:avLst/>
-          </a:prstGeom>
-          <a:noFill/>
-        </p:spPr>
-        <p:txBody>
-          <a:bodyPr wrap="square" lIns="45720" rIns="45720">
-            <a:spAutoFit/>
-          </a:bodyPr>
-          <a:lstStyle/>
-          <a:p>
-            <a:r>
-              <a:rPr sz="1100" b="0">
-                <a:solidFill>
-                  <a:srgbClr val="5B6770"/>
-                </a:solidFill>
-              </a:rPr>
-              <a:t>CEN429 Secure Programming · Week 7</a:t>
-            </a:r>
-          </a:p>
-        </p:txBody>
-      </p:sp>
-      <p:sp>
-        <p:nvSpPr>
-          <p:cNvPr id="4" name="TextBox 3"/>
-          <p:cNvSpPr txBox="1"/>
-          <p:nvPr/>
-        </p:nvSpPr>
-        <p:spPr>
-          <a:xfrm>
-            <a:off x="640080" y="6446520"/>
-            <a:ext cx="7315200" cy="274320"/>
-          </a:xfrm>
-          <a:prstGeom prst="rect">
-            <a:avLst/>
-          </a:prstGeom>
-          <a:noFill/>
-        </p:spPr>
-        <p:txBody>
-          <a:bodyPr wrap="square" lIns="45720" rIns="45720">
-            <a:spAutoFit/>
-          </a:bodyPr>
-          <a:lstStyle/>
-          <a:p>
-            <a:r>
-              <a:rPr sz="1000" b="0">
-                <a:solidFill>
-                  <a:srgbClr val="5B6770"/>
-                </a:solidFill>
-              </a:rPr>
-              <a:t>RTEU Computer Engineering · 2026-2027 Fall</a:t>
-            </a:r>
-          </a:p>
-        </p:txBody>
-      </p:sp>
-      <p:sp>
-        <p:nvSpPr>
-          <p:cNvPr id="5" name="TextBox 4"/>
-          <p:cNvSpPr txBox="1"/>
-          <p:nvPr/>
-        </p:nvSpPr>
-        <p:spPr>
-          <a:xfrm>
-            <a:off x="10637215" y="6446520"/>
-            <a:ext cx="914400" cy="274320"/>
-          </a:xfrm>
-          <a:prstGeom prst="rect">
-            <a:avLst/>
-          </a:prstGeom>
-          <a:noFill/>
-        </p:spPr>
-        <p:txBody>
-          <a:bodyPr wrap="square" lIns="45720" rIns="45720">
-            <a:spAutoFit/>
-          </a:bodyPr>
-          <a:lstStyle/>
-          <a:p>
-            <a:pPr algn="r"/>
-            <a:r>
-              <a:rPr sz="1000" b="0">
-                <a:solidFill>
-                  <a:srgbClr val="5B6770"/>
-                </a:solidFill>
-              </a:rPr>
-              <a:t>33</a:t>
-            </a:r>
-          </a:p>
-        </p:txBody>
-      </p:sp>
-      <p:sp>
-        <p:nvSpPr>
-          <p:cNvPr id="6" name="TextBox 5"/>
-          <p:cNvSpPr txBox="1"/>
-          <p:nvPr/>
-        </p:nvSpPr>
-        <p:spPr>
-          <a:xfrm>
-            <a:off x="640080" y="548640"/>
-            <a:ext cx="10911535" cy="731520"/>
-          </a:xfrm>
-          <a:prstGeom prst="rect">
-            <a:avLst/>
-          </a:prstGeom>
-          <a:noFill/>
-        </p:spPr>
-        <p:txBody>
-          <a:bodyPr wrap="square" lIns="45720" rIns="45720" anchor="ctr">
-            <a:spAutoFit/>
-          </a:bodyPr>
-          <a:lstStyle/>
-          <a:p>
-            <a:r>
-              <a:rPr sz="3000" b="1">
-                <a:solidFill>
-                  <a:srgbClr val="006D77"/>
-                </a:solidFill>
-              </a:rPr>
-              <a:t>Question 1</a:t>
-            </a:r>
-          </a:p>
-        </p:txBody>
-      </p:sp>
-      <p:sp>
-        <p:nvSpPr>
-          <p:cNvPr id="7" name="TextBox 6"/>
-          <p:cNvSpPr txBox="1"/>
-          <p:nvPr/>
-        </p:nvSpPr>
-        <p:spPr>
-          <a:xfrm>
-            <a:off x="640080" y="1325880"/>
-            <a:ext cx="10911535" cy="439928"/>
-          </a:xfrm>
-          <a:prstGeom prst="rect">
-            <a:avLst/>
-          </a:prstGeom>
-          <a:noFill/>
-        </p:spPr>
-        <p:txBody>
-          <a:bodyPr wrap="square" lIns="45720" rIns="45720">
-            <a:spAutoFit/>
-          </a:bodyPr>
-          <a:lstStyle/>
-          <a:p>
-            <a:pPr algn="l"/>
-            <a:r>
-              <a:rPr sz="2000" b="1">
-                <a:solidFill>
-                  <a:srgbClr val="1F2D3A"/>
-                </a:solidFill>
-              </a:rPr>
-              <a:t>Your three most critical assets and their C/I/I+ labels?</a:t>
-            </a:r>
-          </a:p>
-        </p:txBody>
-      </p:sp>
-      <p:sp>
-        <p:nvSpPr>
-          <p:cNvPr id="8" name="TextBox 7"/>
-          <p:cNvSpPr txBox="1"/>
-          <p:nvPr/>
-        </p:nvSpPr>
-        <p:spPr>
-          <a:xfrm>
-            <a:off x="640080" y="1875536"/>
-            <a:ext cx="10911535" cy="439928"/>
-          </a:xfrm>
-          <a:prstGeom prst="rect">
-            <a:avLst/>
-          </a:prstGeom>
-          <a:noFill/>
-        </p:spPr>
-        <p:txBody>
-          <a:bodyPr wrap="square" lIns="45720" rIns="45720">
-            <a:spAutoFit/>
-          </a:bodyPr>
-          <a:lstStyle/>
-          <a:p>
-            <a:pPr algn="l"/>
-            <a:r>
-              <a:rPr sz="2000" b="0">
-                <a:solidFill>
-                  <a:srgbClr val="1F2D3A"/>
-                </a:solidFill>
-              </a:rPr>
-              <a:t>Keep your answer ready; know the lifecycle of every asset.</a:t>
-            </a:r>
-          </a:p>
-        </p:txBody>
-      </p:sp>
-    </p:spTree>
-  </p:cSld>
-  <p:clrMapOvr>
-    <a:masterClrMapping/>
-  </p:clrMapOvr>
-</p:sld>
-</file>
-
-<file path=ppt/slides/slide34.xml><?xml version="1.0" encoding="utf-8"?>
-<p:sld xmlns:a="http://schemas.openxmlformats.org/drawingml/2006/main" xmlns:p="http://schemas.openxmlformats.org/presentationml/2006/main" xmlns:r="http://schemas.openxmlformats.org/officeDocument/2006/relationships">
-  <p:cSld>
-    <p:spTree>
-      <p:nvGrpSpPr>
-        <p:cNvPr id="1" name=""/>
-        <p:cNvGrpSpPr/>
-        <p:nvPr/>
-      </p:nvGrpSpPr>
-      <p:grpSpPr/>
-      <p:pic>
-        <p:nvPicPr>
-          <p:cNvPr id="2" name="Picture 1" descr="rteu_logo_kucuk.jpg"/>
-          <p:cNvPicPr>
-            <a:picLocks noChangeAspect="1"/>
-          </p:cNvPicPr>
-          <p:nvPr/>
-        </p:nvPicPr>
-        <p:blipFill>
-          <a:blip r:embed="rId2"/>
-          <a:stretch>
-            <a:fillRect/>
-          </a:stretch>
-        </p:blipFill>
-        <p:spPr>
-          <a:xfrm>
-            <a:off x="640080" y="164592"/>
-            <a:ext cx="242773" cy="329184"/>
-          </a:xfrm>
-          <a:prstGeom prst="rect">
-            <a:avLst/>
-          </a:prstGeom>
-        </p:spPr>
-      </p:pic>
-      <p:sp>
-        <p:nvSpPr>
-          <p:cNvPr id="3" name="TextBox 2"/>
-          <p:cNvSpPr txBox="1"/>
-          <p:nvPr/>
-        </p:nvSpPr>
-        <p:spPr>
-          <a:xfrm>
-            <a:off x="1051560" y="182880"/>
-            <a:ext cx="7315200" cy="320040"/>
-          </a:xfrm>
-          <a:prstGeom prst="rect">
-            <a:avLst/>
-          </a:prstGeom>
-          <a:noFill/>
-        </p:spPr>
-        <p:txBody>
-          <a:bodyPr wrap="square" lIns="45720" rIns="45720">
-            <a:spAutoFit/>
-          </a:bodyPr>
-          <a:lstStyle/>
-          <a:p>
-            <a:r>
-              <a:rPr sz="1100" b="0">
-                <a:solidFill>
-                  <a:srgbClr val="5B6770"/>
-                </a:solidFill>
-              </a:rPr>
-              <a:t>CEN429 Secure Programming · Week 7</a:t>
-            </a:r>
-          </a:p>
-        </p:txBody>
-      </p:sp>
-      <p:sp>
-        <p:nvSpPr>
-          <p:cNvPr id="4" name="TextBox 3"/>
-          <p:cNvSpPr txBox="1"/>
-          <p:nvPr/>
-        </p:nvSpPr>
-        <p:spPr>
-          <a:xfrm>
-            <a:off x="640080" y="6446520"/>
-            <a:ext cx="7315200" cy="274320"/>
-          </a:xfrm>
-          <a:prstGeom prst="rect">
-            <a:avLst/>
-          </a:prstGeom>
-          <a:noFill/>
-        </p:spPr>
-        <p:txBody>
-          <a:bodyPr wrap="square" lIns="45720" rIns="45720">
-            <a:spAutoFit/>
-          </a:bodyPr>
-          <a:lstStyle/>
-          <a:p>
-            <a:r>
-              <a:rPr sz="1000" b="0">
-                <a:solidFill>
-                  <a:srgbClr val="5B6770"/>
-                </a:solidFill>
-              </a:rPr>
-              <a:t>RTEU Computer Engineering · 2026-2027 Fall</a:t>
-            </a:r>
-          </a:p>
-        </p:txBody>
-      </p:sp>
-      <p:sp>
-        <p:nvSpPr>
-          <p:cNvPr id="5" name="TextBox 4"/>
-          <p:cNvSpPr txBox="1"/>
-          <p:nvPr/>
-        </p:nvSpPr>
-        <p:spPr>
-          <a:xfrm>
-            <a:off x="10637215" y="6446520"/>
-            <a:ext cx="914400" cy="274320"/>
-          </a:xfrm>
-          <a:prstGeom prst="rect">
-            <a:avLst/>
-          </a:prstGeom>
-          <a:noFill/>
-        </p:spPr>
-        <p:txBody>
-          <a:bodyPr wrap="square" lIns="45720" rIns="45720">
-            <a:spAutoFit/>
-          </a:bodyPr>
-          <a:lstStyle/>
-          <a:p>
-            <a:pPr algn="r"/>
-            <a:r>
-              <a:rPr sz="1000" b="0">
-                <a:solidFill>
-                  <a:srgbClr val="5B6770"/>
-                </a:solidFill>
-              </a:rPr>
-              <a:t>34</a:t>
-            </a:r>
-          </a:p>
-        </p:txBody>
-      </p:sp>
-      <p:sp>
-        <p:nvSpPr>
-          <p:cNvPr id="6" name="TextBox 5"/>
-          <p:cNvSpPr txBox="1"/>
-          <p:nvPr/>
-        </p:nvSpPr>
-        <p:spPr>
-          <a:xfrm>
-            <a:off x="640080" y="548640"/>
-            <a:ext cx="10911535" cy="731520"/>
-          </a:xfrm>
-          <a:prstGeom prst="rect">
-            <a:avLst/>
-          </a:prstGeom>
-          <a:noFill/>
-        </p:spPr>
-        <p:txBody>
-          <a:bodyPr wrap="square" lIns="45720" rIns="45720" anchor="ctr">
-            <a:spAutoFit/>
-          </a:bodyPr>
-          <a:lstStyle/>
-          <a:p>
-            <a:r>
-              <a:rPr sz="3000" b="1">
-                <a:solidFill>
-                  <a:srgbClr val="006D77"/>
-                </a:solidFill>
-              </a:rPr>
-              <a:t>Question 2</a:t>
-            </a:r>
-          </a:p>
-        </p:txBody>
-      </p:sp>
-      <p:sp>
-        <p:nvSpPr>
-          <p:cNvPr id="7" name="TextBox 6"/>
-          <p:cNvSpPr txBox="1"/>
-          <p:nvPr/>
-        </p:nvSpPr>
-        <p:spPr>
-          <a:xfrm>
-            <a:off x="640080" y="1325880"/>
-            <a:ext cx="10911535" cy="439928"/>
-          </a:xfrm>
-          <a:prstGeom prst="rect">
-            <a:avLst/>
-          </a:prstGeom>
-          <a:noFill/>
-        </p:spPr>
-        <p:txBody>
-          <a:bodyPr wrap="square" lIns="45720" rIns="45720">
-            <a:spAutoFit/>
-          </a:bodyPr>
-          <a:lstStyle/>
-          <a:p>
-            <a:pPr algn="l"/>
-            <a:r>
-              <a:rPr sz="2000" b="1">
-                <a:solidFill>
-                  <a:srgbClr val="1F2D3A"/>
-                </a:solidFill>
-              </a:rPr>
-              <a:t>Which control against this threat, and how was it verified?</a:t>
-            </a:r>
-          </a:p>
-        </p:txBody>
-      </p:sp>
-      <p:sp>
-        <p:nvSpPr>
-          <p:cNvPr id="8" name="TextBox 7"/>
-          <p:cNvSpPr txBox="1"/>
-          <p:nvPr/>
-        </p:nvSpPr>
-        <p:spPr>
-          <a:xfrm>
-            <a:off x="640080" y="1875536"/>
-            <a:ext cx="10911535" cy="439928"/>
-          </a:xfrm>
-          <a:prstGeom prst="rect">
-            <a:avLst/>
-          </a:prstGeom>
-          <a:noFill/>
-        </p:spPr>
-        <p:txBody>
-          <a:bodyPr wrap="square" lIns="45720" rIns="45720">
-            <a:spAutoFit/>
-          </a:bodyPr>
-          <a:lstStyle/>
-          <a:p>
-            <a:pPr algn="l"/>
-            <a:r>
-              <a:rPr sz="2000" b="0">
-                <a:solidFill>
-                  <a:srgbClr val="1F2D3A"/>
-                </a:solidFill>
-              </a:rPr>
-              <a:t>Show the threat → control → evidence chain.</a:t>
-            </a:r>
-          </a:p>
-        </p:txBody>
-      </p:sp>
-    </p:spTree>
-  </p:cSld>
-  <p:clrMapOvr>
-    <a:masterClrMapping/>
-  </p:clrMapOvr>
-</p:sld>
-</file>
-
-<file path=ppt/slides/slide35.xml><?xml version="1.0" encoding="utf-8"?>
-<p:sld xmlns:a="http://schemas.openxmlformats.org/drawingml/2006/main" xmlns:p="http://schemas.openxmlformats.org/presentationml/2006/main" xmlns:r="http://schemas.openxmlformats.org/officeDocument/2006/relationships">
-  <p:cSld>
-    <p:spTree>
-      <p:nvGrpSpPr>
-        <p:cNvPr id="1" name=""/>
-        <p:cNvGrpSpPr/>
-        <p:nvPr/>
-      </p:nvGrpSpPr>
-      <p:grpSpPr/>
-      <p:pic>
-        <p:nvPicPr>
-          <p:cNvPr id="2" name="Picture 1" descr="rteu_logo_kucuk.jpg"/>
-          <p:cNvPicPr>
-            <a:picLocks noChangeAspect="1"/>
-          </p:cNvPicPr>
-          <p:nvPr/>
-        </p:nvPicPr>
-        <p:blipFill>
-          <a:blip r:embed="rId2"/>
-          <a:stretch>
-            <a:fillRect/>
-          </a:stretch>
-        </p:blipFill>
-        <p:spPr>
-          <a:xfrm>
-            <a:off x="640080" y="164592"/>
-            <a:ext cx="242773" cy="329184"/>
-          </a:xfrm>
-          <a:prstGeom prst="rect">
-            <a:avLst/>
-          </a:prstGeom>
-        </p:spPr>
-      </p:pic>
-      <p:sp>
-        <p:nvSpPr>
-          <p:cNvPr id="3" name="TextBox 2"/>
-          <p:cNvSpPr txBox="1"/>
-          <p:nvPr/>
-        </p:nvSpPr>
-        <p:spPr>
-          <a:xfrm>
-            <a:off x="1051560" y="182880"/>
-            <a:ext cx="7315200" cy="320040"/>
-          </a:xfrm>
-          <a:prstGeom prst="rect">
-            <a:avLst/>
-          </a:prstGeom>
-          <a:noFill/>
-        </p:spPr>
-        <p:txBody>
-          <a:bodyPr wrap="square" lIns="45720" rIns="45720">
-            <a:spAutoFit/>
-          </a:bodyPr>
-          <a:lstStyle/>
-          <a:p>
-            <a:r>
-              <a:rPr sz="1100" b="0">
-                <a:solidFill>
-                  <a:srgbClr val="5B6770"/>
-                </a:solidFill>
-              </a:rPr>
-              <a:t>CEN429 Secure Programming · Week 7</a:t>
-            </a:r>
-          </a:p>
-        </p:txBody>
-      </p:sp>
-      <p:sp>
-        <p:nvSpPr>
-          <p:cNvPr id="4" name="TextBox 3"/>
-          <p:cNvSpPr txBox="1"/>
-          <p:nvPr/>
-        </p:nvSpPr>
-        <p:spPr>
-          <a:xfrm>
-            <a:off x="640080" y="6446520"/>
-            <a:ext cx="7315200" cy="274320"/>
-          </a:xfrm>
-          <a:prstGeom prst="rect">
-            <a:avLst/>
-          </a:prstGeom>
-          <a:noFill/>
-        </p:spPr>
-        <p:txBody>
-          <a:bodyPr wrap="square" lIns="45720" rIns="45720">
-            <a:spAutoFit/>
-          </a:bodyPr>
-          <a:lstStyle/>
-          <a:p>
-            <a:r>
-              <a:rPr sz="1000" b="0">
-                <a:solidFill>
-                  <a:srgbClr val="5B6770"/>
-                </a:solidFill>
-              </a:rPr>
-              <a:t>RTEU Computer Engineering · 2026-2027 Fall</a:t>
-            </a:r>
-          </a:p>
-        </p:txBody>
-      </p:sp>
-      <p:sp>
-        <p:nvSpPr>
-          <p:cNvPr id="5" name="TextBox 4"/>
-          <p:cNvSpPr txBox="1"/>
-          <p:nvPr/>
-        </p:nvSpPr>
-        <p:spPr>
-          <a:xfrm>
-            <a:off x="10637215" y="6446520"/>
-            <a:ext cx="914400" cy="274320"/>
-          </a:xfrm>
-          <a:prstGeom prst="rect">
-            <a:avLst/>
-          </a:prstGeom>
-          <a:noFill/>
-        </p:spPr>
-        <p:txBody>
-          <a:bodyPr wrap="square" lIns="45720" rIns="45720">
-            <a:spAutoFit/>
-          </a:bodyPr>
-          <a:lstStyle/>
-          <a:p>
-            <a:pPr algn="r"/>
-            <a:r>
-              <a:rPr sz="1000" b="0">
-                <a:solidFill>
-                  <a:srgbClr val="5B6770"/>
-                </a:solidFill>
-              </a:rPr>
-              <a:t>35</a:t>
-            </a:r>
-          </a:p>
-        </p:txBody>
-      </p:sp>
-      <p:sp>
-        <p:nvSpPr>
-          <p:cNvPr id="6" name="TextBox 5"/>
-          <p:cNvSpPr txBox="1"/>
-          <p:nvPr/>
-        </p:nvSpPr>
-        <p:spPr>
-          <a:xfrm>
-            <a:off x="640080" y="548640"/>
-            <a:ext cx="10911535" cy="731520"/>
-          </a:xfrm>
-          <a:prstGeom prst="rect">
-            <a:avLst/>
-          </a:prstGeom>
-          <a:noFill/>
-        </p:spPr>
-        <p:txBody>
-          <a:bodyPr wrap="square" lIns="45720" rIns="45720" anchor="ctr">
-            <a:spAutoFit/>
-          </a:bodyPr>
-          <a:lstStyle/>
-          <a:p>
-            <a:r>
-              <a:rPr sz="3000" b="1">
-                <a:solidFill>
-                  <a:srgbClr val="006D77"/>
-                </a:solidFill>
-              </a:rPr>
-              <a:t>Question 3</a:t>
-            </a:r>
-          </a:p>
-        </p:txBody>
-      </p:sp>
-      <p:sp>
-        <p:nvSpPr>
-          <p:cNvPr id="7" name="TextBox 6"/>
-          <p:cNvSpPr txBox="1"/>
-          <p:nvPr/>
-        </p:nvSpPr>
-        <p:spPr>
-          <a:xfrm>
-            <a:off x="640080" y="1325880"/>
-            <a:ext cx="10911535" cy="439928"/>
-          </a:xfrm>
-          <a:prstGeom prst="rect">
-            <a:avLst/>
-          </a:prstGeom>
-          <a:noFill/>
-        </p:spPr>
-        <p:txBody>
-          <a:bodyPr wrap="square" lIns="45720" rIns="45720">
-            <a:spAutoFit/>
-          </a:bodyPr>
-          <a:lstStyle/>
-          <a:p>
-            <a:pPr algn="l"/>
-            <a:r>
-              <a:rPr sz="2000" b="1">
-                <a:solidFill>
-                  <a:srgbClr val="1F2D3A"/>
-                </a:solidFill>
-              </a:rPr>
-              <a:t>Where does this key come from, where does it live, when is it deleted?</a:t>
-            </a:r>
-          </a:p>
-        </p:txBody>
-      </p:sp>
-      <p:sp>
-        <p:nvSpPr>
-          <p:cNvPr id="8" name="TextBox 7"/>
-          <p:cNvSpPr txBox="1"/>
-          <p:nvPr/>
-        </p:nvSpPr>
-        <p:spPr>
-          <a:xfrm>
-            <a:off x="640080" y="1875536"/>
-            <a:ext cx="10911535" cy="439928"/>
-          </a:xfrm>
-          <a:prstGeom prst="rect">
-            <a:avLst/>
-          </a:prstGeom>
-          <a:noFill/>
-        </p:spPr>
-        <p:txBody>
-          <a:bodyPr wrap="square" lIns="45720" rIns="45720">
-            <a:spAutoFit/>
-          </a:bodyPr>
-          <a:lstStyle/>
-          <a:p>
-            <a:pPr algn="l"/>
-            <a:r>
-              <a:rPr sz="2000" b="0">
-                <a:solidFill>
-                  <a:srgbClr val="1F2D3A"/>
-                </a:solidFill>
-              </a:rPr>
-              <a:t>Explain the key's lifecycle.</a:t>
-            </a:r>
-          </a:p>
-        </p:txBody>
-      </p:sp>
-    </p:spTree>
-  </p:cSld>
-  <p:clrMapOvr>
-    <a:masterClrMapping/>
-  </p:clrMapOvr>
-</p:sld>
-</file>
-
-<file path=ppt/slides/slide36.xml><?xml version="1.0" encoding="utf-8"?>
-<p:sld xmlns:a="http://schemas.openxmlformats.org/drawingml/2006/main" xmlns:p="http://schemas.openxmlformats.org/presentationml/2006/main" xmlns:r="http://schemas.openxmlformats.org/officeDocument/2006/relationships">
-  <p:cSld>
-    <p:spTree>
-      <p:nvGrpSpPr>
-        <p:cNvPr id="1" name=""/>
-        <p:cNvGrpSpPr/>
-        <p:nvPr/>
-      </p:nvGrpSpPr>
-      <p:grpSpPr/>
-      <p:pic>
-        <p:nvPicPr>
-          <p:cNvPr id="2" name="Picture 1" descr="rteu_logo_kucuk.jpg"/>
-          <p:cNvPicPr>
-            <a:picLocks noChangeAspect="1"/>
-          </p:cNvPicPr>
-          <p:nvPr/>
-        </p:nvPicPr>
-        <p:blipFill>
-          <a:blip r:embed="rId2"/>
-          <a:stretch>
-            <a:fillRect/>
-          </a:stretch>
-        </p:blipFill>
-        <p:spPr>
-          <a:xfrm>
-            <a:off x="640080" y="164592"/>
-            <a:ext cx="242773" cy="329184"/>
-          </a:xfrm>
-          <a:prstGeom prst="rect">
-            <a:avLst/>
-          </a:prstGeom>
-        </p:spPr>
-      </p:pic>
-      <p:sp>
-        <p:nvSpPr>
-          <p:cNvPr id="3" name="TextBox 2"/>
-          <p:cNvSpPr txBox="1"/>
-          <p:nvPr/>
-        </p:nvSpPr>
-        <p:spPr>
-          <a:xfrm>
-            <a:off x="1051560" y="182880"/>
-            <a:ext cx="7315200" cy="320040"/>
-          </a:xfrm>
-          <a:prstGeom prst="rect">
-            <a:avLst/>
-          </a:prstGeom>
-          <a:noFill/>
-        </p:spPr>
-        <p:txBody>
-          <a:bodyPr wrap="square" lIns="45720" rIns="45720">
-            <a:spAutoFit/>
-          </a:bodyPr>
-          <a:lstStyle/>
-          <a:p>
-            <a:r>
-              <a:rPr sz="1100" b="0">
-                <a:solidFill>
-                  <a:srgbClr val="5B6770"/>
-                </a:solidFill>
-              </a:rPr>
-              <a:t>CEN429 Secure Programming · Week 7</a:t>
-            </a:r>
-          </a:p>
-        </p:txBody>
-      </p:sp>
-      <p:sp>
-        <p:nvSpPr>
-          <p:cNvPr id="4" name="TextBox 3"/>
-          <p:cNvSpPr txBox="1"/>
-          <p:nvPr/>
-        </p:nvSpPr>
-        <p:spPr>
-          <a:xfrm>
-            <a:off x="640080" y="6446520"/>
-            <a:ext cx="7315200" cy="274320"/>
-          </a:xfrm>
-          <a:prstGeom prst="rect">
-            <a:avLst/>
-          </a:prstGeom>
-          <a:noFill/>
-        </p:spPr>
-        <p:txBody>
-          <a:bodyPr wrap="square" lIns="45720" rIns="45720">
-            <a:spAutoFit/>
-          </a:bodyPr>
-          <a:lstStyle/>
-          <a:p>
-            <a:r>
-              <a:rPr sz="1000" b="0">
-                <a:solidFill>
-                  <a:srgbClr val="5B6770"/>
-                </a:solidFill>
-              </a:rPr>
-              <a:t>RTEU Computer Engineering · 2026-2027 Fall</a:t>
-            </a:r>
-          </a:p>
-        </p:txBody>
-      </p:sp>
-      <p:sp>
-        <p:nvSpPr>
-          <p:cNvPr id="5" name="TextBox 4"/>
-          <p:cNvSpPr txBox="1"/>
-          <p:nvPr/>
-        </p:nvSpPr>
-        <p:spPr>
-          <a:xfrm>
-            <a:off x="10637215" y="6446520"/>
-            <a:ext cx="914400" cy="274320"/>
-          </a:xfrm>
-          <a:prstGeom prst="rect">
-            <a:avLst/>
-          </a:prstGeom>
-          <a:noFill/>
-        </p:spPr>
-        <p:txBody>
-          <a:bodyPr wrap="square" lIns="45720" rIns="45720">
-            <a:spAutoFit/>
-          </a:bodyPr>
-          <a:lstStyle/>
-          <a:p>
-            <a:pPr algn="r"/>
-            <a:r>
-              <a:rPr sz="1000" b="0">
-                <a:solidFill>
-                  <a:srgbClr val="5B6770"/>
-                </a:solidFill>
-              </a:rPr>
-              <a:t>36</a:t>
-            </a:r>
-          </a:p>
-        </p:txBody>
-      </p:sp>
-      <p:sp>
-        <p:nvSpPr>
-          <p:cNvPr id="6" name="TextBox 5"/>
-          <p:cNvSpPr txBox="1"/>
-          <p:nvPr/>
-        </p:nvSpPr>
-        <p:spPr>
-          <a:xfrm>
-            <a:off x="640080" y="548640"/>
-            <a:ext cx="10911535" cy="731520"/>
-          </a:xfrm>
-          <a:prstGeom prst="rect">
-            <a:avLst/>
-          </a:prstGeom>
-          <a:noFill/>
-        </p:spPr>
-        <p:txBody>
-          <a:bodyPr wrap="square" lIns="45720" rIns="45720" anchor="ctr">
-            <a:spAutoFit/>
-          </a:bodyPr>
-          <a:lstStyle/>
-          <a:p>
-            <a:r>
-              <a:rPr sz="3000" b="1">
-                <a:solidFill>
-                  <a:srgbClr val="006D77"/>
-                </a:solidFill>
-              </a:rPr>
-              <a:t>Question 4</a:t>
-            </a:r>
-          </a:p>
-        </p:txBody>
-      </p:sp>
-      <p:sp>
-        <p:nvSpPr>
-          <p:cNvPr id="7" name="TextBox 6"/>
-          <p:cNvSpPr txBox="1"/>
-          <p:nvPr/>
-        </p:nvSpPr>
-        <p:spPr>
-          <a:xfrm>
-            <a:off x="640080" y="1325880"/>
-            <a:ext cx="10911535" cy="439928"/>
-          </a:xfrm>
-          <a:prstGeom prst="rect">
-            <a:avLst/>
-          </a:prstGeom>
-          <a:noFill/>
-        </p:spPr>
-        <p:txBody>
-          <a:bodyPr wrap="square" lIns="45720" rIns="45720">
-            <a:spAutoFit/>
-          </a:bodyPr>
-          <a:lstStyle/>
-          <a:p>
-            <a:pPr algn="l"/>
-            <a:r>
-              <a:rPr sz="2000" b="1">
-                <a:solidFill>
-                  <a:srgbClr val="1F2D3A"/>
-                </a:solidFill>
-              </a:rPr>
-              <a:t>What is your remaining risk? Why is it acceptable?</a:t>
-            </a:r>
-          </a:p>
-        </p:txBody>
-      </p:sp>
-      <p:sp>
-        <p:nvSpPr>
-          <p:cNvPr id="8" name="TextBox 7"/>
-          <p:cNvSpPr txBox="1"/>
-          <p:nvPr/>
-        </p:nvSpPr>
-        <p:spPr>
-          <a:xfrm>
-            <a:off x="640080" y="1875536"/>
-            <a:ext cx="10911535" cy="439928"/>
-          </a:xfrm>
-          <a:prstGeom prst="rect">
-            <a:avLst/>
-          </a:prstGeom>
-          <a:noFill/>
-        </p:spPr>
-        <p:txBody>
-          <a:bodyPr wrap="square" lIns="45720" rIns="45720">
-            <a:spAutoFit/>
-          </a:bodyPr>
-          <a:lstStyle/>
-          <a:p>
-            <a:pPr algn="l"/>
-            <a:r>
-              <a:rPr sz="2000" b="0">
-                <a:solidFill>
-                  <a:srgbClr val="1F2D3A"/>
-                </a:solidFill>
-              </a:rPr>
-              <a:t>Answer honestly and with justification.</a:t>
-            </a:r>
-          </a:p>
-        </p:txBody>
-      </p:sp>
-    </p:spTree>
-  </p:cSld>
-  <p:clrMapOvr>
-    <a:masterClrMapping/>
-  </p:clrMapOvr>
-</p:sld>
-</file>
-
-<file path=ppt/slides/slide37.xml><?xml version="1.0" encoding="utf-8"?>
-<p:sld xmlns:a="http://schemas.openxmlformats.org/drawingml/2006/main" xmlns:p="http://schemas.openxmlformats.org/presentationml/2006/main" xmlns:r="http://schemas.openxmlformats.org/officeDocument/2006/relationships">
-  <p:cSld>
-    <p:bg>
-      <p:bgPr>
-        <a:solidFill>
-          <a:srgbClr val="006D77"/>
-        </a:solidFill>
-        <a:effectLst/>
-      </p:bgPr>
-    </p:bg>
-    <p:spTree>
-      <p:nvGrpSpPr>
-        <p:cNvPr id="1" name=""/>
-        <p:cNvGrpSpPr/>
-        <p:nvPr/>
-      </p:nvGrpSpPr>
-      <p:grpSpPr/>
-      <p:sp>
-        <p:nvSpPr>
-          <p:cNvPr id="2" name="TextBox 1"/>
-          <p:cNvSpPr txBox="1"/>
-          <p:nvPr/>
-        </p:nvSpPr>
-        <p:spPr>
-          <a:xfrm>
-            <a:off x="1051560" y="182880"/>
-            <a:ext cx="7315200" cy="320040"/>
-          </a:xfrm>
-          <a:prstGeom prst="rect">
-            <a:avLst/>
-          </a:prstGeom>
-          <a:noFill/>
-        </p:spPr>
-        <p:txBody>
-          <a:bodyPr wrap="square" lIns="45720" rIns="45720">
-            <a:spAutoFit/>
-          </a:bodyPr>
-          <a:lstStyle/>
-          <a:p>
-            <a:r>
-              <a:rPr sz="1100" b="0">
-                <a:solidFill>
-                  <a:srgbClr val="D8F0F2"/>
-                </a:solidFill>
-              </a:rPr>
-              <a:t>CEN429 Secure Programming · Week 7</a:t>
-            </a:r>
-          </a:p>
-        </p:txBody>
-      </p:sp>
-      <p:sp>
-        <p:nvSpPr>
-          <p:cNvPr id="3" name="TextBox 2"/>
-          <p:cNvSpPr txBox="1"/>
-          <p:nvPr/>
-        </p:nvSpPr>
-        <p:spPr>
-          <a:xfrm>
-            <a:off x="640080" y="6446520"/>
-            <a:ext cx="7315200" cy="274320"/>
-          </a:xfrm>
-          <a:prstGeom prst="rect">
-            <a:avLst/>
-          </a:prstGeom>
-          <a:noFill/>
-        </p:spPr>
-        <p:txBody>
-          <a:bodyPr wrap="square" lIns="45720" rIns="45720">
-            <a:spAutoFit/>
-          </a:bodyPr>
-          <a:lstStyle/>
-          <a:p>
-            <a:r>
-              <a:rPr sz="1000" b="0">
-                <a:solidFill>
-                  <a:srgbClr val="D8F0F2"/>
-                </a:solidFill>
-              </a:rPr>
-              <a:t>RTEU Computer Engineering · 2026-2027 Fall</a:t>
-            </a:r>
-          </a:p>
-        </p:txBody>
-      </p:sp>
-      <p:sp>
-        <p:nvSpPr>
-          <p:cNvPr id="4" name="TextBox 3"/>
-          <p:cNvSpPr txBox="1"/>
-          <p:nvPr/>
-        </p:nvSpPr>
-        <p:spPr>
-          <a:xfrm>
-            <a:off x="10637215" y="6446520"/>
-            <a:ext cx="914400" cy="274320"/>
-          </a:xfrm>
-          <a:prstGeom prst="rect">
-            <a:avLst/>
-          </a:prstGeom>
-          <a:noFill/>
-        </p:spPr>
-        <p:txBody>
-          <a:bodyPr wrap="square" lIns="45720" rIns="45720">
-            <a:spAutoFit/>
-          </a:bodyPr>
-          <a:lstStyle/>
-          <a:p>
-            <a:pPr algn="r"/>
-            <a:r>
-              <a:rPr sz="1000" b="0">
-                <a:solidFill>
-                  <a:srgbClr val="D8F0F2"/>
-                </a:solidFill>
-              </a:rPr>
-              <a:t>37</a:t>
-            </a:r>
-          </a:p>
-        </p:txBody>
-      </p:sp>
-      <p:sp>
-        <p:nvSpPr>
-          <p:cNvPr id="5" name="TextBox 4"/>
-          <p:cNvSpPr txBox="1"/>
-          <p:nvPr/>
-        </p:nvSpPr>
-        <p:spPr>
-          <a:xfrm>
-            <a:off x="640080" y="2743200"/>
-            <a:ext cx="10911535" cy="1280160"/>
-          </a:xfrm>
-          <a:prstGeom prst="rect">
-            <a:avLst/>
-          </a:prstGeom>
-          <a:noFill/>
-        </p:spPr>
-        <p:txBody>
-          <a:bodyPr wrap="square" lIns="45720" rIns="45720">
-            <a:spAutoFit/>
-          </a:bodyPr>
-          <a:lstStyle/>
-          <a:p>
-            <a:pPr algn="l"/>
-            <a:r>
-              <a:rPr sz="4000" b="1">
-                <a:solidFill>
-                  <a:srgbClr val="FFFFFF"/>
-                </a:solidFill>
-              </a:rPr>
-              <a:t>Appendix · Common Mistakes</a:t>
-            </a:r>
-          </a:p>
-        </p:txBody>
-      </p:sp>
-    </p:spTree>
-  </p:cSld>
-  <p:clrMapOvr>
-    <a:masterClrMapping/>
-  </p:clrMapOvr>
-</p:sld>
-</file>
-
-<file path=ppt/slides/slide38.xml><?xml version="1.0" encoding="utf-8"?>
-<p:sld xmlns:a="http://schemas.openxmlformats.org/drawingml/2006/main" xmlns:p="http://schemas.openxmlformats.org/presentationml/2006/main" xmlns:r="http://schemas.openxmlformats.org/officeDocument/2006/relationships">
-  <p:cSld>
-    <p:spTree>
-      <p:nvGrpSpPr>
-        <p:cNvPr id="1" name=""/>
-        <p:cNvGrpSpPr/>
-        <p:nvPr/>
-      </p:nvGrpSpPr>
-      <p:grpSpPr/>
-      <p:pic>
-        <p:nvPicPr>
-          <p:cNvPr id="2" name="Picture 1" descr="rteu_logo_kucuk.jpg"/>
-          <p:cNvPicPr>
-            <a:picLocks noChangeAspect="1"/>
-          </p:cNvPicPr>
-          <p:nvPr/>
-        </p:nvPicPr>
-        <p:blipFill>
-          <a:blip r:embed="rId2"/>
-          <a:stretch>
-            <a:fillRect/>
-          </a:stretch>
-        </p:blipFill>
-        <p:spPr>
-          <a:xfrm>
-            <a:off x="640080" y="164592"/>
-            <a:ext cx="242773" cy="329184"/>
-          </a:xfrm>
-          <a:prstGeom prst="rect">
-            <a:avLst/>
-          </a:prstGeom>
-        </p:spPr>
-      </p:pic>
-      <p:sp>
-        <p:nvSpPr>
-          <p:cNvPr id="3" name="TextBox 2"/>
-          <p:cNvSpPr txBox="1"/>
-          <p:nvPr/>
-        </p:nvSpPr>
-        <p:spPr>
-          <a:xfrm>
-            <a:off x="1051560" y="182880"/>
-            <a:ext cx="7315200" cy="320040"/>
-          </a:xfrm>
-          <a:prstGeom prst="rect">
-            <a:avLst/>
-          </a:prstGeom>
-          <a:noFill/>
-        </p:spPr>
-        <p:txBody>
-          <a:bodyPr wrap="square" lIns="45720" rIns="45720">
-            <a:spAutoFit/>
-          </a:bodyPr>
-          <a:lstStyle/>
-          <a:p>
-            <a:r>
-              <a:rPr sz="1100" b="0">
-                <a:solidFill>
-                  <a:srgbClr val="5B6770"/>
-                </a:solidFill>
-              </a:rPr>
-              <a:t>CEN429 Secure Programming · Week 7</a:t>
-            </a:r>
-          </a:p>
-        </p:txBody>
-      </p:sp>
-      <p:sp>
-        <p:nvSpPr>
-          <p:cNvPr id="4" name="TextBox 3"/>
-          <p:cNvSpPr txBox="1"/>
-          <p:nvPr/>
-        </p:nvSpPr>
-        <p:spPr>
-          <a:xfrm>
-            <a:off x="640080" y="6446520"/>
-            <a:ext cx="7315200" cy="274320"/>
-          </a:xfrm>
-          <a:prstGeom prst="rect">
-            <a:avLst/>
-          </a:prstGeom>
-          <a:noFill/>
-        </p:spPr>
-        <p:txBody>
-          <a:bodyPr wrap="square" lIns="45720" rIns="45720">
-            <a:spAutoFit/>
-          </a:bodyPr>
-          <a:lstStyle/>
-          <a:p>
-            <a:r>
-              <a:rPr sz="1000" b="0">
-                <a:solidFill>
-                  <a:srgbClr val="5B6770"/>
-                </a:solidFill>
-              </a:rPr>
-              <a:t>RTEU Computer Engineering · 2026-2027 Fall</a:t>
-            </a:r>
-          </a:p>
-        </p:txBody>
-      </p:sp>
-      <p:sp>
-        <p:nvSpPr>
-          <p:cNvPr id="5" name="TextBox 4"/>
-          <p:cNvSpPr txBox="1"/>
-          <p:nvPr/>
-        </p:nvSpPr>
-        <p:spPr>
-          <a:xfrm>
-            <a:off x="10637215" y="6446520"/>
-            <a:ext cx="914400" cy="274320"/>
-          </a:xfrm>
-          <a:prstGeom prst="rect">
-            <a:avLst/>
-          </a:prstGeom>
-          <a:noFill/>
-        </p:spPr>
-        <p:txBody>
-          <a:bodyPr wrap="square" lIns="45720" rIns="45720">
-            <a:spAutoFit/>
-          </a:bodyPr>
-          <a:lstStyle/>
-          <a:p>
-            <a:pPr algn="r"/>
-            <a:r>
-              <a:rPr sz="1000" b="0">
-                <a:solidFill>
-                  <a:srgbClr val="5B6770"/>
-                </a:solidFill>
-              </a:rPr>
-              <a:t>38</a:t>
-            </a:r>
-          </a:p>
-        </p:txBody>
-      </p:sp>
-      <p:sp>
-        <p:nvSpPr>
-          <p:cNvPr id="6" name="TextBox 5"/>
-          <p:cNvSpPr txBox="1"/>
-          <p:nvPr/>
-        </p:nvSpPr>
-        <p:spPr>
-          <a:xfrm>
-            <a:off x="640080" y="548640"/>
-            <a:ext cx="10911535" cy="731520"/>
-          </a:xfrm>
-          <a:prstGeom prst="rect">
-            <a:avLst/>
-          </a:prstGeom>
-          <a:noFill/>
-        </p:spPr>
-        <p:txBody>
-          <a:bodyPr wrap="square" lIns="45720" rIns="45720" anchor="ctr">
-            <a:spAutoFit/>
-          </a:bodyPr>
-          <a:lstStyle/>
-          <a:p>
-            <a:r>
-              <a:rPr sz="3000" b="1">
-                <a:solidFill>
-                  <a:srgbClr val="006D77"/>
-                </a:solidFill>
-              </a:rPr>
-              <a:t>Mistake List</a:t>
-            </a:r>
-          </a:p>
-        </p:txBody>
-      </p:sp>
-      <p:sp>
-        <p:nvSpPr>
-          <p:cNvPr id="7" name="TextBox 6"/>
-          <p:cNvSpPr txBox="1"/>
-          <p:nvPr/>
-        </p:nvSpPr>
-        <p:spPr>
-          <a:xfrm>
-            <a:off x="640080" y="1325880"/>
-            <a:ext cx="10911535" cy="1971040"/>
-          </a:xfrm>
-          <a:prstGeom prst="rect">
-            <a:avLst/>
-          </a:prstGeom>
-          <a:noFill/>
-        </p:spPr>
-        <p:txBody>
-          <a:bodyPr wrap="square" lIns="45720" rIns="45720">
-            <a:spAutoFit/>
-          </a:bodyPr>
-          <a:lstStyle/>
-          <a:p>
-            <a:pPr>
-              <a:spcAft>
-                <a:spcPts val="300"/>
-              </a:spcAft>
-            </a:pPr>
-            <a:r>
-              <a:rPr sz="2000" b="1">
-                <a:solidFill>
-                  <a:srgbClr val="006D77"/>
-                </a:solidFill>
-              </a:rPr>
-              <a:t>• </a:t>
-            </a:r>
-            <a:r>
-              <a:rPr sz="2000" b="0">
-                <a:solidFill>
-                  <a:srgbClr val="1F2D3A"/>
-                </a:solidFill>
-              </a:rPr>
-              <a:t>Guide and code version differ.</a:t>
-            </a:r>
-          </a:p>
-          <a:p>
-            <a:pPr>
-              <a:spcAft>
-                <a:spcPts val="300"/>
-              </a:spcAft>
-            </a:pPr>
-            <a:r>
-              <a:rPr sz="2000" b="1">
-                <a:solidFill>
-                  <a:srgbClr val="006D77"/>
-                </a:solidFill>
-              </a:rPr>
-              <a:t>• </a:t>
-            </a:r>
-            <a:r>
-              <a:rPr sz="2000" b="0">
-                <a:solidFill>
-                  <a:srgbClr val="1F2D3A"/>
-                </a:solidFill>
-              </a:rPr>
-              <a:t>"Done" without evidence.</a:t>
-            </a:r>
-          </a:p>
-          <a:p>
-            <a:pPr>
-              <a:spcAft>
-                <a:spcPts val="300"/>
-              </a:spcAft>
-            </a:pPr>
-            <a:r>
-              <a:rPr sz="2000" b="1">
-                <a:solidFill>
-                  <a:srgbClr val="006D77"/>
-                </a:solidFill>
-              </a:rPr>
-              <a:t>• </a:t>
-            </a:r>
-            <a:r>
-              <a:rPr sz="2000" b="0">
-                <a:solidFill>
-                  <a:srgbClr val="1F2D3A"/>
-                </a:solidFill>
-              </a:rPr>
-              <a:t>Live demo crashes (no backup).</a:t>
-            </a:r>
-          </a:p>
-          <a:p>
-            <a:pPr>
-              <a:spcAft>
-                <a:spcPts val="300"/>
-              </a:spcAft>
-            </a:pPr>
-            <a:r>
-              <a:rPr sz="2000" b="1">
-                <a:solidFill>
-                  <a:srgbClr val="006D77"/>
-                </a:solidFill>
-              </a:rPr>
-              <a:t>• </a:t>
-            </a:r>
-            <a:r>
-              <a:rPr sz="2000" b="0">
-                <a:solidFill>
-                  <a:srgbClr val="1F2D3A"/>
-                </a:solidFill>
-              </a:rPr>
-              <a:t>Remaining-risk section is empty.</a:t>
-            </a:r>
-          </a:p>
-          <a:p>
-            <a:pPr>
-              <a:spcAft>
-                <a:spcPts val="300"/>
-              </a:spcAft>
-            </a:pPr>
-            <a:r>
-              <a:rPr sz="2000" b="1">
-                <a:solidFill>
-                  <a:srgbClr val="006D77"/>
-                </a:solidFill>
-              </a:rPr>
-              <a:t>• </a:t>
-            </a:r>
-            <a:r>
-              <a:rPr sz="2000" b="0">
-                <a:solidFill>
-                  <a:srgbClr val="1F2D3A"/>
-                </a:solidFill>
-              </a:rPr>
-              <a:t>Real data in the repo.</a:t>
-            </a:r>
-          </a:p>
-        </p:txBody>
-      </p:sp>
-    </p:spTree>
-  </p:cSld>
-  <p:clrMapOvr>
-    <a:masterClrMapping/>
-  </p:clrMapOvr>
-</p:sld>
-</file>
-
-<file path=ppt/slides/slide39.xml><?xml version="1.0" encoding="utf-8"?>
-<p:sld xmlns:a="http://schemas.openxmlformats.org/drawingml/2006/main" xmlns:p="http://schemas.openxmlformats.org/presentationml/2006/main" xmlns:r="http://schemas.openxmlformats.org/officeDocument/2006/relationships">
-  <p:cSld>
-    <p:spTree>
-      <p:nvGrpSpPr>
-        <p:cNvPr id="1" name=""/>
-        <p:cNvGrpSpPr/>
-        <p:nvPr/>
-      </p:nvGrpSpPr>
-      <p:grpSpPr/>
-      <p:pic>
-        <p:nvPicPr>
-          <p:cNvPr id="2" name="Picture 1" descr="rteu_logo_kucuk.jpg"/>
-          <p:cNvPicPr>
-            <a:picLocks noChangeAspect="1"/>
-          </p:cNvPicPr>
-          <p:nvPr/>
-        </p:nvPicPr>
-        <p:blipFill>
-          <a:blip r:embed="rId2"/>
-          <a:stretch>
-            <a:fillRect/>
-          </a:stretch>
-        </p:blipFill>
-        <p:spPr>
-          <a:xfrm>
-            <a:off x="640080" y="164592"/>
-            <a:ext cx="242773" cy="329184"/>
-          </a:xfrm>
-          <a:prstGeom prst="rect">
-            <a:avLst/>
-          </a:prstGeom>
-        </p:spPr>
-      </p:pic>
-      <p:sp>
-        <p:nvSpPr>
-          <p:cNvPr id="3" name="TextBox 2"/>
-          <p:cNvSpPr txBox="1"/>
-          <p:nvPr/>
-        </p:nvSpPr>
-        <p:spPr>
-          <a:xfrm>
-            <a:off x="1051560" y="182880"/>
-            <a:ext cx="7315200" cy="320040"/>
-          </a:xfrm>
-          <a:prstGeom prst="rect">
-            <a:avLst/>
-          </a:prstGeom>
-          <a:noFill/>
-        </p:spPr>
-        <p:txBody>
-          <a:bodyPr wrap="square" lIns="45720" rIns="45720">
-            <a:spAutoFit/>
-          </a:bodyPr>
-          <a:lstStyle/>
-          <a:p>
-            <a:r>
-              <a:rPr sz="1100" b="0">
-                <a:solidFill>
-                  <a:srgbClr val="5B6770"/>
-                </a:solidFill>
-              </a:rPr>
-              <a:t>CEN429 Secure Programming · Week 7</a:t>
-            </a:r>
-          </a:p>
-        </p:txBody>
-      </p:sp>
-      <p:sp>
-        <p:nvSpPr>
-          <p:cNvPr id="4" name="TextBox 3"/>
-          <p:cNvSpPr txBox="1"/>
-          <p:nvPr/>
-        </p:nvSpPr>
-        <p:spPr>
-          <a:xfrm>
-            <a:off x="640080" y="6446520"/>
-            <a:ext cx="7315200" cy="274320"/>
-          </a:xfrm>
-          <a:prstGeom prst="rect">
-            <a:avLst/>
-          </a:prstGeom>
-          <a:noFill/>
-        </p:spPr>
-        <p:txBody>
-          <a:bodyPr wrap="square" lIns="45720" rIns="45720">
-            <a:spAutoFit/>
-          </a:bodyPr>
-          <a:lstStyle/>
-          <a:p>
-            <a:r>
-              <a:rPr sz="1000" b="0">
-                <a:solidFill>
-                  <a:srgbClr val="5B6770"/>
-                </a:solidFill>
-              </a:rPr>
-              <a:t>RTEU Computer Engineering · 2026-2027 Fall</a:t>
-            </a:r>
-          </a:p>
-        </p:txBody>
-      </p:sp>
-      <p:sp>
-        <p:nvSpPr>
-          <p:cNvPr id="5" name="TextBox 4"/>
-          <p:cNvSpPr txBox="1"/>
-          <p:nvPr/>
-        </p:nvSpPr>
-        <p:spPr>
-          <a:xfrm>
-            <a:off x="10637215" y="6446520"/>
-            <a:ext cx="914400" cy="274320"/>
-          </a:xfrm>
-          <a:prstGeom prst="rect">
-            <a:avLst/>
-          </a:prstGeom>
-          <a:noFill/>
-        </p:spPr>
-        <p:txBody>
-          <a:bodyPr wrap="square" lIns="45720" rIns="45720">
-            <a:spAutoFit/>
-          </a:bodyPr>
-          <a:lstStyle/>
-          <a:p>
-            <a:pPr algn="r"/>
-            <a:r>
-              <a:rPr sz="1000" b="0">
-                <a:solidFill>
-                  <a:srgbClr val="5B6770"/>
-                </a:solidFill>
-              </a:rPr>
-              <a:t>39</a:t>
-            </a:r>
-          </a:p>
-        </p:txBody>
-      </p:sp>
-      <p:sp>
-        <p:nvSpPr>
-          <p:cNvPr id="6" name="TextBox 5"/>
-          <p:cNvSpPr txBox="1"/>
-          <p:nvPr/>
-        </p:nvSpPr>
-        <p:spPr>
-          <a:xfrm>
-            <a:off x="640080" y="548640"/>
-            <a:ext cx="10911535" cy="731520"/>
-          </a:xfrm>
-          <a:prstGeom prst="rect">
-            <a:avLst/>
-          </a:prstGeom>
-          <a:noFill/>
-        </p:spPr>
-        <p:txBody>
-          <a:bodyPr wrap="square" lIns="45720" rIns="45720" anchor="ctr">
-            <a:spAutoFit/>
-          </a:bodyPr>
-          <a:lstStyle/>
-          <a:p>
-            <a:r>
-              <a:rPr sz="3000" b="1">
-                <a:solidFill>
-                  <a:srgbClr val="006D77"/>
-                </a:solidFill>
-              </a:rPr>
-              <a:t>Final Word (RAP1)</a:t>
-            </a:r>
-          </a:p>
-        </p:txBody>
-      </p:sp>
-      <p:sp>
-        <p:nvSpPr>
-          <p:cNvPr id="7" name="Rectangle 6"/>
-          <p:cNvSpPr/>
-          <p:nvPr/>
-        </p:nvSpPr>
-        <p:spPr>
-          <a:xfrm>
-            <a:off x="640080" y="1325880"/>
-            <a:ext cx="10911535" cy="934719"/>
-          </a:xfrm>
-          <a:prstGeom prst="rect">
-            <a:avLst/>
-          </a:prstGeom>
-          <a:solidFill>
-            <a:srgbClr val="EEF7F8"/>
-          </a:solidFill>
-          <a:ln>
-            <a:solidFill>
-              <a:srgbClr val="006D77"/>
-            </a:solidFill>
-          </a:ln>
-        </p:spPr>
-        <p:style>
-          <a:lnRef idx="1">
-            <a:schemeClr val="accent1"/>
-          </a:lnRef>
-          <a:fillRef idx="3">
-            <a:schemeClr val="accent1"/>
-          </a:fillRef>
-          <a:effectRef idx="2">
-            <a:schemeClr val="accent1"/>
-          </a:effectRef>
-          <a:fontRef idx="minor">
-            <a:schemeClr val="lt1"/>
-          </a:fontRef>
-        </p:style>
-        <p:txBody>
-          <a:bodyPr rtlCol="0" anchor="ctr" wrap="square" lIns="182880"/>
-          <a:lstStyle/>
-          <a:p>
-            <a:pPr algn="l"/>
-            <a:r>
-              <a:rPr sz="2000" b="0">
-                <a:solidFill>
-                  <a:srgbClr val="1F2D3A"/>
-                </a:solidFill>
-              </a:rPr>
-              <a:t>A demonstration is a presentation of </a:t>
-            </a:r>
-            <a:r>
-              <a:rPr sz="2000" b="1">
-                <a:solidFill>
-                  <a:srgbClr val="1F2D3A"/>
-                </a:solidFill>
-              </a:rPr>
-              <a:t>evidence</a:t>
-            </a:r>
-            <a:r>
-              <a:rPr sz="2000" b="0">
-                <a:solidFill>
-                  <a:srgbClr val="1F2D3A"/>
-                </a:solidFill>
-              </a:rPr>
-              <a:t>: every claim should be backed by a document, a test, or live output.</a:t>
-            </a:r>
-          </a:p>
-        </p:txBody>
-      </p:sp>
-      <p:sp>
-        <p:nvSpPr>
-          <p:cNvPr id="8" name="TextBox 7"/>
-          <p:cNvSpPr txBox="1"/>
-          <p:nvPr/>
-        </p:nvSpPr>
-        <p:spPr>
-          <a:xfrm>
-            <a:off x="640080" y="2370328"/>
-            <a:ext cx="10911535" cy="439928"/>
-          </a:xfrm>
-          <a:prstGeom prst="rect">
-            <a:avLst/>
-          </a:prstGeom>
-          <a:noFill/>
-        </p:spPr>
-        <p:txBody>
-          <a:bodyPr wrap="square" lIns="45720" rIns="45720">
-            <a:spAutoFit/>
-          </a:bodyPr>
-          <a:lstStyle/>
-          <a:p>
-            <a:pPr algn="l"/>
-            <a:r>
-              <a:rPr sz="2000" b="0">
-                <a:solidFill>
-                  <a:srgbClr val="1F2D3A"/>
-                </a:solidFill>
-              </a:rPr>
-              <a:t>Midterm feedback becomes a </a:t>
-            </a:r>
-            <a:r>
-              <a:rPr sz="2000" b="1">
-                <a:solidFill>
-                  <a:srgbClr val="1F2D3A"/>
-                </a:solidFill>
-              </a:rPr>
-              <a:t>finding–action</a:t>
-            </a:r>
-            <a:r>
-              <a:rPr sz="2000" b="0">
-                <a:solidFill>
-                  <a:srgbClr val="1F2D3A"/>
-                </a:solidFill>
-              </a:rPr>
-              <a:t> list at the final.</a:t>
+              <a:t>Evidence = the relevant guide section + code + test output; show at least one control for every threat.</a:t>
             </a:r>
           </a:p>
         </p:txBody>
@@ -12751,8 +6933,8 @@
         </p:blipFill>
         <p:spPr>
           <a:xfrm>
-            <a:off x="2046645" y="1325880"/>
-            <a:ext cx="8098404" cy="3210484"/>
+            <a:off x="640080" y="1325880"/>
+            <a:ext cx="10911535" cy="2397791"/>
           </a:xfrm>
           <a:prstGeom prst="rect">
             <a:avLst/>
@@ -13352,8 +7534,8 @@
         </p:blipFill>
         <p:spPr>
           <a:xfrm>
-            <a:off x="2046645" y="1325880"/>
-            <a:ext cx="8098404" cy="3778947"/>
+            <a:off x="1907058" y="1325880"/>
+            <a:ext cx="8377579" cy="4828032"/>
           </a:xfrm>
           <a:prstGeom prst="rect">
             <a:avLst/>
@@ -13554,8 +7736,8 @@
                 <a:tableStyleId>{5C22544A-7EE6-4342-B048-85BDC9FD1C3A}</a:tableStyleId>
               </a:tblPr>
               <a:tblGrid>
-                <a:gridCol w="1015026"/>
-                <a:gridCol w="9896508"/>
+                <a:gridCol w="918866"/>
+                <a:gridCol w="9992668"/>
               </a:tblGrid>
               <a:tr h="404426">
                 <a:tc>
@@ -13634,7 +7816,7 @@
                             <a:srgbClr val="1F2D3A"/>
                           </a:solidFill>
                         </a:rPr>
-                        <a:t>Repo + plan · S2 · S3 interface table · S4 STRIDE + attack tree · S5 draft</a:t>
+                        <a:t>Repo + plan · S2 · S3 interface table · S4 STRIDE + attack tree · S5 draft (C/I/I+)</a:t>
                       </a:r>
                     </a:p>
                   </a:txBody>
@@ -14034,7 +8216,7 @@
           <a:lstStyle/>
           <a:p>
             <a:r>
-              <a:rPr sz="3000" b="1">
+              <a:rPr sz="2600" b="1">
                 <a:solidFill>
                   <a:srgbClr val="006D77"/>
                 </a:solidFill>
@@ -14053,7 +8235,7 @@
         <p:spPr>
           <a:xfrm>
             <a:off x="640080" y="1325880"/>
-            <a:ext cx="10911535" cy="1971040"/>
+            <a:ext cx="10911535" cy="2103120"/>
           </a:xfrm>
           <a:prstGeom prst="rect">
             <a:avLst/>
@@ -14072,7 +8254,7 @@
               </a:spcAft>
             </a:pPr>
             <a:r>
-              <a:rPr sz="2000" b="1">
+              <a:rPr sz="1800" b="1">
                 <a:solidFill>
                   <a:srgbClr val="006D77"/>
                 </a:solidFill>
@@ -14080,7 +8262,7 @@
               <a:t>1. </a:t>
             </a:r>
             <a:r>
-              <a:rPr sz="2000" b="1">
+              <a:rPr sz="1800" b="1">
                 <a:solidFill>
                   <a:srgbClr val="1F2D3A"/>
                 </a:solidFill>
@@ -14088,12 +8270,12 @@
               <a:t>Product and architecture</a:t>
             </a:r>
             <a:r>
-              <a:rPr sz="2000" b="0">
+              <a:rPr sz="1800" b="0">
                 <a:solidFill>
                   <a:srgbClr val="1F2D3A"/>
                 </a:solidFill>
               </a:rPr>
-              <a:t> (S2–S3): one diagram, trust boundaries</a:t>
+              <a:t> (S2–S3, ~2 min): one diagram, trust boundaries</a:t>
             </a:r>
           </a:p>
           <a:p>
@@ -14103,7 +8285,7 @@
               </a:spcAft>
             </a:pPr>
             <a:r>
-              <a:rPr sz="2000" b="1">
+              <a:rPr sz="1800" b="1">
                 <a:solidFill>
                   <a:srgbClr val="006D77"/>
                 </a:solidFill>
@@ -14111,7 +8293,7 @@
               <a:t>2. </a:t>
             </a:r>
             <a:r>
-              <a:rPr sz="2000" b="1">
+              <a:rPr sz="1800" b="1">
                 <a:solidFill>
                   <a:srgbClr val="1F2D3A"/>
                 </a:solidFill>
@@ -14119,12 +8301,12 @@
               <a:t>Threats and assets</a:t>
             </a:r>
             <a:r>
-              <a:rPr sz="2000" b="0">
+              <a:rPr sz="1800" b="0">
                 <a:solidFill>
                   <a:srgbClr val="1F2D3A"/>
                 </a:solidFill>
               </a:rPr>
-              <a:t> (S4–S5): the three most critical threats</a:t>
+              <a:t> (S4–S5): the three most critical threats, a control for each</a:t>
             </a:r>
           </a:p>
           <a:p>
@@ -14134,7 +8316,7 @@
               </a:spcAft>
             </a:pPr>
             <a:r>
-              <a:rPr sz="2000" b="1">
+              <a:rPr sz="1800" b="1">
                 <a:solidFill>
                   <a:srgbClr val="006D77"/>
                 </a:solidFill>
@@ -14142,7 +8324,7 @@
               <a:t>3. </a:t>
             </a:r>
             <a:r>
-              <a:rPr sz="2000" b="1">
+              <a:rPr sz="1800" b="1">
                 <a:solidFill>
                   <a:srgbClr val="1F2D3A"/>
                 </a:solidFill>
@@ -14150,7 +8332,7 @@
               <a:t>Live demonstration:</a:t>
             </a:r>
             <a:r>
-              <a:rPr sz="2000" b="0">
+              <a:rPr sz="1800" b="0">
                 <a:solidFill>
                   <a:srgbClr val="1F2D3A"/>
                 </a:solidFill>
@@ -14158,12 +8340,20 @@
               <a:t> at least one control </a:t>
             </a:r>
             <a:r>
-              <a:rPr sz="2000" b="1">
+              <a:rPr sz="1800" b="1">
                 <a:solidFill>
                   <a:srgbClr val="1F2D3A"/>
                 </a:solidFill>
               </a:rPr>
               <a:t>working live</a:t>
+            </a:r>
+            <a:r>
+              <a:rPr sz="1800" b="0">
+                <a:solidFill>
+                  <a:srgbClr val="1F2D3A"/>
+                </a:solidFill>
+              </a:rPr>
+              <a:t> (e.g. encrypted data, signature verification, a RASP trigger) — backup video + commands ready</a:t>
             </a:r>
           </a:p>
           <a:p>
@@ -14173,7 +8363,7 @@
               </a:spcAft>
             </a:pPr>
             <a:r>
-              <a:rPr sz="2000" b="1">
+              <a:rPr sz="1800" b="1">
                 <a:solidFill>
                   <a:srgbClr val="006D77"/>
                 </a:solidFill>
@@ -14181,7 +8371,7 @@
               <a:t>4. </a:t>
             </a:r>
             <a:r>
-              <a:rPr sz="2000" b="1">
+              <a:rPr sz="1800" b="1">
                 <a:solidFill>
                   <a:srgbClr val="1F2D3A"/>
                 </a:solidFill>
@@ -14189,7 +8379,7 @@
               <a:t>Evidence:</a:t>
             </a:r>
             <a:r>
-              <a:rPr sz="2000" b="0">
+              <a:rPr sz="1800" b="0">
                 <a:solidFill>
                   <a:srgbClr val="1F2D3A"/>
                 </a:solidFill>
@@ -14204,7 +8394,7 @@
               </a:spcAft>
             </a:pPr>
             <a:r>
-              <a:rPr sz="2000" b="1">
+              <a:rPr sz="1800" b="1">
                 <a:solidFill>
                   <a:srgbClr val="006D77"/>
                 </a:solidFill>
@@ -14212,7 +8402,7 @@
               <a:t>5. </a:t>
             </a:r>
             <a:r>
-              <a:rPr sz="2000" b="1">
+              <a:rPr sz="1800" b="1">
                 <a:solidFill>
                   <a:srgbClr val="1F2D3A"/>
                 </a:solidFill>
@@ -14220,12 +8410,12 @@
               <a:t>Remaining risk and plan:</a:t>
             </a:r>
             <a:r>
-              <a:rPr sz="2000" b="0">
+              <a:rPr sz="1800" b="0">
                 <a:solidFill>
                   <a:srgbClr val="1F2D3A"/>
                 </a:solidFill>
               </a:rPr>
-              <a:t> what remains before the final?</a:t>
+              <a:t> what remains before the final? (honest analysis earns points)</a:t>
             </a:r>
           </a:p>
         </p:txBody>
@@ -14238,8 +8428,8 @@
         </p:nvSpPr>
         <p:spPr>
           <a:xfrm>
-            <a:off x="640080" y="3406648"/>
-            <a:ext cx="10911535" cy="439928"/>
+            <a:off x="640080" y="3538728"/>
+            <a:ext cx="10911535" cy="406908"/>
           </a:xfrm>
           <a:prstGeom prst="rect">
             <a:avLst/>
@@ -14254,7 +8444,7 @@
           <a:p>
             <a:pPr algn="l"/>
             <a:r>
-              <a:rPr sz="2000" b="0">
+              <a:rPr sz="1800" b="0">
                 <a:solidFill>
                   <a:srgbClr val="1F2D3A"/>
                 </a:solidFill>
@@ -14262,7 +8452,7 @@
               <a:t>For every control: </a:t>
             </a:r>
             <a:r>
-              <a:rPr sz="2000" b="1">
+              <a:rPr sz="1800" b="1">
                 <a:solidFill>
                   <a:srgbClr val="1F2D3A"/>
                 </a:solidFill>
@@ -14463,8 +8653,8 @@
         </p:blipFill>
         <p:spPr>
           <a:xfrm>
-            <a:off x="2046645" y="1325880"/>
-            <a:ext cx="8098404" cy="3864472"/>
+            <a:off x="640080" y="1325880"/>
+            <a:ext cx="10911535" cy="2216477"/>
           </a:xfrm>
           <a:prstGeom prst="rect">
             <a:avLst/>
